--- a/AUDA_Project_Presentation.pptx
+++ b/AUDA_Project_Presentation.pptx
@@ -22,6 +22,11 @@
     <p:sldId id="270" r:id="rId21"/>
     <p:sldId id="271" r:id="rId22"/>
     <p:sldId id="272" r:id="rId23"/>
+    <p:sldId id="273" r:id="rId24"/>
+    <p:sldId id="274" r:id="rId25"/>
+    <p:sldId id="275" r:id="rId26"/>
+    <p:sldId id="276" r:id="rId27"/>
+    <p:sldId id="277" r:id="rId28"/>
   </p:sldIdLst>
   <p:sldSz cx="12191695" cy="6858000" type="screen4x3"/>
   <p:notesSz cx="6858000" cy="9144000"/>
@@ -3302,320 +3307,21 @@
                 </a:solidFill>
                 <a:latin typeface="Calibri"/>
               </a:rPr>
-              <a:t>Three Real Bugs Found &amp; Fixed</a:t>
-            </a:r>
-          </a:p>
-        </p:txBody>
-      </p:sp>
-      <p:graphicFrame>
-        <p:nvGraphicFramePr>
-          <p:cNvPr id="4" name="Table 3"/>
-          <p:cNvGraphicFramePr>
-            <a:graphicFrameLocks noGrp="1"/>
-          </p:cNvGraphicFramePr>
-          <p:nvPr/>
-        </p:nvGraphicFramePr>
-        <p:xfrm>
-          <a:off x="640080" y="1417320"/>
-          <a:ext cx="10972800" cy="2926080"/>
-        </p:xfrm>
-        <a:graphic>
-          <a:graphicData uri="http://schemas.openxmlformats.org/drawingml/2006/table">
-            <a:tbl>
-              <a:tblPr firstRow="1" bandRow="1">
-                <a:tableStyleId>{5C22544A-7EE6-4342-B048-85BDC9FD1C3A}</a:tableStyleId>
-              </a:tblPr>
-              <a:tblGrid>
-                <a:gridCol w="3474720"/>
-                <a:gridCol w="4206240"/>
-                <a:gridCol w="3291840"/>
-              </a:tblGrid>
-              <a:tr h="731520">
-                <a:tc>
-                  <a:txBody>
-                    <a:bodyPr wrap="square"/>
-                    <a:lstStyle/>
-                    <a:p>
-                      <a:r>
-                        <a:rPr sz="1400" b="1">
-                          <a:solidFill>
-                            <a:srgbClr val="FFFFFF"/>
-                          </a:solidFill>
-                          <a:latin typeface="Calibri"/>
-                        </a:rPr>
-                        <a:t>Bug</a:t>
-                      </a:r>
-                    </a:p>
-                  </a:txBody>
-                  <a:tcPr marL="54864" marR="54864" marT="18288" marB="18288">
-                    <a:solidFill>
-                      <a:srgbClr val="1B263B"/>
-                    </a:solidFill>
-                  </a:tcPr>
-                </a:tc>
-                <a:tc>
-                  <a:txBody>
-                    <a:bodyPr wrap="square"/>
-                    <a:lstStyle/>
-                    <a:p>
-                      <a:r>
-                        <a:rPr sz="1400" b="1">
-                          <a:solidFill>
-                            <a:srgbClr val="FFFFFF"/>
-                          </a:solidFill>
-                          <a:latin typeface="Calibri"/>
-                        </a:rPr>
-                        <a:t>Effect</a:t>
-                      </a:r>
-                    </a:p>
-                  </a:txBody>
-                  <a:tcPr marL="54864" marR="54864" marT="18288" marB="18288">
-                    <a:solidFill>
-                      <a:srgbClr val="1B263B"/>
-                    </a:solidFill>
-                  </a:tcPr>
-                </a:tc>
-                <a:tc>
-                  <a:txBody>
-                    <a:bodyPr wrap="square"/>
-                    <a:lstStyle/>
-                    <a:p>
-                      <a:r>
-                        <a:rPr sz="1400" b="1">
-                          <a:solidFill>
-                            <a:srgbClr val="FFFFFF"/>
-                          </a:solidFill>
-                          <a:latin typeface="Calibri"/>
-                        </a:rPr>
-                        <a:t>Example fix</a:t>
-                      </a:r>
-                    </a:p>
-                  </a:txBody>
-                  <a:tcPr marL="54864" marR="54864" marT="18288" marB="18288">
-                    <a:solidFill>
-                      <a:srgbClr val="1B263B"/>
-                    </a:solidFill>
-                  </a:tcPr>
-                </a:tc>
-              </a:tr>
-              <a:tr h="731520">
-                <a:tc>
-                  <a:txBody>
-                    <a:bodyPr wrap="square"/>
-                    <a:lstStyle/>
-                    <a:p>
-                      <a:r>
-                        <a:rPr sz="1400">
-                          <a:solidFill>
-                            <a:srgbClr val="1B263B"/>
-                          </a:solidFill>
-                          <a:latin typeface="Calibri"/>
-                        </a:rPr>
-                        <a:t>Label misalignment after row-drop</a:t>
-                      </a:r>
-                    </a:p>
-                  </a:txBody>
-                  <a:tcPr marL="54864" marR="54864" marT="18288" marB="18288">
-                    <a:solidFill>
-                      <a:srgbClr val="FFFFFF"/>
-                    </a:solidFill>
-                  </a:tcPr>
-                </a:tc>
-                <a:tc>
-                  <a:txBody>
-                    <a:bodyPr wrap="square"/>
-                    <a:lstStyle/>
-                    <a:p>
-                      <a:r>
-                        <a:rPr sz="1400">
-                          <a:solidFill>
-                            <a:srgbClr val="1B263B"/>
-                          </a:solidFill>
-                          <a:latin typeface="Calibri"/>
-                        </a:rPr>
-                        <a:t>Training labels scrambled when AUDA dropped rows</a:t>
-                      </a:r>
-                    </a:p>
-                  </a:txBody>
-                  <a:tcPr marL="54864" marR="54864" marT="18288" marB="18288">
-                    <a:solidFill>
-                      <a:srgbClr val="FFFFFF"/>
-                    </a:solidFill>
-                  </a:tcPr>
-                </a:tc>
-                <a:tc>
-                  <a:txBody>
-                    <a:bodyPr wrap="square"/>
-                    <a:lstStyle/>
-                    <a:p>
-                      <a:r>
-                        <a:rPr sz="1400">
-                          <a:solidFill>
-                            <a:srgbClr val="1B263B"/>
-                          </a:solidFill>
-                          <a:latin typeface="Calibri"/>
-                        </a:rPr>
-                        <a:t>flight_delay RF  −0.35 → 0.00</a:t>
-                      </a:r>
-                    </a:p>
-                  </a:txBody>
-                  <a:tcPr marL="54864" marR="54864" marT="18288" marB="18288">
-                    <a:solidFill>
-                      <a:srgbClr val="FFFFFF"/>
-                    </a:solidFill>
-                  </a:tcPr>
-                </a:tc>
-              </a:tr>
-              <a:tr h="731520">
-                <a:tc>
-                  <a:txBody>
-                    <a:bodyPr wrap="square"/>
-                    <a:lstStyle/>
-                    <a:p>
-                      <a:r>
-                        <a:rPr sz="1400">
-                          <a:solidFill>
-                            <a:srgbClr val="1B263B"/>
-                          </a:solidFill>
-                          <a:latin typeface="Calibri"/>
-                        </a:rPr>
-                        <a:t>Missing target became a junk class</a:t>
-                      </a:r>
-                    </a:p>
-                  </a:txBody>
-                  <a:tcPr marL="54864" marR="54864" marT="18288" marB="18288">
-                    <a:solidFill>
-                      <a:srgbClr val="ECF0F3"/>
-                    </a:solidFill>
-                  </a:tcPr>
-                </a:tc>
-                <a:tc>
-                  <a:txBody>
-                    <a:bodyPr wrap="square"/>
-                    <a:lstStyle/>
-                    <a:p>
-                      <a:r>
-                        <a:rPr sz="1400">
-                          <a:solidFill>
-                            <a:srgbClr val="1B263B"/>
-                          </a:solidFill>
-                          <a:latin typeface="Calibri"/>
-                        </a:rPr>
-                        <a:t>Models trained to predict "missing"</a:t>
-                      </a:r>
-                    </a:p>
-                  </a:txBody>
-                  <a:tcPr marL="54864" marR="54864" marT="18288" marB="18288">
-                    <a:solidFill>
-                      <a:srgbClr val="ECF0F3"/>
-                    </a:solidFill>
-                  </a:tcPr>
-                </a:tc>
-                <a:tc>
-                  <a:txBody>
-                    <a:bodyPr wrap="square"/>
-                    <a:lstStyle/>
-                    <a:p>
-                      <a:r>
-                        <a:rPr sz="1400">
-                          <a:solidFill>
-                            <a:srgbClr val="1B263B"/>
-                          </a:solidFill>
-                          <a:latin typeface="Calibri"/>
-                        </a:rPr>
-                        <a:t>weatheraus RF  −0.13 → −0.01</a:t>
-                      </a:r>
-                    </a:p>
-                  </a:txBody>
-                  <a:tcPr marL="54864" marR="54864" marT="18288" marB="18288">
-                    <a:solidFill>
-                      <a:srgbClr val="ECF0F3"/>
-                    </a:solidFill>
-                  </a:tcPr>
-                </a:tc>
-              </a:tr>
-              <a:tr h="731520">
-                <a:tc>
-                  <a:txBody>
-                    <a:bodyPr wrap="square"/>
-                    <a:lstStyle/>
-                    <a:p>
-                      <a:r>
-                        <a:rPr sz="1400">
-                          <a:solidFill>
-                            <a:srgbClr val="1B263B"/>
-                          </a:solidFill>
-                          <a:latin typeface="Calibri"/>
-                        </a:rPr>
-                        <a:t>Continuous floats dropped as 'IDs' (library)</a:t>
-                      </a:r>
-                    </a:p>
-                  </a:txBody>
-                  <a:tcPr marL="54864" marR="54864" marT="18288" marB="18288">
-                    <a:solidFill>
-                      <a:srgbClr val="FFFFFF"/>
-                    </a:solidFill>
-                  </a:tcPr>
-                </a:tc>
-                <a:tc>
-                  <a:txBody>
-                    <a:bodyPr wrap="square"/>
-                    <a:lstStyle/>
-                    <a:p>
-                      <a:r>
-                        <a:rPr sz="1400">
-                          <a:solidFill>
-                            <a:srgbClr val="1B263B"/>
-                          </a:solidFill>
-                          <a:latin typeface="Calibri"/>
-                        </a:rPr>
-                        <a:t>Deleted predictive features on small data</a:t>
-                      </a:r>
-                    </a:p>
-                  </a:txBody>
-                  <a:tcPr marL="54864" marR="54864" marT="18288" marB="18288">
-                    <a:solidFill>
-                      <a:srgbClr val="FFFFFF"/>
-                    </a:solidFill>
-                  </a:tcPr>
-                </a:tc>
-                <a:tc>
-                  <a:txBody>
-                    <a:bodyPr wrap="square"/>
-                    <a:lstStyle/>
-                    <a:p>
-                      <a:r>
-                        <a:rPr sz="1400">
-                          <a:solidFill>
-                            <a:srgbClr val="1B263B"/>
-                          </a:solidFill>
-                          <a:latin typeface="Calibri"/>
-                        </a:rPr>
-                        <a:t>vertebral RF  −0.056 → 0.00</a:t>
-                      </a:r>
-                    </a:p>
-                  </a:txBody>
-                  <a:tcPr marL="54864" marR="54864" marT="18288" marB="18288">
-                    <a:solidFill>
-                      <a:srgbClr val="FFFFFF"/>
-                    </a:solidFill>
-                  </a:tcPr>
-                </a:tc>
-              </a:tr>
-            </a:tbl>
-          </a:graphicData>
-        </a:graphic>
-      </p:graphicFrame>
-      <p:sp>
-        <p:nvSpPr>
-          <p:cNvPr id="5" name="TextBox 4"/>
+              <a:t>The Experiment — How We Measure "Better"</a:t>
+            </a:r>
+          </a:p>
+        </p:txBody>
+      </p:sp>
+      <p:sp>
+        <p:nvSpPr>
+          <p:cNvPr id="4" name="TextBox 3"/>
           <p:cNvSpPr txBox="1"/>
           <p:nvPr/>
         </p:nvSpPr>
         <p:spPr>
           <a:xfrm>
-            <a:off x="640080" y="6309360"/>
-            <a:ext cx="10972800" cy="457200"/>
+            <a:off x="640080" y="1371600"/>
+            <a:ext cx="10972800" cy="4937760"/>
           </a:xfrm>
           <a:prstGeom prst="rect">
             <a:avLst/>
@@ -3628,13 +3334,131 @@
           </a:bodyPr>
           <a:lstStyle/>
           <a:p>
-            <a:r>
-              <a:rPr sz="1200" i="1">
-                <a:solidFill>
-                  <a:srgbClr val="555F6B"/>
-                </a:solidFill>
-              </a:rPr>
-              <a:t>Two were measurement bugs (made AUDA look worse); the third was a genuine AUDA library bug — now improved.</a:t>
+            <a:pPr>
+              <a:spcAft>
+                <a:spcPts val="900"/>
+              </a:spcAft>
+            </a:pPr>
+            <a:r>
+              <a:rPr sz="1800" b="0">
+                <a:solidFill>
+                  <a:srgbClr val="1B263B"/>
+                </a:solidFill>
+                <a:latin typeface="Calibri"/>
+              </a:rPr>
+              <a:t>•  For each dataset: 80/20 train-test split, stratified.</a:t>
+            </a:r>
+          </a:p>
+          <a:p>
+            <a:pPr>
+              <a:spcAft>
+                <a:spcPts val="900"/>
+              </a:spcAft>
+            </a:pPr>
+            <a:r>
+              <a:rPr sz="1800" b="0">
+                <a:solidFill>
+                  <a:srgbClr val="1B263B"/>
+                </a:solidFill>
+                <a:latin typeface="Calibri"/>
+              </a:rPr>
+              <a:t>•  Preprocess two ways: Baseline  vs  AUDA.</a:t>
+            </a:r>
+          </a:p>
+          <a:p>
+            <a:pPr>
+              <a:spcAft>
+                <a:spcPts val="900"/>
+              </a:spcAft>
+            </a:pPr>
+            <a:r>
+              <a:rPr sz="1800" b="0">
+                <a:solidFill>
+                  <a:srgbClr val="1B263B"/>
+                </a:solidFill>
+                <a:latin typeface="Calibri"/>
+              </a:rPr>
+              <a:t>•  Train BOTH RandomForest (tree) and SVM (kernel); compare ROC-AUC.</a:t>
+            </a:r>
+          </a:p>
+          <a:p>
+            <a:pPr>
+              <a:spcAft>
+                <a:spcPts val="900"/>
+              </a:spcAft>
+            </a:pPr>
+            <a:r>
+              <a:rPr sz="1800" b="1">
+                <a:solidFill>
+                  <a:srgbClr val="2E6DB8"/>
+                </a:solidFill>
+                <a:latin typeface="Calibri"/>
+              </a:rPr>
+              <a:t>•  Delta = AUDA AUC − Baseline AUC.   Positive = AUDA better.</a:t>
+            </a:r>
+          </a:p>
+          <a:p>
+            <a:pPr>
+              <a:spcAft>
+                <a:spcPts val="900"/>
+              </a:spcAft>
+            </a:pPr>
+            <a:r>
+              <a:rPr sz="1800" b="1">
+                <a:solidFill>
+                  <a:srgbClr val="27AE60"/>
+                </a:solidFill>
+                <a:latin typeface="Calibri"/>
+              </a:rPr>
+              <a:t>•  Rigor added during this project:</a:t>
+            </a:r>
+          </a:p>
+          <a:p>
+            <a:pPr lvl="1">
+              <a:spcAft>
+                <a:spcPts val="900"/>
+              </a:spcAft>
+            </a:pPr>
+            <a:r>
+              <a:rPr sz="1600" b="0">
+                <a:solidFill>
+                  <a:srgbClr val="1B263B"/>
+                </a:solidFill>
+                <a:latin typeface="Calibri"/>
+              </a:rPr>
+              <a:t>–  5 random seeds per dataset → mean ± std (not one lucky split)</a:t>
+            </a:r>
+          </a:p>
+          <a:p>
+            <a:pPr lvl="1">
+              <a:spcAft>
+                <a:spcPts val="900"/>
+              </a:spcAft>
+            </a:pPr>
+            <a:r>
+              <a:rPr sz="1600" b="0">
+                <a:solidFill>
+                  <a:srgbClr val="1B263B"/>
+                </a:solidFill>
+                <a:latin typeface="Calibri"/>
+              </a:rPr>
+              <a:t>–  Wilcoxon signed-rank test → is the difference statistically real?</a:t>
+            </a:r>
+          </a:p>
+          <a:p>
+            <a:pPr lvl="1">
+              <a:spcAft>
+                <a:spcPts val="900"/>
+              </a:spcAft>
+            </a:pPr>
+            <a:r>
+              <a:rPr sz="1600" b="0">
+                <a:solidFill>
+                  <a:srgbClr val="1B263B"/>
+                </a:solidFill>
+                <a:latin typeface="Calibri"/>
+              </a:rPr>
+              <a:t>–  Fair baseline + duplicate-dataset removal</a:t>
             </a:r>
           </a:p>
         </p:txBody>
@@ -3737,589 +3561,31 @@
                 </a:solidFill>
                 <a:latin typeface="Calibri"/>
               </a:rPr>
-              <a:t>The Results Journey — From False Claim to Truth</a:t>
-            </a:r>
-          </a:p>
-        </p:txBody>
-      </p:sp>
-      <p:graphicFrame>
-        <p:nvGraphicFramePr>
-          <p:cNvPr id="4" name="Table 3"/>
-          <p:cNvGraphicFramePr>
-            <a:graphicFrameLocks noGrp="1"/>
-          </p:cNvGraphicFramePr>
-          <p:nvPr/>
-        </p:nvGraphicFramePr>
-        <p:xfrm>
-          <a:off x="502920" y="1371600"/>
-          <a:ext cx="11247120" cy="3200400"/>
-        </p:xfrm>
-        <a:graphic>
-          <a:graphicData uri="http://schemas.openxmlformats.org/drawingml/2006/table">
-            <a:tbl>
-              <a:tblPr firstRow="1" bandRow="1">
-                <a:tableStyleId>{5C22544A-7EE6-4342-B048-85BDC9FD1C3A}</a:tableStyleId>
-              </a:tblPr>
-              <a:tblGrid>
-                <a:gridCol w="4206240"/>
-                <a:gridCol w="2103120"/>
-                <a:gridCol w="2194560"/>
-                <a:gridCol w="2743200"/>
-              </a:tblGrid>
-              <a:tr h="533400">
-                <a:tc>
-                  <a:txBody>
-                    <a:bodyPr wrap="square"/>
-                    <a:lstStyle/>
-                    <a:p>
-                      <a:r>
-                        <a:rPr sz="1300" b="1">
-                          <a:solidFill>
-                            <a:srgbClr val="FFFFFF"/>
-                          </a:solidFill>
-                          <a:latin typeface="Calibri"/>
-                        </a:rPr>
-                        <a:t>Stage</a:t>
-                      </a:r>
-                    </a:p>
-                  </a:txBody>
-                  <a:tcPr marL="54864" marR="54864" marT="18288" marB="18288">
-                    <a:solidFill>
-                      <a:srgbClr val="1B263B"/>
-                    </a:solidFill>
-                  </a:tcPr>
-                </a:tc>
-                <a:tc>
-                  <a:txBody>
-                    <a:bodyPr wrap="square"/>
-                    <a:lstStyle/>
-                    <a:p>
-                      <a:r>
-                        <a:rPr sz="1300" b="1">
-                          <a:solidFill>
-                            <a:srgbClr val="FFFFFF"/>
-                          </a:solidFill>
-                          <a:latin typeface="Calibri"/>
-                        </a:rPr>
-                        <a:t>SVM mean Δ</a:t>
-                      </a:r>
-                    </a:p>
-                  </a:txBody>
-                  <a:tcPr marL="54864" marR="54864" marT="18288" marB="18288">
-                    <a:solidFill>
-                      <a:srgbClr val="1B263B"/>
-                    </a:solidFill>
-                  </a:tcPr>
-                </a:tc>
-                <a:tc>
-                  <a:txBody>
-                    <a:bodyPr wrap="square"/>
-                    <a:lstStyle/>
-                    <a:p>
-                      <a:r>
-                        <a:rPr sz="1300" b="1">
-                          <a:solidFill>
-                            <a:srgbClr val="FFFFFF"/>
-                          </a:solidFill>
-                          <a:latin typeface="Calibri"/>
-                        </a:rPr>
-                        <a:t>Significant?</a:t>
-                      </a:r>
-                    </a:p>
-                  </a:txBody>
-                  <a:tcPr marL="54864" marR="54864" marT="18288" marB="18288">
-                    <a:solidFill>
-                      <a:srgbClr val="1B263B"/>
-                    </a:solidFill>
-                  </a:tcPr>
-                </a:tc>
-                <a:tc>
-                  <a:txBody>
-                    <a:bodyPr wrap="square"/>
-                    <a:lstStyle/>
-                    <a:p>
-                      <a:r>
-                        <a:rPr sz="1300" b="1">
-                          <a:solidFill>
-                            <a:srgbClr val="FFFFFF"/>
-                          </a:solidFill>
-                          <a:latin typeface="Calibri"/>
-                        </a:rPr>
-                        <a:t>Reality</a:t>
-                      </a:r>
-                    </a:p>
-                  </a:txBody>
-                  <a:tcPr marL="54864" marR="54864" marT="18288" marB="18288">
-                    <a:solidFill>
-                      <a:srgbClr val="1B263B"/>
-                    </a:solidFill>
-                  </a:tcPr>
-                </a:tc>
-              </a:tr>
-              <a:tr h="533400">
-                <a:tc>
-                  <a:txBody>
-                    <a:bodyPr wrap="square"/>
-                    <a:lstStyle/>
-                    <a:p>
-                      <a:r>
-                        <a:rPr sz="1300">
-                          <a:solidFill>
-                            <a:srgbClr val="1B263B"/>
-                          </a:solidFill>
-                          <a:latin typeface="Calibri"/>
-                        </a:rPr>
-                        <a:t>Original (single seed, weak baseline)</a:t>
-                      </a:r>
-                    </a:p>
-                  </a:txBody>
-                  <a:tcPr marL="54864" marR="54864" marT="18288" marB="18288">
-                    <a:solidFill>
-                      <a:srgbClr val="FFFFFF"/>
-                    </a:solidFill>
-                  </a:tcPr>
-                </a:tc>
-                <a:tc>
-                  <a:txBody>
-                    <a:bodyPr wrap="square"/>
-                    <a:lstStyle/>
-                    <a:p>
-                      <a:r>
-                        <a:rPr sz="1300">
-                          <a:solidFill>
-                            <a:srgbClr val="1B263B"/>
-                          </a:solidFill>
-                          <a:latin typeface="Calibri"/>
-                        </a:rPr>
-                        <a:t>+0.051</a:t>
-                      </a:r>
-                    </a:p>
-                  </a:txBody>
-                  <a:tcPr marL="54864" marR="54864" marT="18288" marB="18288">
-                    <a:solidFill>
-                      <a:srgbClr val="FFFFFF"/>
-                    </a:solidFill>
-                  </a:tcPr>
-                </a:tc>
-                <a:tc>
-                  <a:txBody>
-                    <a:bodyPr wrap="square"/>
-                    <a:lstStyle/>
-                    <a:p>
-                      <a:r>
-                        <a:rPr sz="1300">
-                          <a:solidFill>
-                            <a:srgbClr val="1B263B"/>
-                          </a:solidFill>
-                          <a:latin typeface="Calibri"/>
-                        </a:rPr>
-                        <a:t>— (no test)</a:t>
-                      </a:r>
-                    </a:p>
-                  </a:txBody>
-                  <a:tcPr marL="54864" marR="54864" marT="18288" marB="18288">
-                    <a:solidFill>
-                      <a:srgbClr val="FFFFFF"/>
-                    </a:solidFill>
-                  </a:tcPr>
-                </a:tc>
-                <a:tc>
-                  <a:txBody>
-                    <a:bodyPr wrap="square"/>
-                    <a:lstStyle/>
-                    <a:p>
-                      <a:r>
-                        <a:rPr sz="1300">
-                          <a:solidFill>
-                            <a:srgbClr val="1B263B"/>
-                          </a:solidFill>
-                          <a:latin typeface="Calibri"/>
-                        </a:rPr>
-                        <a:t>anecdote</a:t>
-                      </a:r>
-                    </a:p>
-                  </a:txBody>
-                  <a:tcPr marL="54864" marR="54864" marT="18288" marB="18288">
-                    <a:solidFill>
-                      <a:srgbClr val="FFFFFF"/>
-                    </a:solidFill>
-                  </a:tcPr>
-                </a:tc>
-              </a:tr>
-              <a:tr h="533400">
-                <a:tc>
-                  <a:txBody>
-                    <a:bodyPr wrap="square"/>
-                    <a:lstStyle/>
-                    <a:p>
-                      <a:r>
-                        <a:rPr sz="1300">
-                          <a:solidFill>
-                            <a:srgbClr val="1B263B"/>
-                          </a:solidFill>
-                          <a:latin typeface="Calibri"/>
-                        </a:rPr>
-                        <a:t>Multi-seed, weak baseline</a:t>
-                      </a:r>
-                    </a:p>
-                  </a:txBody>
-                  <a:tcPr marL="54864" marR="54864" marT="18288" marB="18288">
-                    <a:solidFill>
-                      <a:srgbClr val="ECF0F3"/>
-                    </a:solidFill>
-                  </a:tcPr>
-                </a:tc>
-                <a:tc>
-                  <a:txBody>
-                    <a:bodyPr wrap="square"/>
-                    <a:lstStyle/>
-                    <a:p>
-                      <a:r>
-                        <a:rPr sz="1300">
-                          <a:solidFill>
-                            <a:srgbClr val="1B263B"/>
-                          </a:solidFill>
-                          <a:latin typeface="Calibri"/>
-                        </a:rPr>
-                        <a:t>+0.030</a:t>
-                      </a:r>
-                    </a:p>
-                  </a:txBody>
-                  <a:tcPr marL="54864" marR="54864" marT="18288" marB="18288">
-                    <a:solidFill>
-                      <a:srgbClr val="ECF0F3"/>
-                    </a:solidFill>
-                  </a:tcPr>
-                </a:tc>
-                <a:tc>
-                  <a:txBody>
-                    <a:bodyPr wrap="square"/>
-                    <a:lstStyle/>
-                    <a:p>
-                      <a:r>
-                        <a:rPr sz="1300">
-                          <a:solidFill>
-                            <a:srgbClr val="1B263B"/>
-                          </a:solidFill>
-                          <a:latin typeface="Calibri"/>
-                        </a:rPr>
-                        <a:t>No (p=0.10)</a:t>
-                      </a:r>
-                    </a:p>
-                  </a:txBody>
-                  <a:tcPr marL="54864" marR="54864" marT="18288" marB="18288">
-                    <a:solidFill>
-                      <a:srgbClr val="ECF0F3"/>
-                    </a:solidFill>
-                  </a:tcPr>
-                </a:tc>
-                <a:tc>
-                  <a:txBody>
-                    <a:bodyPr wrap="square"/>
-                    <a:lstStyle/>
-                    <a:p>
-                      <a:r>
-                        <a:rPr sz="1300">
-                          <a:solidFill>
-                            <a:srgbClr val="1B263B"/>
-                          </a:solidFill>
-                          <a:latin typeface="Calibri"/>
-                        </a:rPr>
-                        <a:t>noise</a:t>
-                      </a:r>
-                    </a:p>
-                  </a:txBody>
-                  <a:tcPr marL="54864" marR="54864" marT="18288" marB="18288">
-                    <a:solidFill>
-                      <a:srgbClr val="ECF0F3"/>
-                    </a:solidFill>
-                  </a:tcPr>
-                </a:tc>
-              </a:tr>
-              <a:tr h="533400">
-                <a:tc>
-                  <a:txBody>
-                    <a:bodyPr wrap="square"/>
-                    <a:lstStyle/>
-                    <a:p>
-                      <a:r>
-                        <a:rPr sz="1300">
-                          <a:solidFill>
-                            <a:srgbClr val="1B263B"/>
-                          </a:solidFill>
-                          <a:latin typeface="Calibri"/>
-                        </a:rPr>
-                        <a:t>+ saturation off, deduplicated</a:t>
-                      </a:r>
-                    </a:p>
-                  </a:txBody>
-                  <a:tcPr marL="54864" marR="54864" marT="18288" marB="18288">
-                    <a:solidFill>
-                      <a:srgbClr val="FFFFFF"/>
-                    </a:solidFill>
-                  </a:tcPr>
-                </a:tc>
-                <a:tc>
-                  <a:txBody>
-                    <a:bodyPr wrap="square"/>
-                    <a:lstStyle/>
-                    <a:p>
-                      <a:r>
-                        <a:rPr sz="1300">
-                          <a:solidFill>
-                            <a:srgbClr val="1B263B"/>
-                          </a:solidFill>
-                          <a:latin typeface="Calibri"/>
-                        </a:rPr>
-                        <a:t>+0.091</a:t>
-                      </a:r>
-                    </a:p>
-                  </a:txBody>
-                  <a:tcPr marL="54864" marR="54864" marT="18288" marB="18288">
-                    <a:solidFill>
-                      <a:srgbClr val="FFFFFF"/>
-                    </a:solidFill>
-                  </a:tcPr>
-                </a:tc>
-                <a:tc>
-                  <a:txBody>
-                    <a:bodyPr wrap="square"/>
-                    <a:lstStyle/>
-                    <a:p>
-                      <a:r>
-                        <a:rPr sz="1300">
-                          <a:solidFill>
-                            <a:srgbClr val="1B263B"/>
-                          </a:solidFill>
-                          <a:latin typeface="Calibri"/>
-                        </a:rPr>
-                        <a:t>Yes (p=0.02)</a:t>
-                      </a:r>
-                    </a:p>
-                  </a:txBody>
-                  <a:tcPr marL="54864" marR="54864" marT="18288" marB="18288">
-                    <a:solidFill>
-                      <a:srgbClr val="FFFFFF"/>
-                    </a:solidFill>
-                  </a:tcPr>
-                </a:tc>
-                <a:tc>
-                  <a:txBody>
-                    <a:bodyPr wrap="square"/>
-                    <a:lstStyle/>
-                    <a:p>
-                      <a:r>
-                        <a:rPr sz="1300">
-                          <a:solidFill>
-                            <a:srgbClr val="1B263B"/>
-                          </a:solidFill>
-                          <a:latin typeface="Calibri"/>
-                        </a:rPr>
-                        <a:t>inflated by weak baseline</a:t>
-                      </a:r>
-                    </a:p>
-                  </a:txBody>
-                  <a:tcPr marL="54864" marR="54864" marT="18288" marB="18288">
-                    <a:solidFill>
-                      <a:srgbClr val="FFFFFF"/>
-                    </a:solidFill>
-                  </a:tcPr>
-                </a:tc>
-              </a:tr>
-              <a:tr h="533400">
-                <a:tc>
-                  <a:txBody>
-                    <a:bodyPr wrap="square"/>
-                    <a:lstStyle/>
-                    <a:p>
-                      <a:r>
-                        <a:rPr sz="1300">
-                          <a:solidFill>
-                            <a:srgbClr val="1B263B"/>
-                          </a:solidFill>
-                          <a:latin typeface="Calibri"/>
-                        </a:rPr>
-                        <a:t>+ FAIR baseline</a:t>
-                      </a:r>
-                    </a:p>
-                  </a:txBody>
-                  <a:tcPr marL="54864" marR="54864" marT="18288" marB="18288">
-                    <a:solidFill>
-                      <a:srgbClr val="ECF0F3"/>
-                    </a:solidFill>
-                  </a:tcPr>
-                </a:tc>
-                <a:tc>
-                  <a:txBody>
-                    <a:bodyPr wrap="square"/>
-                    <a:lstStyle/>
-                    <a:p>
-                      <a:r>
-                        <a:rPr sz="1300">
-                          <a:solidFill>
-                            <a:srgbClr val="1B263B"/>
-                          </a:solidFill>
-                          <a:latin typeface="Calibri"/>
-                        </a:rPr>
-                        <a:t>−0.037</a:t>
-                      </a:r>
-                    </a:p>
-                  </a:txBody>
-                  <a:tcPr marL="54864" marR="54864" marT="18288" marB="18288">
-                    <a:solidFill>
-                      <a:srgbClr val="ECF0F3"/>
-                    </a:solidFill>
-                  </a:tcPr>
-                </a:tc>
-                <a:tc>
-                  <a:txBody>
-                    <a:bodyPr wrap="square"/>
-                    <a:lstStyle/>
-                    <a:p>
-                      <a:r>
-                        <a:rPr sz="1300">
-                          <a:solidFill>
-                            <a:srgbClr val="1B263B"/>
-                          </a:solidFill>
-                          <a:latin typeface="Calibri"/>
-                        </a:rPr>
-                        <a:t>No (p=0.17)</a:t>
-                      </a:r>
-                    </a:p>
-                  </a:txBody>
-                  <a:tcPr marL="54864" marR="54864" marT="18288" marB="18288">
-                    <a:solidFill>
-                      <a:srgbClr val="ECF0F3"/>
-                    </a:solidFill>
-                  </a:tcPr>
-                </a:tc>
-                <a:tc>
-                  <a:txBody>
-                    <a:bodyPr wrap="square"/>
-                    <a:lstStyle/>
-                    <a:p>
-                      <a:r>
-                        <a:rPr sz="1300">
-                          <a:solidFill>
-                            <a:srgbClr val="1B263B"/>
-                          </a:solidFill>
-                          <a:latin typeface="Calibri"/>
-                        </a:rPr>
-                        <a:t>win evaporates</a:t>
-                      </a:r>
-                    </a:p>
-                  </a:txBody>
-                  <a:tcPr marL="54864" marR="54864" marT="18288" marB="18288">
-                    <a:solidFill>
-                      <a:srgbClr val="ECF0F3"/>
-                    </a:solidFill>
-                  </a:tcPr>
-                </a:tc>
-              </a:tr>
-              <a:tr h="533400">
-                <a:tc>
-                  <a:txBody>
-                    <a:bodyPr wrap="square"/>
-                    <a:lstStyle/>
-                    <a:p>
-                      <a:r>
-                        <a:rPr sz="1300">
-                          <a:solidFill>
-                            <a:srgbClr val="1B263B"/>
-                          </a:solidFill>
-                          <a:latin typeface="Calibri"/>
-                        </a:rPr>
-                        <a:t>+ all bugs fixed (FINAL)</a:t>
-                      </a:r>
-                    </a:p>
-                  </a:txBody>
-                  <a:tcPr marL="54864" marR="54864" marT="18288" marB="18288">
-                    <a:solidFill>
-                      <a:srgbClr val="FFFFFF"/>
-                    </a:solidFill>
-                  </a:tcPr>
-                </a:tc>
-                <a:tc>
-                  <a:txBody>
-                    <a:bodyPr wrap="square"/>
-                    <a:lstStyle/>
-                    <a:p>
-                      <a:r>
-                        <a:rPr sz="1300">
-                          <a:solidFill>
-                            <a:srgbClr val="1B263B"/>
-                          </a:solidFill>
-                          <a:latin typeface="Calibri"/>
-                        </a:rPr>
-                        <a:t>+0.003</a:t>
-                      </a:r>
-                    </a:p>
-                  </a:txBody>
-                  <a:tcPr marL="54864" marR="54864" marT="18288" marB="18288">
-                    <a:solidFill>
-                      <a:srgbClr val="FFFFFF"/>
-                    </a:solidFill>
-                  </a:tcPr>
-                </a:tc>
-                <a:tc>
-                  <a:txBody>
-                    <a:bodyPr wrap="square"/>
-                    <a:lstStyle/>
-                    <a:p>
-                      <a:r>
-                        <a:rPr sz="1300">
-                          <a:solidFill>
-                            <a:srgbClr val="1B263B"/>
-                          </a:solidFill>
-                          <a:latin typeface="Calibri"/>
-                        </a:rPr>
-                        <a:t>No (p=0.94)</a:t>
-                      </a:r>
-                    </a:p>
-                  </a:txBody>
-                  <a:tcPr marL="54864" marR="54864" marT="18288" marB="18288">
-                    <a:solidFill>
-                      <a:srgbClr val="FFFFFF"/>
-                    </a:solidFill>
-                  </a:tcPr>
-                </a:tc>
-                <a:tc>
-                  <a:txBody>
-                    <a:bodyPr wrap="square"/>
-                    <a:lstStyle/>
-                    <a:p>
-                      <a:r>
-                        <a:rPr sz="1300">
-                          <a:solidFill>
-                            <a:srgbClr val="1B263B"/>
-                          </a:solidFill>
-                          <a:latin typeface="Calibri"/>
-                        </a:rPr>
-                        <a:t>PARITY</a:t>
-                      </a:r>
-                    </a:p>
-                  </a:txBody>
-                  <a:tcPr marL="54864" marR="54864" marT="18288" marB="18288">
-                    <a:solidFill>
-                      <a:srgbClr val="FFFFFF"/>
-                    </a:solidFill>
-                  </a:tcPr>
-                </a:tc>
-              </a:tr>
-            </a:tbl>
-          </a:graphicData>
-        </a:graphic>
-      </p:graphicFrame>
-      <p:sp>
-        <p:nvSpPr>
-          <p:cNvPr id="5" name="TextBox 4"/>
+              <a:t>The Original Claim — and the Red Flags</a:t>
+            </a:r>
+          </a:p>
+          <a:p>
+            <a:r>
+              <a:rPr sz="1400" i="1">
+                <a:solidFill>
+                  <a:srgbClr val="B8C6D8"/>
+                </a:solidFill>
+              </a:rPr>
+              <a:t>"AUDA wins, 88% no-loss rate"</a:t>
+            </a:r>
+          </a:p>
+        </p:txBody>
+      </p:sp>
+      <p:sp>
+        <p:nvSpPr>
+          <p:cNvPr id="4" name="TextBox 3"/>
           <p:cNvSpPr txBox="1"/>
           <p:nvPr/>
         </p:nvSpPr>
         <p:spPr>
           <a:xfrm>
-            <a:off x="640080" y="6309360"/>
-            <a:ext cx="10972800" cy="457200"/>
+            <a:off x="640080" y="1371600"/>
+            <a:ext cx="10972800" cy="4937760"/>
           </a:xfrm>
           <a:prstGeom prst="rect">
             <a:avLst/>
@@ -4332,13 +3598,115 @@
           </a:bodyPr>
           <a:lstStyle/>
           <a:p>
-            <a:r>
-              <a:rPr sz="1200" i="1">
+            <a:pPr>
+              <a:spcAft>
+                <a:spcPts val="900"/>
+              </a:spcAft>
+            </a:pPr>
+            <a:r>
+              <a:rPr sz="1800" b="0">
+                <a:solidFill>
+                  <a:srgbClr val="1B263B"/>
+                </a:solidFill>
+                <a:latin typeface="Calibri"/>
+              </a:rPr>
+              <a:t>•  The first benchmark reported AUDA beating the baseline on most datasets.</a:t>
+            </a:r>
+          </a:p>
+          <a:p>
+            <a:pPr>
+              <a:spcAft>
+                <a:spcPts val="900"/>
+              </a:spcAft>
+            </a:pPr>
+            <a:r>
+              <a:rPr sz="1800" b="1">
+                <a:solidFill>
+                  <a:srgbClr val="C0392B"/>
+                </a:solidFill>
+                <a:latin typeface="Calibri"/>
+              </a:rPr>
+              <a:t>•  But the result rested on four hidden problems:</a:t>
+            </a:r>
+          </a:p>
+          <a:p>
+            <a:pPr lvl="1">
+              <a:spcAft>
+                <a:spcPts val="900"/>
+              </a:spcAft>
+            </a:pPr>
+            <a:r>
+              <a:rPr sz="1600" b="0">
+                <a:solidFill>
+                  <a:srgbClr val="1B263B"/>
+                </a:solidFill>
+                <a:latin typeface="Calibri"/>
+              </a:rPr>
+              <a:t>–  Single train/test split — one lucky draw, no significance test</a:t>
+            </a:r>
+          </a:p>
+          <a:p>
+            <a:pPr lvl="1">
+              <a:spcAft>
+                <a:spcPts val="900"/>
+              </a:spcAft>
+            </a:pPr>
+            <a:r>
+              <a:rPr sz="1600" b="0">
+                <a:solidFill>
+                  <a:srgbClr val="1B263B"/>
+                </a:solidFill>
+                <a:latin typeface="Calibri"/>
+              </a:rPr>
+              <a:t>–  Rigged baseline — ordinal-encoded everything &amp; never scaled (sabotages SVM)</a:t>
+            </a:r>
+          </a:p>
+          <a:p>
+            <a:pPr lvl="1">
+              <a:spcAft>
+                <a:spcPts val="900"/>
+              </a:spcAft>
+            </a:pPr>
+            <a:r>
+              <a:rPr sz="1600" b="0">
+                <a:solidFill>
+                  <a:srgbClr val="1B263B"/>
+                </a:solidFill>
+                <a:latin typeface="Calibri"/>
+              </a:rPr>
+              <a:t>–  Duplicate datasets — same files counted twice, inflating results</a:t>
+            </a:r>
+          </a:p>
+          <a:p>
+            <a:pPr lvl="1">
+              <a:spcAft>
+                <a:spcPts val="900"/>
+              </a:spcAft>
+            </a:pPr>
+            <a:r>
+              <a:rPr sz="1600" b="0">
+                <a:solidFill>
+                  <a:srgbClr val="1B263B"/>
+                </a:solidFill>
+                <a:latin typeface="Calibri"/>
+              </a:rPr>
+              <a:t>–  Software bugs — scrambled labels &amp; dropped predictive columns</a:t>
+            </a:r>
+          </a:p>
+          <a:p>
+            <a:pPr>
+              <a:spcAft>
+                <a:spcPts val="900"/>
+              </a:spcAft>
+            </a:pPr>
+            <a:r>
+              <a:rPr sz="1800" b="1">
                 <a:solidFill>
                   <a:srgbClr val="555F6B"/>
                 </a:solidFill>
-              </a:rPr>
-              <a:t>Each step removed an artifact. The honest endpoint: AUDA neither beats nor harms a competent baseline.</a:t>
+                <a:latin typeface="Calibri"/>
+              </a:rPr>
+              <a:t>•  "If a result can't survive scrutiny, it isn't a result."</a:t>
             </a:r>
           </a:p>
         </p:txBody>
@@ -4441,45 +3809,21 @@
                 </a:solidFill>
                 <a:latin typeface="Calibri"/>
               </a:rPr>
-              <a:t>Final Result — Statistical Parity</a:t>
-            </a:r>
-          </a:p>
-        </p:txBody>
-      </p:sp>
-      <p:pic>
-        <p:nvPicPr>
-          <p:cNvPr id="4" name="Picture 3" descr="slide_parity.png"/>
-          <p:cNvPicPr>
-            <a:picLocks noChangeAspect="1"/>
-          </p:cNvPicPr>
+              <a:t>Building Rigor #1 — Multi-Seed + Significance</a:t>
+            </a:r>
+          </a:p>
+        </p:txBody>
+      </p:sp>
+      <p:sp>
+        <p:nvSpPr>
+          <p:cNvPr id="4" name="TextBox 3"/>
+          <p:cNvSpPr txBox="1"/>
           <p:nvPr/>
-        </p:nvPicPr>
-        <p:blipFill>
-          <a:blip r:embed="rId2"/>
-          <a:stretch>
-            <a:fillRect/>
-          </a:stretch>
-        </p:blipFill>
+        </p:nvSpPr>
         <p:spPr>
           <a:xfrm>
-            <a:off x="548640" y="1371600"/>
-            <a:ext cx="5760720" cy="3722311"/>
-          </a:xfrm>
-          <a:prstGeom prst="rect">
-            <a:avLst/>
-          </a:prstGeom>
-        </p:spPr>
-      </p:pic>
-      <p:sp>
-        <p:nvSpPr>
-          <p:cNvPr id="5" name="TextBox 4"/>
-          <p:cNvSpPr txBox="1"/>
-          <p:nvPr/>
-        </p:nvSpPr>
-        <p:spPr>
-          <a:xfrm>
-            <a:off x="6583680" y="1737360"/>
-            <a:ext cx="5120640" cy="4114800"/>
+            <a:off x="640080" y="1371600"/>
+            <a:ext cx="10972800" cy="4937760"/>
           </a:xfrm>
           <a:prstGeom prst="rect">
             <a:avLst/>
@@ -4494,81 +3838,97 @@
           <a:p>
             <a:pPr>
               <a:spcAft>
-                <a:spcPts val="1300"/>
+                <a:spcPts val="1100"/>
               </a:spcAft>
             </a:pPr>
             <a:r>
-              <a:rPr sz="1700" b="1">
-                <a:solidFill>
-                  <a:srgbClr val="27AE60"/>
+              <a:rPr sz="1800" b="0">
+                <a:solidFill>
+                  <a:srgbClr val="1B263B"/>
                 </a:solidFill>
                 <a:latin typeface="Calibri"/>
               </a:rPr>
-              <a:t>•  RandomForest:  −0.001   (p = 0.29)</a:t>
+              <a:t>•  One split = flipping a coin once. Change the seed, get a different score.</a:t>
+            </a:r>
+          </a:p>
+          <a:p>
+            <a:pPr lvl="1">
+              <a:spcAft>
+                <a:spcPts val="1100"/>
+              </a:spcAft>
+            </a:pPr>
+            <a:r>
+              <a:rPr sz="1600" b="0">
+                <a:solidFill>
+                  <a:srgbClr val="555F6B"/>
+                </a:solidFill>
+                <a:latin typeface="Calibri"/>
+              </a:rPr>
+              <a:t>–  Example (haberman, SVM): seed 42 → +0.10, seed 0 → +0.07. Same data!</a:t>
             </a:r>
           </a:p>
           <a:p>
             <a:pPr>
               <a:spcAft>
-                <a:spcPts val="1300"/>
+                <a:spcPts val="1100"/>
               </a:spcAft>
             </a:pPr>
             <a:r>
-              <a:rPr sz="1700" b="1">
-                <a:solidFill>
-                  <a:srgbClr val="8E44AD"/>
+              <a:rPr sz="1800" b="1">
+                <a:solidFill>
+                  <a:srgbClr val="2E6DB8"/>
                 </a:solidFill>
                 <a:latin typeface="Calibri"/>
               </a:rPr>
-              <a:t>•  SVM:  +0.003   (p = 0.94)</a:t>
+              <a:t>•  Fix: run 5 seeds, report mean ± std → exposes the noise.</a:t>
             </a:r>
           </a:p>
           <a:p>
             <a:pPr>
               <a:spcAft>
-                <a:spcPts val="1300"/>
+                <a:spcPts val="1100"/>
               </a:spcAft>
             </a:pPr>
             <a:r>
-              <a:rPr sz="1700" b="1">
+              <a:rPr sz="1800" b="1">
+                <a:solidFill>
+                  <a:srgbClr val="2E6DB8"/>
+                </a:solidFill>
+                <a:latin typeface="Calibri"/>
+              </a:rPr>
+              <a:t>•  Wilcoxon signed-rank test across datasets → a p-value:</a:t>
+            </a:r>
+          </a:p>
+          <a:p>
+            <a:pPr lvl="1">
+              <a:spcAft>
+                <a:spcPts val="1100"/>
+              </a:spcAft>
+            </a:pPr>
+            <a:r>
+              <a:rPr sz="1600" b="0">
                 <a:solidFill>
                   <a:srgbClr val="1B263B"/>
                 </a:solidFill>
                 <a:latin typeface="Calibri"/>
               </a:rPr>
-              <a:t>•  Both ≈ 0, neither significant.</a:t>
+              <a:t>–  p &lt; 0.05 = real effect ;  p &gt; 0.05 = indistinguishable from baseline.</a:t>
             </a:r>
           </a:p>
           <a:p>
             <a:pPr>
               <a:spcAft>
-                <a:spcPts val="1300"/>
+                <a:spcPts val="1100"/>
               </a:spcAft>
             </a:pPr>
             <a:r>
-              <a:rPr sz="1700" b="0">
+              <a:rPr sz="1800" b="0">
                 <a:solidFill>
                   <a:srgbClr val="1B263B"/>
                 </a:solidFill>
                 <a:latin typeface="Calibri"/>
               </a:rPr>
-              <a:t>•  Across 32 datasets, 5 seeds.</a:t>
-            </a:r>
-          </a:p>
-          <a:p>
-            <a:pPr>
-              <a:spcAft>
-                <a:spcPts val="1300"/>
-              </a:spcAft>
-            </a:pPr>
-            <a:r>
-              <a:rPr sz="1700" b="0">
-                <a:solidFill>
-                  <a:srgbClr val="1B263B"/>
-                </a:solidFill>
-                <a:latin typeface="Calibri"/>
-              </a:rPr>
-              <a:t>•  AUDA matches competent manual preprocessing — no significant difference.</a:t>
+              <a:t>•  Result: AUDA's win-rates dropped once luck was averaged out — single-seed numbers were optimistic.</a:t>
             </a:r>
           </a:p>
         </p:txBody>
@@ -4671,14 +4031,85 @@
                 </a:solidFill>
                 <a:latin typeface="Calibri"/>
               </a:rPr>
-              <a:t>Per-Dataset View — Mostly Parity</a:t>
+              <a:t>Building Rigor #2 — A Fair Baseline</a:t>
+            </a:r>
+          </a:p>
+        </p:txBody>
+      </p:sp>
+      <p:sp>
+        <p:nvSpPr>
+          <p:cNvPr id="4" name="TextBox 3"/>
+          <p:cNvSpPr txBox="1"/>
+          <p:nvPr/>
+        </p:nvSpPr>
+        <p:spPr>
+          <a:xfrm>
+            <a:off x="640080" y="1188720"/>
+            <a:ext cx="10972800" cy="1463040"/>
+          </a:xfrm>
+          <a:prstGeom prst="rect">
+            <a:avLst/>
+          </a:prstGeom>
+          <a:noFill/>
+        </p:spPr>
+        <p:txBody>
+          <a:bodyPr wrap="square">
+            <a:spAutoFit/>
+          </a:bodyPr>
+          <a:lstStyle/>
+          <a:p>
+            <a:pPr>
+              <a:spcAft>
+                <a:spcPts val="600"/>
+              </a:spcAft>
+            </a:pPr>
+            <a:r>
+              <a:rPr sz="1700" b="0">
+                <a:solidFill>
+                  <a:srgbClr val="1B263B"/>
+                </a:solidFill>
+                <a:latin typeface="Calibri"/>
+              </a:rPr>
+              <a:t>•  The weak baseline never scaled features — fatal for SVM.</a:t>
+            </a:r>
+          </a:p>
+          <a:p>
+            <a:pPr>
+              <a:spcAft>
+                <a:spcPts val="600"/>
+              </a:spcAft>
+            </a:pPr>
+            <a:r>
+              <a:rPr sz="1700" b="0">
+                <a:solidFill>
+                  <a:srgbClr val="1B263B"/>
+                </a:solidFill>
+                <a:latin typeface="Calibri"/>
+              </a:rPr>
+              <a:t>•  AUDA's big SVM 'wins' were just AUDA fixing that mistake.</a:t>
+            </a:r>
+          </a:p>
+          <a:p>
+            <a:pPr>
+              <a:spcAft>
+                <a:spcPts val="600"/>
+              </a:spcAft>
+            </a:pPr>
+            <a:r>
+              <a:rPr sz="1700" b="1">
+                <a:solidFill>
+                  <a:srgbClr val="2E6DB8"/>
+                </a:solidFill>
+                <a:latin typeface="Calibri"/>
+              </a:rPr>
+              <a:t>•  Fair baseline scales + one-hot encodes, like a real analyst.</a:t>
             </a:r>
           </a:p>
         </p:txBody>
       </p:sp>
       <p:pic>
         <p:nvPicPr>
-          <p:cNvPr id="4" name="Picture 3" descr="slide_perdataset.png"/>
+          <p:cNvPr id="5" name="Picture 4" descr="_c_journey.png"/>
           <p:cNvPicPr>
             <a:picLocks noChangeAspect="1"/>
           </p:cNvPicPr>
@@ -4692,8 +4123,8 @@
         </p:blipFill>
         <p:spPr>
           <a:xfrm>
-            <a:off x="1005840" y="1325880"/>
-            <a:ext cx="10149840" cy="5277917"/>
+            <a:off x="1554480" y="2697480"/>
+            <a:ext cx="9144000" cy="4733365"/>
           </a:xfrm>
           <a:prstGeom prst="rect">
             <a:avLst/>
@@ -4702,13 +4133,13 @@
       </p:pic>
       <p:sp>
         <p:nvSpPr>
-          <p:cNvPr id="5" name="TextBox 4"/>
+          <p:cNvPr id="6" name="TextBox 5"/>
           <p:cNvSpPr txBox="1"/>
           <p:nvPr/>
         </p:nvSpPr>
         <p:spPr>
           <a:xfrm>
-            <a:off x="640080" y="6309360"/>
+            <a:off x="640080" y="6355080"/>
             <a:ext cx="10972800" cy="457200"/>
           </a:xfrm>
           <a:prstGeom prst="rect">
@@ -4728,7 +4159,7 @@
                   <a:srgbClr val="555F6B"/>
                 </a:solidFill>
               </a:rPr>
-              <a:t>Most datasets sit at ~0 (parity). A few small wins/losses roughly cancel — no systematic advantage either way.</a:t>
+              <a:t>As each artifact is removed, the SVM 'advantage' collapses from +0.05 to ~0.</a:t>
             </a:r>
           </a:p>
         </p:txBody>
@@ -4742,126 +4173,6 @@
 </file>
 
 <file path=ppt/slides/slide14.xml><?xml version="1.0" encoding="utf-8"?>
-<p:sld xmlns:a="http://schemas.openxmlformats.org/drawingml/2006/main" xmlns:p="http://schemas.openxmlformats.org/presentationml/2006/main" xmlns:r="http://schemas.openxmlformats.org/officeDocument/2006/relationships">
-  <p:cSld>
-    <p:bg>
-      <p:bgPr>
-        <a:solidFill>
-          <a:srgbClr val="1B263B"/>
-        </a:solidFill>
-        <a:effectLst/>
-      </p:bgPr>
-    </p:bg>
-    <p:spTree>
-      <p:nvGrpSpPr>
-        <p:cNvPr id="1" name=""/>
-        <p:cNvGrpSpPr/>
-        <p:nvPr/>
-      </p:nvGrpSpPr>
-      <p:grpSpPr/>
-      <p:sp>
-        <p:nvSpPr>
-          <p:cNvPr id="2" name="TextBox 1"/>
-          <p:cNvSpPr txBox="1"/>
-          <p:nvPr/>
-        </p:nvSpPr>
-        <p:spPr>
-          <a:xfrm>
-            <a:off x="914400" y="1188720"/>
-            <a:ext cx="10332720" cy="914400"/>
-          </a:xfrm>
-          <a:prstGeom prst="rect">
-            <a:avLst/>
-          </a:prstGeom>
-          <a:noFill/>
-        </p:spPr>
-        <p:txBody>
-          <a:bodyPr wrap="square">
-            <a:spAutoFit/>
-          </a:bodyPr>
-          <a:lstStyle/>
-          <a:p>
-            <a:pPr algn="ctr"/>
-            <a:r>
-              <a:rPr sz="3400" b="1" i="0">
-                <a:solidFill>
-                  <a:srgbClr val="FFFFFF"/>
-                </a:solidFill>
-                <a:latin typeface="Calibri"/>
-              </a:rPr>
-              <a:t>Honest Conclusion</a:t>
-            </a:r>
-          </a:p>
-        </p:txBody>
-      </p:sp>
-      <p:sp>
-        <p:nvSpPr>
-          <p:cNvPr id="3" name="TextBox 2"/>
-          <p:cNvSpPr txBox="1"/>
-          <p:nvPr/>
-        </p:nvSpPr>
-        <p:spPr>
-          <a:xfrm>
-            <a:off x="1280160" y="2468880"/>
-            <a:ext cx="9601200" cy="2743200"/>
-          </a:xfrm>
-          <a:prstGeom prst="rect">
-            <a:avLst/>
-          </a:prstGeom>
-          <a:noFill/>
-        </p:spPr>
-        <p:txBody>
-          <a:bodyPr wrap="square">
-            <a:spAutoFit/>
-          </a:bodyPr>
-          <a:lstStyle/>
-          <a:p>
-            <a:pPr algn="ctr"/>
-            <a:r>
-              <a:rPr sz="2200" b="0" i="1">
-                <a:solidFill>
-                  <a:srgbClr val="DCE6F2"/>
-                </a:solidFill>
-                <a:latin typeface="Calibri"/>
-              </a:rPr>
-              <a:t>"AUDA matches the performance of competent manual preprocessing — no statistically significant difference on tree or kernel models across 32 datasets — while requiring zero human effort."</a:t>
-            </a:r>
-          </a:p>
-          <a:p>
-            <a:pPr algn="ctr"/>
-            <a:r>
-              <a:rPr sz="1000" b="0" i="0">
-                <a:solidFill>
-                  <a:srgbClr val="FFFFFF"/>
-                </a:solidFill>
-                <a:latin typeface="Calibri"/>
-              </a:rPr>
-              <a:t> </a:t>
-            </a:r>
-          </a:p>
-          <a:p>
-            <a:pPr algn="ctr"/>
-            <a:r>
-              <a:rPr sz="1800" b="1" i="0">
-                <a:solidFill>
-                  <a:srgbClr val="6EC6F0"/>
-                </a:solidFill>
-                <a:latin typeface="Calibri"/>
-              </a:rPr>
-              <a:t>AUDA does not beat a skilled analyst — but it equals one, automatically.</a:t>
-            </a:r>
-          </a:p>
-        </p:txBody>
-      </p:sp>
-    </p:spTree>
-  </p:cSld>
-  <p:clrMapOvr>
-    <a:masterClrMapping/>
-  </p:clrMapOvr>
-</p:sld>
-</file>
-
-<file path=ppt/slides/slide15.xml><?xml version="1.0" encoding="utf-8"?>
 <p:sld xmlns:a="http://schemas.openxmlformats.org/drawingml/2006/main" xmlns:p="http://schemas.openxmlformats.org/presentationml/2006/main" xmlns:r="http://schemas.openxmlformats.org/officeDocument/2006/relationships">
   <p:cSld>
     <p:bg>
@@ -4951,7 +4262,7 @@
                 </a:solidFill>
                 <a:latin typeface="Calibri"/>
               </a:rPr>
-              <a:t>Methodology Lessons</a:t>
+              <a:t>Data Integrity — The Datasets Were Corrupted</a:t>
             </a:r>
           </a:p>
         </p:txBody>
@@ -4980,81 +4291,97 @@
           <a:p>
             <a:pPr>
               <a:spcAft>
-                <a:spcPts val="1500"/>
+                <a:spcPts val="1000"/>
               </a:spcAft>
             </a:pPr>
             <a:r>
-              <a:rPr sz="1900" b="0">
+              <a:rPr sz="1800" b="1">
+                <a:solidFill>
+                  <a:srgbClr val="C0392B"/>
+                </a:solidFill>
+                <a:latin typeface="Calibri"/>
+              </a:rPr>
+              <a:t>•  Hash check revealed 4 DUPLICATE pairs masquerading as different datasets:</a:t>
+            </a:r>
+          </a:p>
+          <a:p>
+            <a:pPr lvl="1">
+              <a:spcAft>
+                <a:spcPts val="1000"/>
+              </a:spcAft>
+            </a:pPr>
+            <a:r>
+              <a:rPr sz="1600" b="0">
                 <a:solidFill>
                   <a:srgbClr val="1B263B"/>
                 </a:solidFill>
                 <a:latin typeface="Calibri"/>
               </a:rPr>
-              <a:t>•  Never trust a single train/test split — always multi-seed + a significance test.</a:t>
+              <a:t>–  breast_cancer_wide = qsar_bio ;  arcene = colon_cancer</a:t>
+            </a:r>
+          </a:p>
+          <a:p>
+            <a:pPr lvl="1">
+              <a:spcAft>
+                <a:spcPts val="1000"/>
+              </a:spcAft>
+            </a:pPr>
+            <a:r>
+              <a:rPr sz="1600" b="0">
+                <a:solidFill>
+                  <a:srgbClr val="1B263B"/>
+                </a:solidFill>
+                <a:latin typeface="Calibri"/>
+              </a:rPr>
+              <a:t>–  ionosphere = musk ;  sonar = banknote</a:t>
             </a:r>
           </a:p>
           <a:p>
             <a:pPr>
               <a:spcAft>
-                <a:spcPts val="1500"/>
+                <a:spcPts val="1000"/>
               </a:spcAft>
             </a:pPr>
             <a:r>
-              <a:rPr sz="1900" b="0">
+              <a:rPr sz="1800" b="0">
                 <a:solidFill>
                   <a:srgbClr val="1B263B"/>
                 </a:solidFill>
                 <a:latin typeface="Calibri"/>
               </a:rPr>
-              <a:t>•  Your baseline must be fair — beating a deliberately weak baseline proves nothing.</a:t>
+              <a:t>•  Worse — filenames lied: all four 'wide' files were breast-cancer data; 'sonar' actually held banknote data.</a:t>
             </a:r>
           </a:p>
           <a:p>
             <a:pPr>
               <a:spcAft>
-                <a:spcPts val="1500"/>
+                <a:spcPts val="1000"/>
               </a:spcAft>
             </a:pPr>
             <a:r>
-              <a:rPr sz="1900" b="0">
-                <a:solidFill>
-                  <a:srgbClr val="1B263B"/>
+              <a:rPr sz="1800" b="0">
+                <a:solidFill>
+                  <a:srgbClr val="555F6B"/>
                 </a:solidFill>
                 <a:latin typeface="Calibri"/>
               </a:rPr>
-              <a:t>•  Validate your data — duplicates and mislabeled files silently corrupt results.</a:t>
+              <a:t>•  Cause: the dataset downloader saved wrong / duplicate files.</a:t>
             </a:r>
           </a:p>
           <a:p>
             <a:pPr>
               <a:spcAft>
-                <a:spcPts val="1500"/>
+                <a:spcPts val="1000"/>
               </a:spcAft>
             </a:pPr>
             <a:r>
-              <a:rPr sz="1900" b="1">
+              <a:rPr sz="1800" b="1">
                 <a:solidFill>
                   <a:srgbClr val="27AE60"/>
                 </a:solidFill>
                 <a:latin typeface="Calibri"/>
               </a:rPr>
-              <a:t>•  A neutral result, honestly obtained, beats an impressive result that can't survive scrutiny.</a:t>
-            </a:r>
-          </a:p>
-          <a:p>
-            <a:pPr>
-              <a:spcAft>
-                <a:spcPts val="1500"/>
-              </a:spcAft>
-            </a:pPr>
-            <a:r>
-              <a:rPr sz="1900" b="0">
-                <a:solidFill>
-                  <a:srgbClr val="1B263B"/>
-                </a:solidFill>
-                <a:latin typeface="Calibri"/>
-              </a:rPr>
-              <a:t>•  Bugs can masquerade as 'findings' — the −0.35 'AUDA is destructive' was a label bug.</a:t>
+              <a:t>•  Fix: removed duplicates (39 → 35); benchmark now de-dups by content hash.</a:t>
             </a:r>
           </a:p>
         </p:txBody>
@@ -5067,7 +4394,7 @@
 </p:sld>
 </file>
 
-<file path=ppt/slides/slide16.xml><?xml version="1.0" encoding="utf-8"?>
+<file path=ppt/slides/slide15.xml><?xml version="1.0" encoding="utf-8"?>
 <p:sld xmlns:a="http://schemas.openxmlformats.org/drawingml/2006/main" xmlns:p="http://schemas.openxmlformats.org/presentationml/2006/main" xmlns:r="http://schemas.openxmlformats.org/officeDocument/2006/relationships">
   <p:cSld>
     <p:bg>
@@ -5157,7 +4484,7 @@
                 </a:solidFill>
                 <a:latin typeface="Calibri"/>
               </a:rPr>
-              <a:t>Future Work — How AUDA Could Actually Win</a:t>
+              <a:t>Three Real Bugs Found &amp; Fixed</a:t>
             </a:r>
           </a:p>
         </p:txBody>
@@ -5171,8 +4498,8 @@
           <p:nvPr/>
         </p:nvGraphicFramePr>
         <p:xfrm>
-          <a:off x="548640" y="1417320"/>
-          <a:ext cx="11155680" cy="2743200"/>
+          <a:off x="640080" y="1417320"/>
+          <a:ext cx="10972800" cy="2926080"/>
         </p:xfrm>
         <a:graphic>
           <a:graphicData uri="http://schemas.openxmlformats.org/drawingml/2006/table">
@@ -5181,24 +4508,24 @@
                 <a:tableStyleId>{5C22544A-7EE6-4342-B048-85BDC9FD1C3A}</a:tableStyleId>
               </a:tblPr>
               <a:tblGrid>
-                <a:gridCol w="2926080"/>
-                <a:gridCol w="5852160"/>
-                <a:gridCol w="2377440"/>
+                <a:gridCol w="3474720"/>
+                <a:gridCol w="4206240"/>
+                <a:gridCol w="3291840"/>
               </a:tblGrid>
-              <a:tr h="685800">
-                <a:tc>
-                  <a:txBody>
-                    <a:bodyPr wrap="square"/>
-                    <a:lstStyle/>
-                    <a:p>
-                      <a:r>
-                        <a:rPr sz="1300" b="1">
+              <a:tr h="731520">
+                <a:tc>
+                  <a:txBody>
+                    <a:bodyPr wrap="square"/>
+                    <a:lstStyle/>
+                    <a:p>
+                      <a:r>
+                        <a:rPr sz="1400" b="1">
                           <a:solidFill>
                             <a:srgbClr val="FFFFFF"/>
                           </a:solidFill>
                           <a:latin typeface="Calibri"/>
                         </a:rPr>
-                        <a:t>Lever</a:t>
+                        <a:t>Bug</a:t>
                       </a:r>
                     </a:p>
                   </a:txBody>
@@ -5214,13 +4541,13 @@
                     <a:lstStyle/>
                     <a:p>
                       <a:r>
-                        <a:rPr sz="1300" b="1">
+                        <a:rPr sz="1400" b="1">
                           <a:solidFill>
                             <a:srgbClr val="FFFFFF"/>
                           </a:solidFill>
                           <a:latin typeface="Calibri"/>
                         </a:rPr>
-                        <a:t>Idea</a:t>
+                        <a:t>Effect</a:t>
                       </a:r>
                     </a:p>
                   </a:txBody>
@@ -5236,13 +4563,13 @@
                     <a:lstStyle/>
                     <a:p>
                       <a:r>
-                        <a:rPr sz="1300" b="1">
+                        <a:rPr sz="1400" b="1">
                           <a:solidFill>
                             <a:srgbClr val="FFFFFF"/>
                           </a:solidFill>
                           <a:latin typeface="Calibri"/>
                         </a:rPr>
-                        <a:t>Effort / payoff</a:t>
+                        <a:t>Example fix</a:t>
                       </a:r>
                     </a:p>
                   </a:txBody>
@@ -5253,20 +4580,20 @@
                   </a:tcPr>
                 </a:tc>
               </a:tr>
-              <a:tr h="685800">
-                <a:tc>
-                  <a:txBody>
-                    <a:bodyPr wrap="square"/>
-                    <a:lstStyle/>
-                    <a:p>
-                      <a:r>
-                        <a:rPr sz="1300">
-                          <a:solidFill>
-                            <a:srgbClr val="1B263B"/>
-                          </a:solidFill>
-                          <a:latin typeface="Calibri"/>
-                        </a:rPr>
-                        <a:t>Feature creation</a:t>
+              <a:tr h="731520">
+                <a:tc>
+                  <a:txBody>
+                    <a:bodyPr wrap="square"/>
+                    <a:lstStyle/>
+                    <a:p>
+                      <a:r>
+                        <a:rPr sz="1400">
+                          <a:solidFill>
+                            <a:srgbClr val="1B263B"/>
+                          </a:solidFill>
+                          <a:latin typeface="Calibri"/>
+                        </a:rPr>
+                        <a:t>Label misalignment after row-drop</a:t>
                       </a:r>
                     </a:p>
                   </a:txBody>
@@ -5282,13 +4609,13 @@
                     <a:lstStyle/>
                     <a:p>
                       <a:r>
-                        <a:rPr sz="1300">
-                          <a:solidFill>
-                            <a:srgbClr val="1B263B"/>
-                          </a:solidFill>
-                          <a:latin typeface="Calibri"/>
-                        </a:rPr>
-                        <a:t>Datetime decomposition, CV target encoding, interactions — features the baseline can't make</a:t>
+                        <a:rPr sz="1400">
+                          <a:solidFill>
+                            <a:srgbClr val="1B263B"/>
+                          </a:solidFill>
+                          <a:latin typeface="Calibri"/>
+                        </a:rPr>
+                        <a:t>Training labels scrambled when AUDA dropped rows</a:t>
                       </a:r>
                     </a:p>
                   </a:txBody>
@@ -5304,13 +4631,13 @@
                     <a:lstStyle/>
                     <a:p>
                       <a:r>
-                        <a:rPr sz="1300">
-                          <a:solidFill>
-                            <a:srgbClr val="1B263B"/>
-                          </a:solidFill>
-                          <a:latin typeface="Calibri"/>
-                        </a:rPr>
-                        <a:t>High / only real upside</a:t>
+                        <a:rPr sz="1400">
+                          <a:solidFill>
+                            <a:srgbClr val="1B263B"/>
+                          </a:solidFill>
+                          <a:latin typeface="Calibri"/>
+                        </a:rPr>
+                        <a:t>flight_delay RF  −0.35 → 0.00</a:t>
                       </a:r>
                     </a:p>
                   </a:txBody>
@@ -5321,20 +4648,20 @@
                   </a:tcPr>
                 </a:tc>
               </a:tr>
-              <a:tr h="685800">
-                <a:tc>
-                  <a:txBody>
-                    <a:bodyPr wrap="square"/>
-                    <a:lstStyle/>
-                    <a:p>
-                      <a:r>
-                        <a:rPr sz="1300">
-                          <a:solidFill>
-                            <a:srgbClr val="1B263B"/>
-                          </a:solidFill>
-                          <a:latin typeface="Calibri"/>
-                        </a:rPr>
-                        <a:t>Validation-driven preprocessing</a:t>
+              <a:tr h="731520">
+                <a:tc>
+                  <a:txBody>
+                    <a:bodyPr wrap="square"/>
+                    <a:lstStyle/>
+                    <a:p>
+                      <a:r>
+                        <a:rPr sz="1400">
+                          <a:solidFill>
+                            <a:srgbClr val="1B263B"/>
+                          </a:solidFill>
+                          <a:latin typeface="Calibri"/>
+                        </a:rPr>
+                        <a:t>Missing target became a junk class</a:t>
                       </a:r>
                     </a:p>
                   </a:txBody>
@@ -5350,13 +4677,13 @@
                     <a:lstStyle/>
                     <a:p>
                       <a:r>
-                        <a:rPr sz="1300">
-                          <a:solidFill>
-                            <a:srgbClr val="1B263B"/>
-                          </a:solidFill>
-                          <a:latin typeface="Calibri"/>
-                        </a:rPr>
-                        <a:t>Try several preprocessing variants per dataset, keep best by CV (AutoML-style)</a:t>
+                        <a:rPr sz="1400">
+                          <a:solidFill>
+                            <a:srgbClr val="1B263B"/>
+                          </a:solidFill>
+                          <a:latin typeface="Calibri"/>
+                        </a:rPr>
+                        <a:t>Models trained to predict "missing"</a:t>
                       </a:r>
                     </a:p>
                   </a:txBody>
@@ -5372,13 +4699,13 @@
                     <a:lstStyle/>
                     <a:p>
                       <a:r>
-                        <a:rPr sz="1300">
-                          <a:solidFill>
-                            <a:srgbClr val="1B263B"/>
-                          </a:solidFill>
-                          <a:latin typeface="Calibri"/>
-                        </a:rPr>
-                        <a:t>High / highest ceiling</a:t>
+                        <a:rPr sz="1400">
+                          <a:solidFill>
+                            <a:srgbClr val="1B263B"/>
+                          </a:solidFill>
+                          <a:latin typeface="Calibri"/>
+                        </a:rPr>
+                        <a:t>weatheraus RF  −0.13 → −0.01</a:t>
                       </a:r>
                     </a:p>
                   </a:txBody>
@@ -5389,20 +4716,20 @@
                   </a:tcPr>
                 </a:tc>
               </a:tr>
-              <a:tr h="685800">
-                <a:tc>
-                  <a:txBody>
-                    <a:bodyPr wrap="square"/>
-                    <a:lstStyle/>
-                    <a:p>
-                      <a:r>
-                        <a:rPr sz="1300">
-                          <a:solidFill>
-                            <a:srgbClr val="1B263B"/>
-                          </a:solidFill>
-                          <a:latin typeface="Calibri"/>
-                        </a:rPr>
-                        <a:t>Apply LLM suggestions</a:t>
+              <a:tr h="731520">
+                <a:tc>
+                  <a:txBody>
+                    <a:bodyPr wrap="square"/>
+                    <a:lstStyle/>
+                    <a:p>
+                      <a:r>
+                        <a:rPr sz="1400">
+                          <a:solidFill>
+                            <a:srgbClr val="1B263B"/>
+                          </a:solidFill>
+                          <a:latin typeface="Calibri"/>
+                        </a:rPr>
+                        <a:t>Continuous floats dropped as 'IDs' (library)</a:t>
                       </a:r>
                     </a:p>
                   </a:txBody>
@@ -5418,13 +4745,13 @@
                     <a:lstStyle/>
                     <a:p>
                       <a:r>
-                        <a:rPr sz="1300">
-                          <a:solidFill>
-                            <a:srgbClr val="1B263B"/>
-                          </a:solidFill>
-                          <a:latin typeface="Calibri"/>
-                        </a:rPr>
-                        <a:t>Actually execute the LLM's feature ideas (currently report-only)</a:t>
+                        <a:rPr sz="1400">
+                          <a:solidFill>
+                            <a:srgbClr val="1B263B"/>
+                          </a:solidFill>
+                          <a:latin typeface="Calibri"/>
+                        </a:rPr>
+                        <a:t>Deleted predictive features on small data</a:t>
                       </a:r>
                     </a:p>
                   </a:txBody>
@@ -5440,13 +4767,13 @@
                     <a:lstStyle/>
                     <a:p>
                       <a:r>
-                        <a:rPr sz="1300">
-                          <a:solidFill>
-                            <a:srgbClr val="1B263B"/>
-                          </a:solidFill>
-                          <a:latin typeface="Calibri"/>
-                        </a:rPr>
-                        <a:t>Medium / uncertain</a:t>
+                        <a:rPr sz="1400">
+                          <a:solidFill>
+                            <a:srgbClr val="1B263B"/>
+                          </a:solidFill>
+                          <a:latin typeface="Calibri"/>
+                        </a:rPr>
+                        <a:t>vertebral RF  −0.056 → 0.00</a:t>
                       </a:r>
                     </a:p>
                   </a:txBody>
@@ -5489,7 +4816,7 @@
                   <a:srgbClr val="555F6B"/>
                 </a:solidFill>
               </a:rPr>
-              <a:t>Parity is already a complete, defensible result. These are paths to push AUDA from parity to advantage.</a:t>
+              <a:t>Two were measurement bugs (made AUDA look worse); the third was a genuine AUDA library bug — now improved.</a:t>
             </a:r>
           </a:p>
         </p:txBody>
@@ -5502,199 +4829,7 @@
 </p:sld>
 </file>
 
-<file path=ppt/slides/slide17.xml><?xml version="1.0" encoding="utf-8"?>
-<p:sld xmlns:a="http://schemas.openxmlformats.org/drawingml/2006/main" xmlns:p="http://schemas.openxmlformats.org/presentationml/2006/main" xmlns:r="http://schemas.openxmlformats.org/officeDocument/2006/relationships">
-  <p:cSld>
-    <p:bg>
-      <p:bgPr>
-        <a:solidFill>
-          <a:srgbClr val="1B263B"/>
-        </a:solidFill>
-        <a:effectLst/>
-      </p:bgPr>
-    </p:bg>
-    <p:spTree>
-      <p:nvGrpSpPr>
-        <p:cNvPr id="1" name=""/>
-        <p:cNvGrpSpPr/>
-        <p:nvPr/>
-      </p:nvGrpSpPr>
-      <p:grpSpPr/>
-      <p:sp>
-        <p:nvSpPr>
-          <p:cNvPr id="2" name="TextBox 1"/>
-          <p:cNvSpPr txBox="1"/>
-          <p:nvPr/>
-        </p:nvSpPr>
-        <p:spPr>
-          <a:xfrm>
-            <a:off x="914400" y="640080"/>
-            <a:ext cx="10332720" cy="822960"/>
-          </a:xfrm>
-          <a:prstGeom prst="rect">
-            <a:avLst/>
-          </a:prstGeom>
-          <a:noFill/>
-        </p:spPr>
-        <p:txBody>
-          <a:bodyPr wrap="square">
-            <a:spAutoFit/>
-          </a:bodyPr>
-          <a:lstStyle/>
-          <a:p>
-            <a:pPr algn="ctr"/>
-            <a:r>
-              <a:rPr sz="3400" b="1" i="0">
-                <a:solidFill>
-                  <a:srgbClr val="FFFFFF"/>
-                </a:solidFill>
-                <a:latin typeface="Calibri"/>
-              </a:rPr>
-              <a:t>Summary</a:t>
-            </a:r>
-          </a:p>
-        </p:txBody>
-      </p:sp>
-      <p:sp>
-        <p:nvSpPr>
-          <p:cNvPr id="3" name="TextBox 2"/>
-          <p:cNvSpPr txBox="1"/>
-          <p:nvPr/>
-        </p:nvSpPr>
-        <p:spPr>
-          <a:xfrm>
-            <a:off x="1280160" y="1828800"/>
-            <a:ext cx="9692640" cy="4023360"/>
-          </a:xfrm>
-          <a:prstGeom prst="rect">
-            <a:avLst/>
-          </a:prstGeom>
-          <a:noFill/>
-        </p:spPr>
-        <p:txBody>
-          <a:bodyPr wrap="square">
-            <a:spAutoFit/>
-          </a:bodyPr>
-          <a:lstStyle/>
-          <a:p>
-            <a:pPr>
-              <a:spcAft>
-                <a:spcPts val="1600"/>
-              </a:spcAft>
-            </a:pPr>
-            <a:r>
-              <a:rPr sz="1900" b="0">
-                <a:solidFill>
-                  <a:srgbClr val="27AE60"/>
-                </a:solidFill>
-              </a:rPr>
-              <a:t>•  Built AUDA: automated EDA + preprocessing pipeline.</a:t>
-            </a:r>
-          </a:p>
-          <a:p>
-            <a:pPr>
-              <a:spcAft>
-                <a:spcPts val="1600"/>
-              </a:spcAft>
-            </a:pPr>
-            <a:r>
-              <a:rPr sz="1900" b="0">
-                <a:solidFill>
-                  <a:srgbClr val="6EC6F0"/>
-                </a:solidFill>
-              </a:rPr>
-              <a:t>•  Tested rigorously: 32 datasets, RF + SVM, 5 seeds, significance test, fair baseline.</a:t>
-            </a:r>
-          </a:p>
-          <a:p>
-            <a:pPr>
-              <a:spcAft>
-                <a:spcPts val="1600"/>
-              </a:spcAft>
-            </a:pPr>
-            <a:r>
-              <a:rPr sz="1900" b="0">
-                <a:solidFill>
-                  <a:srgbClr val="E67E22"/>
-                </a:solidFill>
-              </a:rPr>
-              <a:t>•  Found &amp; fixed 3 real bugs and corrupted datasets along the way.</a:t>
-            </a:r>
-          </a:p>
-          <a:p>
-            <a:pPr>
-              <a:spcAft>
-                <a:spcPts val="1600"/>
-              </a:spcAft>
-            </a:pPr>
-            <a:r>
-              <a:rPr sz="1900" b="1">
-                <a:solidFill>
-                  <a:srgbClr val="FFFFFF"/>
-                </a:solidFill>
-              </a:rPr>
-              <a:t>•  Result: AUDA achieves PARITY with competent manual preprocessing — automatically.</a:t>
-            </a:r>
-          </a:p>
-          <a:p>
-            <a:pPr>
-              <a:spcAft>
-                <a:spcPts val="1600"/>
-              </a:spcAft>
-            </a:pPr>
-            <a:r>
-              <a:rPr sz="1900" b="0">
-                <a:solidFill>
-                  <a:srgbClr val="6EC6F0"/>
-                </a:solidFill>
-              </a:rPr>
-              <a:t>•  A credible, defensible thesis — and a clean path forward.</a:t>
-            </a:r>
-          </a:p>
-        </p:txBody>
-      </p:sp>
-      <p:sp>
-        <p:nvSpPr>
-          <p:cNvPr id="4" name="TextBox 3"/>
-          <p:cNvSpPr txBox="1"/>
-          <p:nvPr/>
-        </p:nvSpPr>
-        <p:spPr>
-          <a:xfrm>
-            <a:off x="640080" y="6126480"/>
-            <a:ext cx="10972800" cy="457200"/>
-          </a:xfrm>
-          <a:prstGeom prst="rect">
-            <a:avLst/>
-          </a:prstGeom>
-          <a:noFill/>
-        </p:spPr>
-        <p:txBody>
-          <a:bodyPr wrap="square">
-            <a:spAutoFit/>
-          </a:bodyPr>
-          <a:lstStyle/>
-          <a:p>
-            <a:r>
-              <a:rPr sz="1600" i="1">
-                <a:solidFill>
-                  <a:srgbClr val="8A9BB5"/>
-                </a:solidFill>
-              </a:rPr>
-              <a:t>Thank you — questions?</a:t>
-            </a:r>
-          </a:p>
-        </p:txBody>
-      </p:sp>
-    </p:spTree>
-  </p:cSld>
-  <p:clrMapOvr>
-    <a:masterClrMapping/>
-  </p:clrMapOvr>
-</p:sld>
-</file>
-
-<file path=ppt/slides/slide2.xml><?xml version="1.0" encoding="utf-8"?>
+<file path=ppt/slides/slide16.xml><?xml version="1.0" encoding="utf-8"?>
 <p:sld xmlns:a="http://schemas.openxmlformats.org/drawingml/2006/main" xmlns:p="http://schemas.openxmlformats.org/presentationml/2006/main" xmlns:r="http://schemas.openxmlformats.org/officeDocument/2006/relationships">
   <p:cSld>
     <p:bg>
@@ -5784,21 +4919,589 @@
                 </a:solidFill>
                 <a:latin typeface="Calibri"/>
               </a:rPr>
-              <a:t>The Problem &amp; Goal</a:t>
-            </a:r>
-          </a:p>
-        </p:txBody>
-      </p:sp>
-      <p:sp>
-        <p:nvSpPr>
-          <p:cNvPr id="4" name="TextBox 3"/>
+              <a:t>The Results Journey — From False Claim to Truth</a:t>
+            </a:r>
+          </a:p>
+        </p:txBody>
+      </p:sp>
+      <p:graphicFrame>
+        <p:nvGraphicFramePr>
+          <p:cNvPr id="4" name="Table 3"/>
+          <p:cNvGraphicFramePr>
+            <a:graphicFrameLocks noGrp="1"/>
+          </p:cNvGraphicFramePr>
+          <p:nvPr/>
+        </p:nvGraphicFramePr>
+        <p:xfrm>
+          <a:off x="502920" y="1371600"/>
+          <a:ext cx="11247120" cy="3200400"/>
+        </p:xfrm>
+        <a:graphic>
+          <a:graphicData uri="http://schemas.openxmlformats.org/drawingml/2006/table">
+            <a:tbl>
+              <a:tblPr firstRow="1" bandRow="1">
+                <a:tableStyleId>{5C22544A-7EE6-4342-B048-85BDC9FD1C3A}</a:tableStyleId>
+              </a:tblPr>
+              <a:tblGrid>
+                <a:gridCol w="4206240"/>
+                <a:gridCol w="2103120"/>
+                <a:gridCol w="2194560"/>
+                <a:gridCol w="2743200"/>
+              </a:tblGrid>
+              <a:tr h="533400">
+                <a:tc>
+                  <a:txBody>
+                    <a:bodyPr wrap="square"/>
+                    <a:lstStyle/>
+                    <a:p>
+                      <a:r>
+                        <a:rPr sz="1300" b="1">
+                          <a:solidFill>
+                            <a:srgbClr val="FFFFFF"/>
+                          </a:solidFill>
+                          <a:latin typeface="Calibri"/>
+                        </a:rPr>
+                        <a:t>Stage</a:t>
+                      </a:r>
+                    </a:p>
+                  </a:txBody>
+                  <a:tcPr marL="54864" marR="54864" marT="18288" marB="18288">
+                    <a:solidFill>
+                      <a:srgbClr val="1B263B"/>
+                    </a:solidFill>
+                  </a:tcPr>
+                </a:tc>
+                <a:tc>
+                  <a:txBody>
+                    <a:bodyPr wrap="square"/>
+                    <a:lstStyle/>
+                    <a:p>
+                      <a:r>
+                        <a:rPr sz="1300" b="1">
+                          <a:solidFill>
+                            <a:srgbClr val="FFFFFF"/>
+                          </a:solidFill>
+                          <a:latin typeface="Calibri"/>
+                        </a:rPr>
+                        <a:t>SVM mean Δ</a:t>
+                      </a:r>
+                    </a:p>
+                  </a:txBody>
+                  <a:tcPr marL="54864" marR="54864" marT="18288" marB="18288">
+                    <a:solidFill>
+                      <a:srgbClr val="1B263B"/>
+                    </a:solidFill>
+                  </a:tcPr>
+                </a:tc>
+                <a:tc>
+                  <a:txBody>
+                    <a:bodyPr wrap="square"/>
+                    <a:lstStyle/>
+                    <a:p>
+                      <a:r>
+                        <a:rPr sz="1300" b="1">
+                          <a:solidFill>
+                            <a:srgbClr val="FFFFFF"/>
+                          </a:solidFill>
+                          <a:latin typeface="Calibri"/>
+                        </a:rPr>
+                        <a:t>Significant?</a:t>
+                      </a:r>
+                    </a:p>
+                  </a:txBody>
+                  <a:tcPr marL="54864" marR="54864" marT="18288" marB="18288">
+                    <a:solidFill>
+                      <a:srgbClr val="1B263B"/>
+                    </a:solidFill>
+                  </a:tcPr>
+                </a:tc>
+                <a:tc>
+                  <a:txBody>
+                    <a:bodyPr wrap="square"/>
+                    <a:lstStyle/>
+                    <a:p>
+                      <a:r>
+                        <a:rPr sz="1300" b="1">
+                          <a:solidFill>
+                            <a:srgbClr val="FFFFFF"/>
+                          </a:solidFill>
+                          <a:latin typeface="Calibri"/>
+                        </a:rPr>
+                        <a:t>Reality</a:t>
+                      </a:r>
+                    </a:p>
+                  </a:txBody>
+                  <a:tcPr marL="54864" marR="54864" marT="18288" marB="18288">
+                    <a:solidFill>
+                      <a:srgbClr val="1B263B"/>
+                    </a:solidFill>
+                  </a:tcPr>
+                </a:tc>
+              </a:tr>
+              <a:tr h="533400">
+                <a:tc>
+                  <a:txBody>
+                    <a:bodyPr wrap="square"/>
+                    <a:lstStyle/>
+                    <a:p>
+                      <a:r>
+                        <a:rPr sz="1300">
+                          <a:solidFill>
+                            <a:srgbClr val="1B263B"/>
+                          </a:solidFill>
+                          <a:latin typeface="Calibri"/>
+                        </a:rPr>
+                        <a:t>Original (single seed, weak baseline)</a:t>
+                      </a:r>
+                    </a:p>
+                  </a:txBody>
+                  <a:tcPr marL="54864" marR="54864" marT="18288" marB="18288">
+                    <a:solidFill>
+                      <a:srgbClr val="FFFFFF"/>
+                    </a:solidFill>
+                  </a:tcPr>
+                </a:tc>
+                <a:tc>
+                  <a:txBody>
+                    <a:bodyPr wrap="square"/>
+                    <a:lstStyle/>
+                    <a:p>
+                      <a:r>
+                        <a:rPr sz="1300">
+                          <a:solidFill>
+                            <a:srgbClr val="1B263B"/>
+                          </a:solidFill>
+                          <a:latin typeface="Calibri"/>
+                        </a:rPr>
+                        <a:t>+0.051</a:t>
+                      </a:r>
+                    </a:p>
+                  </a:txBody>
+                  <a:tcPr marL="54864" marR="54864" marT="18288" marB="18288">
+                    <a:solidFill>
+                      <a:srgbClr val="FFFFFF"/>
+                    </a:solidFill>
+                  </a:tcPr>
+                </a:tc>
+                <a:tc>
+                  <a:txBody>
+                    <a:bodyPr wrap="square"/>
+                    <a:lstStyle/>
+                    <a:p>
+                      <a:r>
+                        <a:rPr sz="1300">
+                          <a:solidFill>
+                            <a:srgbClr val="1B263B"/>
+                          </a:solidFill>
+                          <a:latin typeface="Calibri"/>
+                        </a:rPr>
+                        <a:t>— (no test)</a:t>
+                      </a:r>
+                    </a:p>
+                  </a:txBody>
+                  <a:tcPr marL="54864" marR="54864" marT="18288" marB="18288">
+                    <a:solidFill>
+                      <a:srgbClr val="FFFFFF"/>
+                    </a:solidFill>
+                  </a:tcPr>
+                </a:tc>
+                <a:tc>
+                  <a:txBody>
+                    <a:bodyPr wrap="square"/>
+                    <a:lstStyle/>
+                    <a:p>
+                      <a:r>
+                        <a:rPr sz="1300">
+                          <a:solidFill>
+                            <a:srgbClr val="1B263B"/>
+                          </a:solidFill>
+                          <a:latin typeface="Calibri"/>
+                        </a:rPr>
+                        <a:t>anecdote</a:t>
+                      </a:r>
+                    </a:p>
+                  </a:txBody>
+                  <a:tcPr marL="54864" marR="54864" marT="18288" marB="18288">
+                    <a:solidFill>
+                      <a:srgbClr val="FFFFFF"/>
+                    </a:solidFill>
+                  </a:tcPr>
+                </a:tc>
+              </a:tr>
+              <a:tr h="533400">
+                <a:tc>
+                  <a:txBody>
+                    <a:bodyPr wrap="square"/>
+                    <a:lstStyle/>
+                    <a:p>
+                      <a:r>
+                        <a:rPr sz="1300">
+                          <a:solidFill>
+                            <a:srgbClr val="1B263B"/>
+                          </a:solidFill>
+                          <a:latin typeface="Calibri"/>
+                        </a:rPr>
+                        <a:t>Multi-seed, weak baseline</a:t>
+                      </a:r>
+                    </a:p>
+                  </a:txBody>
+                  <a:tcPr marL="54864" marR="54864" marT="18288" marB="18288">
+                    <a:solidFill>
+                      <a:srgbClr val="ECF0F3"/>
+                    </a:solidFill>
+                  </a:tcPr>
+                </a:tc>
+                <a:tc>
+                  <a:txBody>
+                    <a:bodyPr wrap="square"/>
+                    <a:lstStyle/>
+                    <a:p>
+                      <a:r>
+                        <a:rPr sz="1300">
+                          <a:solidFill>
+                            <a:srgbClr val="1B263B"/>
+                          </a:solidFill>
+                          <a:latin typeface="Calibri"/>
+                        </a:rPr>
+                        <a:t>+0.030</a:t>
+                      </a:r>
+                    </a:p>
+                  </a:txBody>
+                  <a:tcPr marL="54864" marR="54864" marT="18288" marB="18288">
+                    <a:solidFill>
+                      <a:srgbClr val="ECF0F3"/>
+                    </a:solidFill>
+                  </a:tcPr>
+                </a:tc>
+                <a:tc>
+                  <a:txBody>
+                    <a:bodyPr wrap="square"/>
+                    <a:lstStyle/>
+                    <a:p>
+                      <a:r>
+                        <a:rPr sz="1300">
+                          <a:solidFill>
+                            <a:srgbClr val="1B263B"/>
+                          </a:solidFill>
+                          <a:latin typeface="Calibri"/>
+                        </a:rPr>
+                        <a:t>No (p=0.10)</a:t>
+                      </a:r>
+                    </a:p>
+                  </a:txBody>
+                  <a:tcPr marL="54864" marR="54864" marT="18288" marB="18288">
+                    <a:solidFill>
+                      <a:srgbClr val="ECF0F3"/>
+                    </a:solidFill>
+                  </a:tcPr>
+                </a:tc>
+                <a:tc>
+                  <a:txBody>
+                    <a:bodyPr wrap="square"/>
+                    <a:lstStyle/>
+                    <a:p>
+                      <a:r>
+                        <a:rPr sz="1300">
+                          <a:solidFill>
+                            <a:srgbClr val="1B263B"/>
+                          </a:solidFill>
+                          <a:latin typeface="Calibri"/>
+                        </a:rPr>
+                        <a:t>noise</a:t>
+                      </a:r>
+                    </a:p>
+                  </a:txBody>
+                  <a:tcPr marL="54864" marR="54864" marT="18288" marB="18288">
+                    <a:solidFill>
+                      <a:srgbClr val="ECF0F3"/>
+                    </a:solidFill>
+                  </a:tcPr>
+                </a:tc>
+              </a:tr>
+              <a:tr h="533400">
+                <a:tc>
+                  <a:txBody>
+                    <a:bodyPr wrap="square"/>
+                    <a:lstStyle/>
+                    <a:p>
+                      <a:r>
+                        <a:rPr sz="1300">
+                          <a:solidFill>
+                            <a:srgbClr val="1B263B"/>
+                          </a:solidFill>
+                          <a:latin typeface="Calibri"/>
+                        </a:rPr>
+                        <a:t>+ saturation off, deduplicated</a:t>
+                      </a:r>
+                    </a:p>
+                  </a:txBody>
+                  <a:tcPr marL="54864" marR="54864" marT="18288" marB="18288">
+                    <a:solidFill>
+                      <a:srgbClr val="FFFFFF"/>
+                    </a:solidFill>
+                  </a:tcPr>
+                </a:tc>
+                <a:tc>
+                  <a:txBody>
+                    <a:bodyPr wrap="square"/>
+                    <a:lstStyle/>
+                    <a:p>
+                      <a:r>
+                        <a:rPr sz="1300">
+                          <a:solidFill>
+                            <a:srgbClr val="1B263B"/>
+                          </a:solidFill>
+                          <a:latin typeface="Calibri"/>
+                        </a:rPr>
+                        <a:t>+0.091</a:t>
+                      </a:r>
+                    </a:p>
+                  </a:txBody>
+                  <a:tcPr marL="54864" marR="54864" marT="18288" marB="18288">
+                    <a:solidFill>
+                      <a:srgbClr val="FFFFFF"/>
+                    </a:solidFill>
+                  </a:tcPr>
+                </a:tc>
+                <a:tc>
+                  <a:txBody>
+                    <a:bodyPr wrap="square"/>
+                    <a:lstStyle/>
+                    <a:p>
+                      <a:r>
+                        <a:rPr sz="1300">
+                          <a:solidFill>
+                            <a:srgbClr val="1B263B"/>
+                          </a:solidFill>
+                          <a:latin typeface="Calibri"/>
+                        </a:rPr>
+                        <a:t>Yes (p=0.02)</a:t>
+                      </a:r>
+                    </a:p>
+                  </a:txBody>
+                  <a:tcPr marL="54864" marR="54864" marT="18288" marB="18288">
+                    <a:solidFill>
+                      <a:srgbClr val="FFFFFF"/>
+                    </a:solidFill>
+                  </a:tcPr>
+                </a:tc>
+                <a:tc>
+                  <a:txBody>
+                    <a:bodyPr wrap="square"/>
+                    <a:lstStyle/>
+                    <a:p>
+                      <a:r>
+                        <a:rPr sz="1300">
+                          <a:solidFill>
+                            <a:srgbClr val="1B263B"/>
+                          </a:solidFill>
+                          <a:latin typeface="Calibri"/>
+                        </a:rPr>
+                        <a:t>inflated by weak baseline</a:t>
+                      </a:r>
+                    </a:p>
+                  </a:txBody>
+                  <a:tcPr marL="54864" marR="54864" marT="18288" marB="18288">
+                    <a:solidFill>
+                      <a:srgbClr val="FFFFFF"/>
+                    </a:solidFill>
+                  </a:tcPr>
+                </a:tc>
+              </a:tr>
+              <a:tr h="533400">
+                <a:tc>
+                  <a:txBody>
+                    <a:bodyPr wrap="square"/>
+                    <a:lstStyle/>
+                    <a:p>
+                      <a:r>
+                        <a:rPr sz="1300">
+                          <a:solidFill>
+                            <a:srgbClr val="1B263B"/>
+                          </a:solidFill>
+                          <a:latin typeface="Calibri"/>
+                        </a:rPr>
+                        <a:t>+ FAIR baseline</a:t>
+                      </a:r>
+                    </a:p>
+                  </a:txBody>
+                  <a:tcPr marL="54864" marR="54864" marT="18288" marB="18288">
+                    <a:solidFill>
+                      <a:srgbClr val="ECF0F3"/>
+                    </a:solidFill>
+                  </a:tcPr>
+                </a:tc>
+                <a:tc>
+                  <a:txBody>
+                    <a:bodyPr wrap="square"/>
+                    <a:lstStyle/>
+                    <a:p>
+                      <a:r>
+                        <a:rPr sz="1300">
+                          <a:solidFill>
+                            <a:srgbClr val="1B263B"/>
+                          </a:solidFill>
+                          <a:latin typeface="Calibri"/>
+                        </a:rPr>
+                        <a:t>−0.037</a:t>
+                      </a:r>
+                    </a:p>
+                  </a:txBody>
+                  <a:tcPr marL="54864" marR="54864" marT="18288" marB="18288">
+                    <a:solidFill>
+                      <a:srgbClr val="ECF0F3"/>
+                    </a:solidFill>
+                  </a:tcPr>
+                </a:tc>
+                <a:tc>
+                  <a:txBody>
+                    <a:bodyPr wrap="square"/>
+                    <a:lstStyle/>
+                    <a:p>
+                      <a:r>
+                        <a:rPr sz="1300">
+                          <a:solidFill>
+                            <a:srgbClr val="1B263B"/>
+                          </a:solidFill>
+                          <a:latin typeface="Calibri"/>
+                        </a:rPr>
+                        <a:t>No (p=0.17)</a:t>
+                      </a:r>
+                    </a:p>
+                  </a:txBody>
+                  <a:tcPr marL="54864" marR="54864" marT="18288" marB="18288">
+                    <a:solidFill>
+                      <a:srgbClr val="ECF0F3"/>
+                    </a:solidFill>
+                  </a:tcPr>
+                </a:tc>
+                <a:tc>
+                  <a:txBody>
+                    <a:bodyPr wrap="square"/>
+                    <a:lstStyle/>
+                    <a:p>
+                      <a:r>
+                        <a:rPr sz="1300">
+                          <a:solidFill>
+                            <a:srgbClr val="1B263B"/>
+                          </a:solidFill>
+                          <a:latin typeface="Calibri"/>
+                        </a:rPr>
+                        <a:t>win evaporates</a:t>
+                      </a:r>
+                    </a:p>
+                  </a:txBody>
+                  <a:tcPr marL="54864" marR="54864" marT="18288" marB="18288">
+                    <a:solidFill>
+                      <a:srgbClr val="ECF0F3"/>
+                    </a:solidFill>
+                  </a:tcPr>
+                </a:tc>
+              </a:tr>
+              <a:tr h="533400">
+                <a:tc>
+                  <a:txBody>
+                    <a:bodyPr wrap="square"/>
+                    <a:lstStyle/>
+                    <a:p>
+                      <a:r>
+                        <a:rPr sz="1300">
+                          <a:solidFill>
+                            <a:srgbClr val="1B263B"/>
+                          </a:solidFill>
+                          <a:latin typeface="Calibri"/>
+                        </a:rPr>
+                        <a:t>+ all bugs fixed (FINAL)</a:t>
+                      </a:r>
+                    </a:p>
+                  </a:txBody>
+                  <a:tcPr marL="54864" marR="54864" marT="18288" marB="18288">
+                    <a:solidFill>
+                      <a:srgbClr val="FFFFFF"/>
+                    </a:solidFill>
+                  </a:tcPr>
+                </a:tc>
+                <a:tc>
+                  <a:txBody>
+                    <a:bodyPr wrap="square"/>
+                    <a:lstStyle/>
+                    <a:p>
+                      <a:r>
+                        <a:rPr sz="1300">
+                          <a:solidFill>
+                            <a:srgbClr val="1B263B"/>
+                          </a:solidFill>
+                          <a:latin typeface="Calibri"/>
+                        </a:rPr>
+                        <a:t>+0.003</a:t>
+                      </a:r>
+                    </a:p>
+                  </a:txBody>
+                  <a:tcPr marL="54864" marR="54864" marT="18288" marB="18288">
+                    <a:solidFill>
+                      <a:srgbClr val="FFFFFF"/>
+                    </a:solidFill>
+                  </a:tcPr>
+                </a:tc>
+                <a:tc>
+                  <a:txBody>
+                    <a:bodyPr wrap="square"/>
+                    <a:lstStyle/>
+                    <a:p>
+                      <a:r>
+                        <a:rPr sz="1300">
+                          <a:solidFill>
+                            <a:srgbClr val="1B263B"/>
+                          </a:solidFill>
+                          <a:latin typeface="Calibri"/>
+                        </a:rPr>
+                        <a:t>No (p=0.94)</a:t>
+                      </a:r>
+                    </a:p>
+                  </a:txBody>
+                  <a:tcPr marL="54864" marR="54864" marT="18288" marB="18288">
+                    <a:solidFill>
+                      <a:srgbClr val="FFFFFF"/>
+                    </a:solidFill>
+                  </a:tcPr>
+                </a:tc>
+                <a:tc>
+                  <a:txBody>
+                    <a:bodyPr wrap="square"/>
+                    <a:lstStyle/>
+                    <a:p>
+                      <a:r>
+                        <a:rPr sz="1300">
+                          <a:solidFill>
+                            <a:srgbClr val="1B263B"/>
+                          </a:solidFill>
+                          <a:latin typeface="Calibri"/>
+                        </a:rPr>
+                        <a:t>PARITY</a:t>
+                      </a:r>
+                    </a:p>
+                  </a:txBody>
+                  <a:tcPr marL="54864" marR="54864" marT="18288" marB="18288">
+                    <a:solidFill>
+                      <a:srgbClr val="FFFFFF"/>
+                    </a:solidFill>
+                  </a:tcPr>
+                </a:tc>
+              </a:tr>
+            </a:tbl>
+          </a:graphicData>
+        </a:graphic>
+      </p:graphicFrame>
+      <p:sp>
+        <p:nvSpPr>
+          <p:cNvPr id="5" name="TextBox 4"/>
           <p:cNvSpPr txBox="1"/>
           <p:nvPr/>
         </p:nvSpPr>
         <p:spPr>
           <a:xfrm>
-            <a:off x="640080" y="1371600"/>
-            <a:ext cx="10972800" cy="4937760"/>
+            <a:off x="640080" y="6309360"/>
+            <a:ext cx="10972800" cy="457200"/>
           </a:xfrm>
           <a:prstGeom prst="rect">
             <a:avLst/>
@@ -5811,99 +5514,13 @@
           </a:bodyPr>
           <a:lstStyle/>
           <a:p>
-            <a:pPr>
-              <a:spcAft>
-                <a:spcPts val="1100"/>
-              </a:spcAft>
-            </a:pPr>
-            <a:r>
-              <a:rPr sz="1800" b="0">
-                <a:solidFill>
-                  <a:srgbClr val="1B263B"/>
-                </a:solidFill>
-                <a:latin typeface="Calibri"/>
-              </a:rPr>
-              <a:t>•  EDA + preprocessing is manual, slow, and depends on analyst skill.</a:t>
-            </a:r>
-          </a:p>
-          <a:p>
-            <a:pPr>
-              <a:spcAft>
-                <a:spcPts val="1100"/>
-              </a:spcAft>
-            </a:pPr>
-            <a:r>
-              <a:rPr sz="1800" b="0">
-                <a:solidFill>
-                  <a:srgbClr val="1B263B"/>
-                </a:solidFill>
-                <a:latin typeface="Calibri"/>
-              </a:rPr>
-              <a:t>•  AUDA automates it: profile data, handle missing values, detect anomalies, transform features — in one call.</a:t>
-            </a:r>
-          </a:p>
-          <a:p>
-            <a:pPr>
-              <a:spcAft>
-                <a:spcPts val="1100"/>
-              </a:spcAft>
-            </a:pPr>
-            <a:r>
-              <a:rPr sz="1800" b="1">
-                <a:solidFill>
-                  <a:srgbClr val="2E6DB8"/>
-                </a:solidFill>
-                <a:latin typeface="Calibri"/>
-              </a:rPr>
-              <a:t>•  Research question:</a:t>
-            </a:r>
-          </a:p>
-          <a:p>
-            <a:pPr lvl="1">
-              <a:spcAft>
-                <a:spcPts val="1100"/>
-              </a:spcAft>
-            </a:pPr>
-            <a:r>
-              <a:rPr sz="1600" b="0">
-                <a:solidFill>
-                  <a:srgbClr val="1B263B"/>
-                </a:solidFill>
-                <a:latin typeface="Calibri"/>
-              </a:rPr>
-              <a:t>–  Can AUDA's automated preprocessing match or beat a human analyst?</a:t>
-            </a:r>
-          </a:p>
-          <a:p>
-            <a:pPr lvl="1">
-              <a:spcAft>
-                <a:spcPts val="1100"/>
-              </a:spcAft>
-            </a:pPr>
-            <a:r>
-              <a:rPr sz="1600" b="0">
-                <a:solidFill>
-                  <a:srgbClr val="1B263B"/>
-                </a:solidFill>
-                <a:latin typeface="Calibri"/>
-              </a:rPr>
-              <a:t>–  Measured objectively: train ML models on AUDA- vs manually-preprocessed data, compare ROC-AUC.</a:t>
-            </a:r>
-          </a:p>
-          <a:p>
-            <a:pPr>
-              <a:spcAft>
-                <a:spcPts val="1100"/>
-              </a:spcAft>
-            </a:pPr>
-            <a:r>
-              <a:rPr sz="1800" b="1">
-                <a:solidFill>
-                  <a:srgbClr val="27AE60"/>
-                </a:solidFill>
-                <a:latin typeface="Calibri"/>
-              </a:rPr>
-              <a:t>•  This talk: what AUDA does, how we tested it rigorously, the bugs we found, and the honest result.</a:t>
+            <a:r>
+              <a:rPr sz="1200" i="1">
+                <a:solidFill>
+                  <a:srgbClr val="555F6B"/>
+                </a:solidFill>
+              </a:rPr>
+              <a:t>Each step removed an artifact. The honest endpoint: AUDA neither beats nor harms a competent baseline.</a:t>
             </a:r>
           </a:p>
         </p:txBody>
@@ -5916,7 +5533,7 @@
 </p:sld>
 </file>
 
-<file path=ppt/slides/slide3.xml><?xml version="1.0" encoding="utf-8"?>
+<file path=ppt/slides/slide17.xml><?xml version="1.0" encoding="utf-8"?>
 <p:sld xmlns:a="http://schemas.openxmlformats.org/drawingml/2006/main" xmlns:p="http://schemas.openxmlformats.org/presentationml/2006/main" xmlns:r="http://schemas.openxmlformats.org/officeDocument/2006/relationships">
   <p:cSld>
     <p:bg>
@@ -6006,323 +5623,35 @@
                 </a:solidFill>
                 <a:latin typeface="Calibri"/>
               </a:rPr>
-              <a:t>What AUDA Does</a:t>
-            </a:r>
-          </a:p>
-          <a:p>
-            <a:r>
-              <a:rPr sz="1400" i="1">
-                <a:solidFill>
-                  <a:srgbClr val="B8C6D8"/>
-                </a:solidFill>
-              </a:rPr>
-              <a:t>A 4-stage pipeline + a feature transformer</a:t>
-            </a:r>
-          </a:p>
-        </p:txBody>
-      </p:sp>
-      <p:graphicFrame>
-        <p:nvGraphicFramePr>
-          <p:cNvPr id="4" name="Table 3"/>
-          <p:cNvGraphicFramePr>
-            <a:graphicFrameLocks noGrp="1"/>
-          </p:cNvGraphicFramePr>
+              <a:t>Final Result — Statistical Parity</a:t>
+            </a:r>
+          </a:p>
+        </p:txBody>
+      </p:sp>
+      <p:pic>
+        <p:nvPicPr>
+          <p:cNvPr id="4" name="Picture 3" descr="_c_parity.png"/>
+          <p:cNvPicPr>
+            <a:picLocks noChangeAspect="1"/>
+          </p:cNvPicPr>
           <p:nvPr/>
-        </p:nvGraphicFramePr>
-        <p:xfrm>
-          <a:off x="640080" y="1371600"/>
-          <a:ext cx="10972800" cy="3108960"/>
-        </p:xfrm>
-        <a:graphic>
-          <a:graphicData uri="http://schemas.openxmlformats.org/drawingml/2006/table">
-            <a:tbl>
-              <a:tblPr firstRow="1" bandRow="1">
-                <a:tableStyleId>{5C22544A-7EE6-4342-B048-85BDC9FD1C3A}</a:tableStyleId>
-              </a:tblPr>
-              <a:tblGrid>
-                <a:gridCol w="2377440"/>
-                <a:gridCol w="8595360"/>
-              </a:tblGrid>
-              <a:tr h="518160">
-                <a:tc>
-                  <a:txBody>
-                    <a:bodyPr wrap="square"/>
-                    <a:lstStyle/>
-                    <a:p>
-                      <a:r>
-                        <a:rPr sz="1400" b="1">
-                          <a:solidFill>
-                            <a:srgbClr val="FFFFFF"/>
-                          </a:solidFill>
-                          <a:latin typeface="Calibri"/>
-                        </a:rPr>
-                        <a:t>Stage</a:t>
-                      </a:r>
-                    </a:p>
-                  </a:txBody>
-                  <a:tcPr marL="54864" marR="54864" marT="18288" marB="18288">
-                    <a:solidFill>
-                      <a:srgbClr val="1B263B"/>
-                    </a:solidFill>
-                  </a:tcPr>
-                </a:tc>
-                <a:tc>
-                  <a:txBody>
-                    <a:bodyPr wrap="square"/>
-                    <a:lstStyle/>
-                    <a:p>
-                      <a:r>
-                        <a:rPr sz="1400" b="1">
-                          <a:solidFill>
-                            <a:srgbClr val="FFFFFF"/>
-                          </a:solidFill>
-                          <a:latin typeface="Calibri"/>
-                        </a:rPr>
-                        <a:t>What it does</a:t>
-                      </a:r>
-                    </a:p>
-                  </a:txBody>
-                  <a:tcPr marL="54864" marR="54864" marT="18288" marB="18288">
-                    <a:solidFill>
-                      <a:srgbClr val="1B263B"/>
-                    </a:solidFill>
-                  </a:tcPr>
-                </a:tc>
-              </a:tr>
-              <a:tr h="518160">
-                <a:tc>
-                  <a:txBody>
-                    <a:bodyPr wrap="square"/>
-                    <a:lstStyle/>
-                    <a:p>
-                      <a:r>
-                        <a:rPr sz="1400">
-                          <a:solidFill>
-                            <a:srgbClr val="1B263B"/>
-                          </a:solidFill>
-                          <a:latin typeface="Calibri"/>
-                        </a:rPr>
-                        <a:t>1. Profile</a:t>
-                      </a:r>
-                    </a:p>
-                  </a:txBody>
-                  <a:tcPr marL="54864" marR="54864" marT="18288" marB="18288">
-                    <a:solidFill>
-                      <a:srgbClr val="FFFFFF"/>
-                    </a:solidFill>
-                  </a:tcPr>
-                </a:tc>
-                <a:tc>
-                  <a:txBody>
-                    <a:bodyPr wrap="square"/>
-                    <a:lstStyle/>
-                    <a:p>
-                      <a:r>
-                        <a:rPr sz="1400">
-                          <a:solidFill>
-                            <a:srgbClr val="1B263B"/>
-                          </a:solidFill>
-                          <a:latin typeface="Calibri"/>
-                        </a:rPr>
-                        <a:t>Detect column types + numeric sub-type (ID vs ordinal vs continuous)</a:t>
-                      </a:r>
-                    </a:p>
-                  </a:txBody>
-                  <a:tcPr marL="54864" marR="54864" marT="18288" marB="18288">
-                    <a:solidFill>
-                      <a:srgbClr val="FFFFFF"/>
-                    </a:solidFill>
-                  </a:tcPr>
-                </a:tc>
-              </a:tr>
-              <a:tr h="518160">
-                <a:tc>
-                  <a:txBody>
-                    <a:bodyPr wrap="square"/>
-                    <a:lstStyle/>
-                    <a:p>
-                      <a:r>
-                        <a:rPr sz="1400">
-                          <a:solidFill>
-                            <a:srgbClr val="1B263B"/>
-                          </a:solidFill>
-                          <a:latin typeface="Calibri"/>
-                        </a:rPr>
-                        <a:t>2. Missing values</a:t>
-                      </a:r>
-                    </a:p>
-                  </a:txBody>
-                  <a:tcPr marL="54864" marR="54864" marT="18288" marB="18288">
-                    <a:solidFill>
-                      <a:srgbClr val="ECF0F3"/>
-                    </a:solidFill>
-                  </a:tcPr>
-                </a:tc>
-                <a:tc>
-                  <a:txBody>
-                    <a:bodyPr wrap="square"/>
-                    <a:lstStyle/>
-                    <a:p>
-                      <a:r>
-                        <a:rPr sz="1400">
-                          <a:solidFill>
-                            <a:srgbClr val="1B263B"/>
-                          </a:solidFill>
-                          <a:latin typeface="Calibri"/>
-                        </a:rPr>
-                        <a:t>Per-column strategy: KNN / median / mode / interpolate / drop</a:t>
-                      </a:r>
-                    </a:p>
-                  </a:txBody>
-                  <a:tcPr marL="54864" marR="54864" marT="18288" marB="18288">
-                    <a:solidFill>
-                      <a:srgbClr val="ECF0F3"/>
-                    </a:solidFill>
-                  </a:tcPr>
-                </a:tc>
-              </a:tr>
-              <a:tr h="518160">
-                <a:tc>
-                  <a:txBody>
-                    <a:bodyPr wrap="square"/>
-                    <a:lstStyle/>
-                    <a:p>
-                      <a:r>
-                        <a:rPr sz="1400">
-                          <a:solidFill>
-                            <a:srgbClr val="1B263B"/>
-                          </a:solidFill>
-                          <a:latin typeface="Calibri"/>
-                        </a:rPr>
-                        <a:t>3. Anomalies</a:t>
-                      </a:r>
-                    </a:p>
-                  </a:txBody>
-                  <a:tcPr marL="54864" marR="54864" marT="18288" marB="18288">
-                    <a:solidFill>
-                      <a:srgbClr val="FFFFFF"/>
-                    </a:solidFill>
-                  </a:tcPr>
-                </a:tc>
-                <a:tc>
-                  <a:txBody>
-                    <a:bodyPr wrap="square"/>
-                    <a:lstStyle/>
-                    <a:p>
-                      <a:r>
-                        <a:rPr sz="1400">
-                          <a:solidFill>
-                            <a:srgbClr val="1B263B"/>
-                          </a:solidFill>
-                          <a:latin typeface="Calibri"/>
-                        </a:rPr>
-                        <a:t>Outlier detection — IQR, Z-score, Isolation Forest (report only)</a:t>
-                      </a:r>
-                    </a:p>
-                  </a:txBody>
-                  <a:tcPr marL="54864" marR="54864" marT="18288" marB="18288">
-                    <a:solidFill>
-                      <a:srgbClr val="FFFFFF"/>
-                    </a:solidFill>
-                  </a:tcPr>
-                </a:tc>
-              </a:tr>
-              <a:tr h="518160">
-                <a:tc>
-                  <a:txBody>
-                    <a:bodyPr wrap="square"/>
-                    <a:lstStyle/>
-                    <a:p>
-                      <a:r>
-                        <a:rPr sz="1400">
-                          <a:solidFill>
-                            <a:srgbClr val="1B263B"/>
-                          </a:solidFill>
-                          <a:latin typeface="Calibri"/>
-                        </a:rPr>
-                        <a:t>4. Recommend</a:t>
-                      </a:r>
-                    </a:p>
-                  </a:txBody>
-                  <a:tcPr marL="54864" marR="54864" marT="18288" marB="18288">
-                    <a:solidFill>
-                      <a:srgbClr val="ECF0F3"/>
-                    </a:solidFill>
-                  </a:tcPr>
-                </a:tc>
-                <a:tc>
-                  <a:txBody>
-                    <a:bodyPr wrap="square"/>
-                    <a:lstStyle/>
-                    <a:p>
-                      <a:r>
-                        <a:rPr sz="1400">
-                          <a:solidFill>
-                            <a:srgbClr val="1B263B"/>
-                          </a:solidFill>
-                          <a:latin typeface="Calibri"/>
-                        </a:rPr>
-                        <a:t>Feature suggestions, rule-based (+ optional LLM)</a:t>
-                      </a:r>
-                    </a:p>
-                  </a:txBody>
-                  <a:tcPr marL="54864" marR="54864" marT="18288" marB="18288">
-                    <a:solidFill>
-                      <a:srgbClr val="ECF0F3"/>
-                    </a:solidFill>
-                  </a:tcPr>
-                </a:tc>
-              </a:tr>
-              <a:tr h="518160">
-                <a:tc>
-                  <a:txBody>
-                    <a:bodyPr wrap="square"/>
-                    <a:lstStyle/>
-                    <a:p>
-                      <a:r>
-                        <a:rPr sz="1400">
-                          <a:solidFill>
-                            <a:srgbClr val="1B263B"/>
-                          </a:solidFill>
-                          <a:latin typeface="Calibri"/>
-                        </a:rPr>
-                        <a:t>Transformer</a:t>
-                      </a:r>
-                    </a:p>
-                  </a:txBody>
-                  <a:tcPr marL="54864" marR="54864" marT="18288" marB="18288">
-                    <a:solidFill>
-                      <a:srgbClr val="FFFFFF"/>
-                    </a:solidFill>
-                  </a:tcPr>
-                </a:tc>
-                <a:tc>
-                  <a:txBody>
-                    <a:bodyPr wrap="square"/>
-                    <a:lstStyle/>
-                    <a:p>
-                      <a:r>
-                        <a:rPr sz="1400">
-                          <a:solidFill>
-                            <a:srgbClr val="1B263B"/>
-                          </a:solidFill>
-                          <a:latin typeface="Calibri"/>
-                        </a:rPr>
-                        <a:t>Encoding, outlier capping, log1p, scaling, feature selection — fed to the model</a:t>
-                      </a:r>
-                    </a:p>
-                  </a:txBody>
-                  <a:tcPr marL="54864" marR="54864" marT="18288" marB="18288">
-                    <a:solidFill>
-                      <a:srgbClr val="FFFFFF"/>
-                    </a:solidFill>
-                  </a:tcPr>
-                </a:tc>
-              </a:tr>
-            </a:tbl>
-          </a:graphicData>
-        </a:graphic>
-      </p:graphicFrame>
+        </p:nvPicPr>
+        <p:blipFill>
+          <a:blip r:embed="rId2"/>
+          <a:stretch>
+            <a:fillRect/>
+          </a:stretch>
+        </p:blipFill>
+        <p:spPr>
+          <a:xfrm>
+            <a:off x="548640" y="1371600"/>
+            <a:ext cx="5760720" cy="3722311"/>
+          </a:xfrm>
+          <a:prstGeom prst="rect">
+            <a:avLst/>
+          </a:prstGeom>
+        </p:spPr>
+      </p:pic>
       <p:sp>
         <p:nvSpPr>
           <p:cNvPr id="5" name="TextBox 4"/>
@@ -6331,8 +5660,8 @@
         </p:nvSpPr>
         <p:spPr>
           <a:xfrm>
-            <a:off x="640080" y="6309360"/>
-            <a:ext cx="10972800" cy="457200"/>
+            <a:off x="6583680" y="1737360"/>
+            <a:ext cx="5120640" cy="4114800"/>
           </a:xfrm>
           <a:prstGeom prst="rect">
             <a:avLst/>
@@ -6345,13 +5674,83 @@
           </a:bodyPr>
           <a:lstStyle/>
           <a:p>
-            <a:r>
-              <a:rPr sz="1200" i="1">
-                <a:solidFill>
-                  <a:srgbClr val="555F6B"/>
-                </a:solidFill>
-              </a:rPr>
-              <a:t>Key insight: the FeatureTransformer is what actually changes the data for ML. The anomaly report &amp; LLM suggestions are informational only.</a:t>
+            <a:pPr>
+              <a:spcAft>
+                <a:spcPts val="1300"/>
+              </a:spcAft>
+            </a:pPr>
+            <a:r>
+              <a:rPr sz="1700" b="1">
+                <a:solidFill>
+                  <a:srgbClr val="27AE60"/>
+                </a:solidFill>
+                <a:latin typeface="Calibri"/>
+              </a:rPr>
+              <a:t>•  RandomForest:  −0.001   (p = 0.29)</a:t>
+            </a:r>
+          </a:p>
+          <a:p>
+            <a:pPr>
+              <a:spcAft>
+                <a:spcPts val="1300"/>
+              </a:spcAft>
+            </a:pPr>
+            <a:r>
+              <a:rPr sz="1700" b="1">
+                <a:solidFill>
+                  <a:srgbClr val="8E44AD"/>
+                </a:solidFill>
+                <a:latin typeface="Calibri"/>
+              </a:rPr>
+              <a:t>•  SVM:  +0.003   (p = 0.94)</a:t>
+            </a:r>
+          </a:p>
+          <a:p>
+            <a:pPr>
+              <a:spcAft>
+                <a:spcPts val="1300"/>
+              </a:spcAft>
+            </a:pPr>
+            <a:r>
+              <a:rPr sz="1700" b="1">
+                <a:solidFill>
+                  <a:srgbClr val="1B263B"/>
+                </a:solidFill>
+                <a:latin typeface="Calibri"/>
+              </a:rPr>
+              <a:t>•  Both ≈ 0, neither significant.</a:t>
+            </a:r>
+          </a:p>
+          <a:p>
+            <a:pPr>
+              <a:spcAft>
+                <a:spcPts val="1300"/>
+              </a:spcAft>
+            </a:pPr>
+            <a:r>
+              <a:rPr sz="1700" b="0">
+                <a:solidFill>
+                  <a:srgbClr val="1B263B"/>
+                </a:solidFill>
+                <a:latin typeface="Calibri"/>
+              </a:rPr>
+              <a:t>•  Across 32 datasets, 5 seeds.</a:t>
+            </a:r>
+          </a:p>
+          <a:p>
+            <a:pPr>
+              <a:spcAft>
+                <a:spcPts val="1300"/>
+              </a:spcAft>
+            </a:pPr>
+            <a:r>
+              <a:rPr sz="1700" b="0">
+                <a:solidFill>
+                  <a:srgbClr val="1B263B"/>
+                </a:solidFill>
+                <a:latin typeface="Calibri"/>
+              </a:rPr>
+              <a:t>•  AUDA matches competent manual preprocessing — no significant difference.</a:t>
             </a:r>
           </a:p>
         </p:txBody>
@@ -6364,7 +5763,7 @@
 </p:sld>
 </file>
 
-<file path=ppt/slides/slide4.xml><?xml version="1.0" encoding="utf-8"?>
+<file path=ppt/slides/slide18.xml><?xml version="1.0" encoding="utf-8"?>
 <p:sld xmlns:a="http://schemas.openxmlformats.org/drawingml/2006/main" xmlns:p="http://schemas.openxmlformats.org/presentationml/2006/main" xmlns:r="http://schemas.openxmlformats.org/officeDocument/2006/relationships">
   <p:cSld>
     <p:bg>
@@ -6454,669 +5853,35 @@
                 </a:solidFill>
                 <a:latin typeface="Calibri"/>
               </a:rPr>
-              <a:t>Manual EDA (Baseline) vs AUDA</a:t>
-            </a:r>
-          </a:p>
-        </p:txBody>
-      </p:sp>
-      <p:graphicFrame>
-        <p:nvGraphicFramePr>
-          <p:cNvPr id="4" name="Table 3"/>
-          <p:cNvGraphicFramePr>
-            <a:graphicFrameLocks noGrp="1"/>
-          </p:cNvGraphicFramePr>
+              <a:t>Per-Dataset View — Mostly Parity</a:t>
+            </a:r>
+          </a:p>
+        </p:txBody>
+      </p:sp>
+      <p:pic>
+        <p:nvPicPr>
+          <p:cNvPr id="4" name="Picture 3" descr="_c_perdataset.png"/>
+          <p:cNvPicPr>
+            <a:picLocks noChangeAspect="1"/>
+          </p:cNvPicPr>
           <p:nvPr/>
-        </p:nvGraphicFramePr>
-        <p:xfrm>
-          <a:off x="548640" y="1325880"/>
-          <a:ext cx="11155680" cy="3200400"/>
-        </p:xfrm>
-        <a:graphic>
-          <a:graphicData uri="http://schemas.openxmlformats.org/drawingml/2006/table">
-            <a:tbl>
-              <a:tblPr firstRow="1" bandRow="1">
-                <a:tableStyleId>{5C22544A-7EE6-4342-B048-85BDC9FD1C3A}</a:tableStyleId>
-              </a:tblPr>
-              <a:tblGrid>
-                <a:gridCol w="2468880"/>
-                <a:gridCol w="2377440"/>
-                <a:gridCol w="3291840"/>
-                <a:gridCol w="3017520"/>
-              </a:tblGrid>
-              <a:tr h="457200">
-                <a:tc>
-                  <a:txBody>
-                    <a:bodyPr wrap="square"/>
-                    <a:lstStyle/>
-                    <a:p>
-                      <a:r>
-                        <a:rPr sz="1300" b="1">
-                          <a:solidFill>
-                            <a:srgbClr val="FFFFFF"/>
-                          </a:solidFill>
-                          <a:latin typeface="Calibri"/>
-                        </a:rPr>
-                        <a:t>Step</a:t>
-                      </a:r>
-                    </a:p>
-                  </a:txBody>
-                  <a:tcPr marL="54864" marR="54864" marT="18288" marB="18288">
-                    <a:solidFill>
-                      <a:srgbClr val="1B263B"/>
-                    </a:solidFill>
-                  </a:tcPr>
-                </a:tc>
-                <a:tc>
-                  <a:txBody>
-                    <a:bodyPr wrap="square"/>
-                    <a:lstStyle/>
-                    <a:p>
-                      <a:r>
-                        <a:rPr sz="1300" b="1">
-                          <a:solidFill>
-                            <a:srgbClr val="FFFFFF"/>
-                          </a:solidFill>
-                          <a:latin typeface="Calibri"/>
-                        </a:rPr>
-                        <a:t>Weak baseline</a:t>
-                      </a:r>
-                    </a:p>
-                  </a:txBody>
-                  <a:tcPr marL="54864" marR="54864" marT="18288" marB="18288">
-                    <a:solidFill>
-                      <a:srgbClr val="1B263B"/>
-                    </a:solidFill>
-                  </a:tcPr>
-                </a:tc>
-                <a:tc>
-                  <a:txBody>
-                    <a:bodyPr wrap="square"/>
-                    <a:lstStyle/>
-                    <a:p>
-                      <a:r>
-                        <a:rPr sz="1300" b="1">
-                          <a:solidFill>
-                            <a:srgbClr val="FFFFFF"/>
-                          </a:solidFill>
-                          <a:latin typeface="Calibri"/>
-                        </a:rPr>
-                        <a:t>Fair baseline</a:t>
-                      </a:r>
-                    </a:p>
-                  </a:txBody>
-                  <a:tcPr marL="54864" marR="54864" marT="18288" marB="18288">
-                    <a:solidFill>
-                      <a:srgbClr val="1B263B"/>
-                    </a:solidFill>
-                  </a:tcPr>
-                </a:tc>
-                <a:tc>
-                  <a:txBody>
-                    <a:bodyPr wrap="square"/>
-                    <a:lstStyle/>
-                    <a:p>
-                      <a:r>
-                        <a:rPr sz="1300" b="1">
-                          <a:solidFill>
-                            <a:srgbClr val="FFFFFF"/>
-                          </a:solidFill>
-                          <a:latin typeface="Calibri"/>
-                        </a:rPr>
-                        <a:t>AUDA</a:t>
-                      </a:r>
-                    </a:p>
-                  </a:txBody>
-                  <a:tcPr marL="54864" marR="54864" marT="18288" marB="18288">
-                    <a:solidFill>
-                      <a:srgbClr val="1B263B"/>
-                    </a:solidFill>
-                  </a:tcPr>
-                </a:tc>
-              </a:tr>
-              <a:tr h="457200">
-                <a:tc>
-                  <a:txBody>
-                    <a:bodyPr wrap="square"/>
-                    <a:lstStyle/>
-                    <a:p>
-                      <a:r>
-                        <a:rPr sz="1300">
-                          <a:solidFill>
-                            <a:srgbClr val="1B263B"/>
-                          </a:solidFill>
-                          <a:latin typeface="Calibri"/>
-                        </a:rPr>
-                        <a:t>Missing numbers</a:t>
-                      </a:r>
-                    </a:p>
-                  </a:txBody>
-                  <a:tcPr marL="54864" marR="54864" marT="18288" marB="18288">
-                    <a:solidFill>
-                      <a:srgbClr val="FFFFFF"/>
-                    </a:solidFill>
-                  </a:tcPr>
-                </a:tc>
-                <a:tc>
-                  <a:txBody>
-                    <a:bodyPr wrap="square"/>
-                    <a:lstStyle/>
-                    <a:p>
-                      <a:r>
-                        <a:rPr sz="1300">
-                          <a:solidFill>
-                            <a:srgbClr val="1B263B"/>
-                          </a:solidFill>
-                          <a:latin typeface="Calibri"/>
-                        </a:rPr>
-                        <a:t>mean</a:t>
-                      </a:r>
-                    </a:p>
-                  </a:txBody>
-                  <a:tcPr marL="54864" marR="54864" marT="18288" marB="18288">
-                    <a:solidFill>
-                      <a:srgbClr val="FFFFFF"/>
-                    </a:solidFill>
-                  </a:tcPr>
-                </a:tc>
-                <a:tc>
-                  <a:txBody>
-                    <a:bodyPr wrap="square"/>
-                    <a:lstStyle/>
-                    <a:p>
-                      <a:r>
-                        <a:rPr sz="1300">
-                          <a:solidFill>
-                            <a:srgbClr val="1B263B"/>
-                          </a:solidFill>
-                          <a:latin typeface="Calibri"/>
-                        </a:rPr>
-                        <a:t>median</a:t>
-                      </a:r>
-                    </a:p>
-                  </a:txBody>
-                  <a:tcPr marL="54864" marR="54864" marT="18288" marB="18288">
-                    <a:solidFill>
-                      <a:srgbClr val="FFFFFF"/>
-                    </a:solidFill>
-                  </a:tcPr>
-                </a:tc>
-                <a:tc>
-                  <a:txBody>
-                    <a:bodyPr wrap="square"/>
-                    <a:lstStyle/>
-                    <a:p>
-                      <a:r>
-                        <a:rPr sz="1300">
-                          <a:solidFill>
-                            <a:srgbClr val="1B263B"/>
-                          </a:solidFill>
-                          <a:latin typeface="Calibri"/>
-                        </a:rPr>
-                        <a:t>KNN</a:t>
-                      </a:r>
-                    </a:p>
-                  </a:txBody>
-                  <a:tcPr marL="54864" marR="54864" marT="18288" marB="18288">
-                    <a:solidFill>
-                      <a:srgbClr val="FFFFFF"/>
-                    </a:solidFill>
-                  </a:tcPr>
-                </a:tc>
-              </a:tr>
-              <a:tr h="457200">
-                <a:tc>
-                  <a:txBody>
-                    <a:bodyPr wrap="square"/>
-                    <a:lstStyle/>
-                    <a:p>
-                      <a:r>
-                        <a:rPr sz="1300">
-                          <a:solidFill>
-                            <a:srgbClr val="1B263B"/>
-                          </a:solidFill>
-                          <a:latin typeface="Calibri"/>
-                        </a:rPr>
-                        <a:t>Encode categories</a:t>
-                      </a:r>
-                    </a:p>
-                  </a:txBody>
-                  <a:tcPr marL="54864" marR="54864" marT="18288" marB="18288">
-                    <a:solidFill>
-                      <a:srgbClr val="ECF0F3"/>
-                    </a:solidFill>
-                  </a:tcPr>
-                </a:tc>
-                <a:tc>
-                  <a:txBody>
-                    <a:bodyPr wrap="square"/>
-                    <a:lstStyle/>
-                    <a:p>
-                      <a:r>
-                        <a:rPr sz="1300">
-                          <a:solidFill>
-                            <a:srgbClr val="1B263B"/>
-                          </a:solidFill>
-                          <a:latin typeface="Calibri"/>
-                        </a:rPr>
-                        <a:t>ordinal (all)</a:t>
-                      </a:r>
-                    </a:p>
-                  </a:txBody>
-                  <a:tcPr marL="54864" marR="54864" marT="18288" marB="18288">
-                    <a:solidFill>
-                      <a:srgbClr val="ECF0F3"/>
-                    </a:solidFill>
-                  </a:tcPr>
-                </a:tc>
-                <a:tc>
-                  <a:txBody>
-                    <a:bodyPr wrap="square"/>
-                    <a:lstStyle/>
-                    <a:p>
-                      <a:r>
-                        <a:rPr sz="1300">
-                          <a:solidFill>
-                            <a:srgbClr val="1B263B"/>
-                          </a:solidFill>
-                          <a:latin typeface="Calibri"/>
-                        </a:rPr>
-                        <a:t>one-hot + frequency</a:t>
-                      </a:r>
-                    </a:p>
-                  </a:txBody>
-                  <a:tcPr marL="54864" marR="54864" marT="18288" marB="18288">
-                    <a:solidFill>
-                      <a:srgbClr val="ECF0F3"/>
-                    </a:solidFill>
-                  </a:tcPr>
-                </a:tc>
-                <a:tc>
-                  <a:txBody>
-                    <a:bodyPr wrap="square"/>
-                    <a:lstStyle/>
-                    <a:p>
-                      <a:r>
-                        <a:rPr sz="1300">
-                          <a:solidFill>
-                            <a:srgbClr val="1B263B"/>
-                          </a:solidFill>
-                          <a:latin typeface="Calibri"/>
-                        </a:rPr>
-                        <a:t>one-hot + frequency</a:t>
-                      </a:r>
-                    </a:p>
-                  </a:txBody>
-                  <a:tcPr marL="54864" marR="54864" marT="18288" marB="18288">
-                    <a:solidFill>
-                      <a:srgbClr val="ECF0F3"/>
-                    </a:solidFill>
-                  </a:tcPr>
-                </a:tc>
-              </a:tr>
-              <a:tr h="457200">
-                <a:tc>
-                  <a:txBody>
-                    <a:bodyPr wrap="square"/>
-                    <a:lstStyle/>
-                    <a:p>
-                      <a:r>
-                        <a:rPr sz="1300">
-                          <a:solidFill>
-                            <a:srgbClr val="1B263B"/>
-                          </a:solidFill>
-                          <a:latin typeface="Calibri"/>
-                        </a:rPr>
-                        <a:t>Scaling (for SVM)</a:t>
-                      </a:r>
-                    </a:p>
-                  </a:txBody>
-                  <a:tcPr marL="54864" marR="54864" marT="18288" marB="18288">
-                    <a:solidFill>
-                      <a:srgbClr val="FFFFFF"/>
-                    </a:solidFill>
-                  </a:tcPr>
-                </a:tc>
-                <a:tc>
-                  <a:txBody>
-                    <a:bodyPr wrap="square"/>
-                    <a:lstStyle/>
-                    <a:p>
-                      <a:r>
-                        <a:rPr sz="1300">
-                          <a:solidFill>
-                            <a:srgbClr val="1B263B"/>
-                          </a:solidFill>
-                          <a:latin typeface="Calibri"/>
-                        </a:rPr>
-                        <a:t>none</a:t>
-                      </a:r>
-                    </a:p>
-                  </a:txBody>
-                  <a:tcPr marL="54864" marR="54864" marT="18288" marB="18288">
-                    <a:solidFill>
-                      <a:srgbClr val="FFFFFF"/>
-                    </a:solidFill>
-                  </a:tcPr>
-                </a:tc>
-                <a:tc>
-                  <a:txBody>
-                    <a:bodyPr wrap="square"/>
-                    <a:lstStyle/>
-                    <a:p>
-                      <a:r>
-                        <a:rPr sz="1300">
-                          <a:solidFill>
-                            <a:srgbClr val="1B263B"/>
-                          </a:solidFill>
-                          <a:latin typeface="Calibri"/>
-                        </a:rPr>
-                        <a:t>StandardScaler</a:t>
-                      </a:r>
-                    </a:p>
-                  </a:txBody>
-                  <a:tcPr marL="54864" marR="54864" marT="18288" marB="18288">
-                    <a:solidFill>
-                      <a:srgbClr val="FFFFFF"/>
-                    </a:solidFill>
-                  </a:tcPr>
-                </a:tc>
-                <a:tc>
-                  <a:txBody>
-                    <a:bodyPr wrap="square"/>
-                    <a:lstStyle/>
-                    <a:p>
-                      <a:r>
-                        <a:rPr sz="1300">
-                          <a:solidFill>
-                            <a:srgbClr val="1B263B"/>
-                          </a:solidFill>
-                          <a:latin typeface="Calibri"/>
-                        </a:rPr>
-                        <a:t>RobustScaler</a:t>
-                      </a:r>
-                    </a:p>
-                  </a:txBody>
-                  <a:tcPr marL="54864" marR="54864" marT="18288" marB="18288">
-                    <a:solidFill>
-                      <a:srgbClr val="FFFFFF"/>
-                    </a:solidFill>
-                  </a:tcPr>
-                </a:tc>
-              </a:tr>
-              <a:tr h="457200">
-                <a:tc>
-                  <a:txBody>
-                    <a:bodyPr wrap="square"/>
-                    <a:lstStyle/>
-                    <a:p>
-                      <a:r>
-                        <a:rPr sz="1300">
-                          <a:solidFill>
-                            <a:srgbClr val="1B263B"/>
-                          </a:solidFill>
-                          <a:latin typeface="Calibri"/>
-                        </a:rPr>
-                        <a:t>Outliers / skew</a:t>
-                      </a:r>
-                    </a:p>
-                  </a:txBody>
-                  <a:tcPr marL="54864" marR="54864" marT="18288" marB="18288">
-                    <a:solidFill>
-                      <a:srgbClr val="ECF0F3"/>
-                    </a:solidFill>
-                  </a:tcPr>
-                </a:tc>
-                <a:tc>
-                  <a:txBody>
-                    <a:bodyPr wrap="square"/>
-                    <a:lstStyle/>
-                    <a:p>
-                      <a:r>
-                        <a:rPr sz="1300">
-                          <a:solidFill>
-                            <a:srgbClr val="1B263B"/>
-                          </a:solidFill>
-                          <a:latin typeface="Calibri"/>
-                        </a:rPr>
-                        <a:t>none</a:t>
-                      </a:r>
-                    </a:p>
-                  </a:txBody>
-                  <a:tcPr marL="54864" marR="54864" marT="18288" marB="18288">
-                    <a:solidFill>
-                      <a:srgbClr val="ECF0F3"/>
-                    </a:solidFill>
-                  </a:tcPr>
-                </a:tc>
-                <a:tc>
-                  <a:txBody>
-                    <a:bodyPr wrap="square"/>
-                    <a:lstStyle/>
-                    <a:p>
-                      <a:r>
-                        <a:rPr sz="1300">
-                          <a:solidFill>
-                            <a:srgbClr val="1B263B"/>
-                          </a:solidFill>
-                          <a:latin typeface="Calibri"/>
-                        </a:rPr>
-                        <a:t>none</a:t>
-                      </a:r>
-                    </a:p>
-                  </a:txBody>
-                  <a:tcPr marL="54864" marR="54864" marT="18288" marB="18288">
-                    <a:solidFill>
-                      <a:srgbClr val="ECF0F3"/>
-                    </a:solidFill>
-                  </a:tcPr>
-                </a:tc>
-                <a:tc>
-                  <a:txBody>
-                    <a:bodyPr wrap="square"/>
-                    <a:lstStyle/>
-                    <a:p>
-                      <a:r>
-                        <a:rPr sz="1300">
-                          <a:solidFill>
-                            <a:srgbClr val="1B263B"/>
-                          </a:solidFill>
-                          <a:latin typeface="Calibri"/>
-                        </a:rPr>
-                        <a:t>IQR cap + log1p</a:t>
-                      </a:r>
-                    </a:p>
-                  </a:txBody>
-                  <a:tcPr marL="54864" marR="54864" marT="18288" marB="18288">
-                    <a:solidFill>
-                      <a:srgbClr val="ECF0F3"/>
-                    </a:solidFill>
-                  </a:tcPr>
-                </a:tc>
-              </a:tr>
-              <a:tr h="457200">
-                <a:tc>
-                  <a:txBody>
-                    <a:bodyPr wrap="square"/>
-                    <a:lstStyle/>
-                    <a:p>
-                      <a:r>
-                        <a:rPr sz="1300">
-                          <a:solidFill>
-                            <a:srgbClr val="1B263B"/>
-                          </a:solidFill>
-                          <a:latin typeface="Calibri"/>
-                        </a:rPr>
-                        <a:t>Drop ID / junk cols</a:t>
-                      </a:r>
-                    </a:p>
-                  </a:txBody>
-                  <a:tcPr marL="54864" marR="54864" marT="18288" marB="18288">
-                    <a:solidFill>
-                      <a:srgbClr val="FFFFFF"/>
-                    </a:solidFill>
-                  </a:tcPr>
-                </a:tc>
-                <a:tc>
-                  <a:txBody>
-                    <a:bodyPr wrap="square"/>
-                    <a:lstStyle/>
-                    <a:p>
-                      <a:r>
-                        <a:rPr sz="1300">
-                          <a:solidFill>
-                            <a:srgbClr val="1B263B"/>
-                          </a:solidFill>
-                          <a:latin typeface="Calibri"/>
-                        </a:rPr>
-                        <a:t>no</a:t>
-                      </a:r>
-                    </a:p>
-                  </a:txBody>
-                  <a:tcPr marL="54864" marR="54864" marT="18288" marB="18288">
-                    <a:solidFill>
-                      <a:srgbClr val="FFFFFF"/>
-                    </a:solidFill>
-                  </a:tcPr>
-                </a:tc>
-                <a:tc>
-                  <a:txBody>
-                    <a:bodyPr wrap="square"/>
-                    <a:lstStyle/>
-                    <a:p>
-                      <a:r>
-                        <a:rPr sz="1300">
-                          <a:solidFill>
-                            <a:srgbClr val="1B263B"/>
-                          </a:solidFill>
-                          <a:latin typeface="Calibri"/>
-                        </a:rPr>
-                        <a:t>no</a:t>
-                      </a:r>
-                    </a:p>
-                  </a:txBody>
-                  <a:tcPr marL="54864" marR="54864" marT="18288" marB="18288">
-                    <a:solidFill>
-                      <a:srgbClr val="FFFFFF"/>
-                    </a:solidFill>
-                  </a:tcPr>
-                </a:tc>
-                <a:tc>
-                  <a:txBody>
-                    <a:bodyPr wrap="square"/>
-                    <a:lstStyle/>
-                    <a:p>
-                      <a:r>
-                        <a:rPr sz="1300">
-                          <a:solidFill>
-                            <a:srgbClr val="1B263B"/>
-                          </a:solidFill>
-                          <a:latin typeface="Calibri"/>
-                        </a:rPr>
-                        <a:t>yes</a:t>
-                      </a:r>
-                    </a:p>
-                  </a:txBody>
-                  <a:tcPr marL="54864" marR="54864" marT="18288" marB="18288">
-                    <a:solidFill>
-                      <a:srgbClr val="FFFFFF"/>
-                    </a:solidFill>
-                  </a:tcPr>
-                </a:tc>
-              </a:tr>
-              <a:tr h="457200">
-                <a:tc>
-                  <a:txBody>
-                    <a:bodyPr wrap="square"/>
-                    <a:lstStyle/>
-                    <a:p>
-                      <a:r>
-                        <a:rPr sz="1300">
-                          <a:solidFill>
-                            <a:srgbClr val="1B263B"/>
-                          </a:solidFill>
-                          <a:latin typeface="Calibri"/>
-                        </a:rPr>
-                        <a:t>Knows column meaning</a:t>
-                      </a:r>
-                    </a:p>
-                  </a:txBody>
-                  <a:tcPr marL="54864" marR="54864" marT="18288" marB="18288">
-                    <a:solidFill>
-                      <a:srgbClr val="ECF0F3"/>
-                    </a:solidFill>
-                  </a:tcPr>
-                </a:tc>
-                <a:tc>
-                  <a:txBody>
-                    <a:bodyPr wrap="square"/>
-                    <a:lstStyle/>
-                    <a:p>
-                      <a:r>
-                        <a:rPr sz="1300">
-                          <a:solidFill>
-                            <a:srgbClr val="1B263B"/>
-                          </a:solidFill>
-                          <a:latin typeface="Calibri"/>
-                        </a:rPr>
-                        <a:t>no</a:t>
-                      </a:r>
-                    </a:p>
-                  </a:txBody>
-                  <a:tcPr marL="54864" marR="54864" marT="18288" marB="18288">
-                    <a:solidFill>
-                      <a:srgbClr val="ECF0F3"/>
-                    </a:solidFill>
-                  </a:tcPr>
-                </a:tc>
-                <a:tc>
-                  <a:txBody>
-                    <a:bodyPr wrap="square"/>
-                    <a:lstStyle/>
-                    <a:p>
-                      <a:r>
-                        <a:rPr sz="1300">
-                          <a:solidFill>
-                            <a:srgbClr val="1B263B"/>
-                          </a:solidFill>
-                          <a:latin typeface="Calibri"/>
-                        </a:rPr>
-                        <a:t>no</a:t>
-                      </a:r>
-                    </a:p>
-                  </a:txBody>
-                  <a:tcPr marL="54864" marR="54864" marT="18288" marB="18288">
-                    <a:solidFill>
-                      <a:srgbClr val="ECF0F3"/>
-                    </a:solidFill>
-                  </a:tcPr>
-                </a:tc>
-                <a:tc>
-                  <a:txBody>
-                    <a:bodyPr wrap="square"/>
-                    <a:lstStyle/>
-                    <a:p>
-                      <a:r>
-                        <a:rPr sz="1300">
-                          <a:solidFill>
-                            <a:srgbClr val="1B263B"/>
-                          </a:solidFill>
-                          <a:latin typeface="Calibri"/>
-                        </a:rPr>
-                        <a:t>yes (sub-types)</a:t>
-                      </a:r>
-                    </a:p>
-                  </a:txBody>
-                  <a:tcPr marL="54864" marR="54864" marT="18288" marB="18288">
-                    <a:solidFill>
-                      <a:srgbClr val="ECF0F3"/>
-                    </a:solidFill>
-                  </a:tcPr>
-                </a:tc>
-              </a:tr>
-            </a:tbl>
-          </a:graphicData>
-        </a:graphic>
-      </p:graphicFrame>
+        </p:nvPicPr>
+        <p:blipFill>
+          <a:blip r:embed="rId2"/>
+          <a:stretch>
+            <a:fillRect/>
+          </a:stretch>
+        </p:blipFill>
+        <p:spPr>
+          <a:xfrm>
+            <a:off x="1005840" y="1325880"/>
+            <a:ext cx="10149840" cy="5277917"/>
+          </a:xfrm>
+          <a:prstGeom prst="rect">
+            <a:avLst/>
+          </a:prstGeom>
+        </p:spPr>
+      </p:pic>
       <p:sp>
         <p:nvSpPr>
           <p:cNvPr id="5" name="TextBox 4"/>
@@ -7145,7 +5910,7 @@
                   <a:srgbClr val="555F6B"/>
                 </a:solidFill>
               </a:rPr>
-              <a:t>Crucial: a FAIR baseline already does the two things that matter most — proper encoding + scaling. That is what AUDA must be compared against.</a:t>
+              <a:t>Most datasets sit at ~0 (parity). A few small wins/losses roughly cancel — no systematic advantage either way.</a:t>
             </a:r>
           </a:p>
         </p:txBody>
@@ -7158,7 +5923,127 @@
 </p:sld>
 </file>
 
-<file path=ppt/slides/slide5.xml><?xml version="1.0" encoding="utf-8"?>
+<file path=ppt/slides/slide19.xml><?xml version="1.0" encoding="utf-8"?>
+<p:sld xmlns:a="http://schemas.openxmlformats.org/drawingml/2006/main" xmlns:p="http://schemas.openxmlformats.org/presentationml/2006/main" xmlns:r="http://schemas.openxmlformats.org/officeDocument/2006/relationships">
+  <p:cSld>
+    <p:bg>
+      <p:bgPr>
+        <a:solidFill>
+          <a:srgbClr val="1B263B"/>
+        </a:solidFill>
+        <a:effectLst/>
+      </p:bgPr>
+    </p:bg>
+    <p:spTree>
+      <p:nvGrpSpPr>
+        <p:cNvPr id="1" name=""/>
+        <p:cNvGrpSpPr/>
+        <p:nvPr/>
+      </p:nvGrpSpPr>
+      <p:grpSpPr/>
+      <p:sp>
+        <p:nvSpPr>
+          <p:cNvPr id="2" name="TextBox 1"/>
+          <p:cNvSpPr txBox="1"/>
+          <p:nvPr/>
+        </p:nvSpPr>
+        <p:spPr>
+          <a:xfrm>
+            <a:off x="914400" y="1188720"/>
+            <a:ext cx="10332720" cy="914400"/>
+          </a:xfrm>
+          <a:prstGeom prst="rect">
+            <a:avLst/>
+          </a:prstGeom>
+          <a:noFill/>
+        </p:spPr>
+        <p:txBody>
+          <a:bodyPr wrap="square">
+            <a:spAutoFit/>
+          </a:bodyPr>
+          <a:lstStyle/>
+          <a:p>
+            <a:pPr algn="ctr"/>
+            <a:r>
+              <a:rPr sz="3400" b="1" i="0">
+                <a:solidFill>
+                  <a:srgbClr val="FFFFFF"/>
+                </a:solidFill>
+                <a:latin typeface="Calibri"/>
+              </a:rPr>
+              <a:t>Honest Conclusion</a:t>
+            </a:r>
+          </a:p>
+        </p:txBody>
+      </p:sp>
+      <p:sp>
+        <p:nvSpPr>
+          <p:cNvPr id="3" name="TextBox 2"/>
+          <p:cNvSpPr txBox="1"/>
+          <p:nvPr/>
+        </p:nvSpPr>
+        <p:spPr>
+          <a:xfrm>
+            <a:off x="1280160" y="2468880"/>
+            <a:ext cx="9601200" cy="2743200"/>
+          </a:xfrm>
+          <a:prstGeom prst="rect">
+            <a:avLst/>
+          </a:prstGeom>
+          <a:noFill/>
+        </p:spPr>
+        <p:txBody>
+          <a:bodyPr wrap="square">
+            <a:spAutoFit/>
+          </a:bodyPr>
+          <a:lstStyle/>
+          <a:p>
+            <a:pPr algn="ctr"/>
+            <a:r>
+              <a:rPr sz="2200" b="0" i="1">
+                <a:solidFill>
+                  <a:srgbClr val="DCE6F2"/>
+                </a:solidFill>
+                <a:latin typeface="Calibri"/>
+              </a:rPr>
+              <a:t>"AUDA matches the performance of competent manual preprocessing — no statistically significant difference on tree or kernel models across 32 datasets — while requiring zero human effort."</a:t>
+            </a:r>
+          </a:p>
+          <a:p>
+            <a:pPr algn="ctr"/>
+            <a:r>
+              <a:rPr sz="1000" b="0" i="0">
+                <a:solidFill>
+                  <a:srgbClr val="FFFFFF"/>
+                </a:solidFill>
+                <a:latin typeface="Calibri"/>
+              </a:rPr>
+              <a:t> </a:t>
+            </a:r>
+          </a:p>
+          <a:p>
+            <a:pPr algn="ctr"/>
+            <a:r>
+              <a:rPr sz="1800" b="1" i="0">
+                <a:solidFill>
+                  <a:srgbClr val="6EC6F0"/>
+                </a:solidFill>
+                <a:latin typeface="Calibri"/>
+              </a:rPr>
+              <a:t>AUDA does not beat a skilled analyst — but it equals one, automatically.</a:t>
+            </a:r>
+          </a:p>
+        </p:txBody>
+      </p:sp>
+    </p:spTree>
+  </p:cSld>
+  <p:clrMapOvr>
+    <a:masterClrMapping/>
+  </p:clrMapOvr>
+</p:sld>
+</file>
+
+<file path=ppt/slides/slide2.xml><?xml version="1.0" encoding="utf-8"?>
 <p:sld xmlns:a="http://schemas.openxmlformats.org/drawingml/2006/main" xmlns:p="http://schemas.openxmlformats.org/presentationml/2006/main" xmlns:r="http://schemas.openxmlformats.org/officeDocument/2006/relationships">
   <p:cSld>
     <p:bg>
@@ -7248,7 +6133,7 @@
                 </a:solidFill>
                 <a:latin typeface="Calibri"/>
               </a:rPr>
-              <a:t>The Experiment — How We Measure "Better"</a:t>
+              <a:t>The Problem &amp; Goal</a:t>
             </a:r>
           </a:p>
         </p:txBody>
@@ -7277,7 +6162,7 @@
           <a:p>
             <a:pPr>
               <a:spcAft>
-                <a:spcPts val="900"/>
+                <a:spcPts val="1100"/>
               </a:spcAft>
             </a:pPr>
             <a:r>
@@ -7287,13 +6172,13 @@
                 </a:solidFill>
                 <a:latin typeface="Calibri"/>
               </a:rPr>
-              <a:t>•  For each dataset: 80/20 train-test split, stratified.</a:t>
+              <a:t>•  EDA + preprocessing is manual, slow, and depends on analyst skill.</a:t>
             </a:r>
           </a:p>
           <a:p>
             <a:pPr>
               <a:spcAft>
-                <a:spcPts val="900"/>
+                <a:spcPts val="1100"/>
               </a:spcAft>
             </a:pPr>
             <a:r>
@@ -7303,103 +6188,71 @@
                 </a:solidFill>
                 <a:latin typeface="Calibri"/>
               </a:rPr>
-              <a:t>•  Preprocess two ways: Baseline  vs  AUDA.</a:t>
+              <a:t>•  AUDA automates it: profile data, handle missing values, detect anomalies, transform features — in one call.</a:t>
             </a:r>
           </a:p>
           <a:p>
             <a:pPr>
               <a:spcAft>
-                <a:spcPts val="900"/>
+                <a:spcPts val="1100"/>
               </a:spcAft>
             </a:pPr>
             <a:r>
-              <a:rPr sz="1800" b="0">
+              <a:rPr sz="1800" b="1">
+                <a:solidFill>
+                  <a:srgbClr val="2E6DB8"/>
+                </a:solidFill>
+                <a:latin typeface="Calibri"/>
+              </a:rPr>
+              <a:t>•  Research question:</a:t>
+            </a:r>
+          </a:p>
+          <a:p>
+            <a:pPr lvl="1">
+              <a:spcAft>
+                <a:spcPts val="1100"/>
+              </a:spcAft>
+            </a:pPr>
+            <a:r>
+              <a:rPr sz="1600" b="0">
                 <a:solidFill>
                   <a:srgbClr val="1B263B"/>
                 </a:solidFill>
                 <a:latin typeface="Calibri"/>
               </a:rPr>
-              <a:t>•  Train BOTH RandomForest (tree) and SVM (kernel); compare ROC-AUC.</a:t>
+              <a:t>–  Can AUDA's automated preprocessing match or beat a human analyst?</a:t>
+            </a:r>
+          </a:p>
+          <a:p>
+            <a:pPr lvl="1">
+              <a:spcAft>
+                <a:spcPts val="1100"/>
+              </a:spcAft>
+            </a:pPr>
+            <a:r>
+              <a:rPr sz="1600" b="0">
+                <a:solidFill>
+                  <a:srgbClr val="1B263B"/>
+                </a:solidFill>
+                <a:latin typeface="Calibri"/>
+              </a:rPr>
+              <a:t>–  Measured objectively: train ML models on AUDA- vs manually-preprocessed data, compare ROC-AUC.</a:t>
             </a:r>
           </a:p>
           <a:p>
             <a:pPr>
               <a:spcAft>
-                <a:spcPts val="900"/>
+                <a:spcPts val="1100"/>
               </a:spcAft>
             </a:pPr>
             <a:r>
               <a:rPr sz="1800" b="1">
                 <a:solidFill>
-                  <a:srgbClr val="2E6DB8"/>
+                  <a:srgbClr val="27AE60"/>
                 </a:solidFill>
                 <a:latin typeface="Calibri"/>
               </a:rPr>
-              <a:t>•  Delta = AUDA AUC − Baseline AUC.   Positive = AUDA better.</a:t>
-            </a:r>
-          </a:p>
-          <a:p>
-            <a:pPr>
-              <a:spcAft>
-                <a:spcPts val="900"/>
-              </a:spcAft>
-            </a:pPr>
-            <a:r>
-              <a:rPr sz="1800" b="1">
-                <a:solidFill>
-                  <a:srgbClr val="27AE60"/>
-                </a:solidFill>
-                <a:latin typeface="Calibri"/>
-              </a:rPr>
-              <a:t>•  Rigor added during this project:</a:t>
-            </a:r>
-          </a:p>
-          <a:p>
-            <a:pPr lvl="1">
-              <a:spcAft>
-                <a:spcPts val="900"/>
-              </a:spcAft>
-            </a:pPr>
-            <a:r>
-              <a:rPr sz="1600" b="0">
-                <a:solidFill>
-                  <a:srgbClr val="1B263B"/>
-                </a:solidFill>
-                <a:latin typeface="Calibri"/>
-              </a:rPr>
-              <a:t>–  5 random seeds per dataset → mean ± std (not one lucky split)</a:t>
-            </a:r>
-          </a:p>
-          <a:p>
-            <a:pPr lvl="1">
-              <a:spcAft>
-                <a:spcPts val="900"/>
-              </a:spcAft>
-            </a:pPr>
-            <a:r>
-              <a:rPr sz="1600" b="0">
-                <a:solidFill>
-                  <a:srgbClr val="1B263B"/>
-                </a:solidFill>
-                <a:latin typeface="Calibri"/>
-              </a:rPr>
-              <a:t>–  Wilcoxon signed-rank test → is the difference statistically real?</a:t>
-            </a:r>
-          </a:p>
-          <a:p>
-            <a:pPr lvl="1">
-              <a:spcAft>
-                <a:spcPts val="900"/>
-              </a:spcAft>
-            </a:pPr>
-            <a:r>
-              <a:rPr sz="1600" b="0">
-                <a:solidFill>
-                  <a:srgbClr val="1B263B"/>
-                </a:solidFill>
-                <a:latin typeface="Calibri"/>
-              </a:rPr>
-              <a:t>–  Fair baseline + duplicate-dataset removal</a:t>
+              <a:t>•  This talk: what AUDA does (in detail), how we tested it rigorously, the bugs we found, and the honest result.</a:t>
             </a:r>
           </a:p>
         </p:txBody>
@@ -7412,7 +6265,7 @@
 </p:sld>
 </file>
 
-<file path=ppt/slides/slide6.xml><?xml version="1.0" encoding="utf-8"?>
+<file path=ppt/slides/slide20.xml><?xml version="1.0" encoding="utf-8"?>
 <p:sld xmlns:a="http://schemas.openxmlformats.org/drawingml/2006/main" xmlns:p="http://schemas.openxmlformats.org/presentationml/2006/main" xmlns:r="http://schemas.openxmlformats.org/officeDocument/2006/relationships">
   <p:cSld>
     <p:bg>
@@ -7502,17 +6355,7 @@
                 </a:solidFill>
                 <a:latin typeface="Calibri"/>
               </a:rPr>
-              <a:t>The Original Claim — and the Red Flags</a:t>
-            </a:r>
-          </a:p>
-          <a:p>
-            <a:r>
-              <a:rPr sz="1400" i="1">
-                <a:solidFill>
-                  <a:srgbClr val="B8C6D8"/>
-                </a:solidFill>
-              </a:rPr>
-              <a:t>"AUDA wins, 88% no-loss rate"</a:t>
+              <a:t>Methodology Lessons</a:t>
             </a:r>
           </a:p>
         </p:txBody>
@@ -7541,113 +6384,81 @@
           <a:p>
             <a:pPr>
               <a:spcAft>
-                <a:spcPts val="900"/>
+                <a:spcPts val="1500"/>
               </a:spcAft>
             </a:pPr>
             <a:r>
-              <a:rPr sz="1800" b="0">
+              <a:rPr sz="1900" b="0">
                 <a:solidFill>
                   <a:srgbClr val="1B263B"/>
                 </a:solidFill>
                 <a:latin typeface="Calibri"/>
               </a:rPr>
-              <a:t>•  The first benchmark reported AUDA beating the baseline on most datasets.</a:t>
+              <a:t>•  Never trust a single train/test split — always multi-seed + a significance test.</a:t>
             </a:r>
           </a:p>
           <a:p>
             <a:pPr>
               <a:spcAft>
-                <a:spcPts val="900"/>
+                <a:spcPts val="1500"/>
               </a:spcAft>
             </a:pPr>
             <a:r>
-              <a:rPr sz="1800" b="1">
-                <a:solidFill>
-                  <a:srgbClr val="C0392B"/>
+              <a:rPr sz="1900" b="0">
+                <a:solidFill>
+                  <a:srgbClr val="1B263B"/>
                 </a:solidFill>
                 <a:latin typeface="Calibri"/>
               </a:rPr>
-              <a:t>•  But the result rested on four hidden problems:</a:t>
-            </a:r>
-          </a:p>
-          <a:p>
-            <a:pPr lvl="1">
+              <a:t>•  Your baseline must be fair — beating a deliberately weak baseline proves nothing.</a:t>
+            </a:r>
+          </a:p>
+          <a:p>
+            <a:pPr>
               <a:spcAft>
-                <a:spcPts val="900"/>
+                <a:spcPts val="1500"/>
               </a:spcAft>
             </a:pPr>
             <a:r>
-              <a:rPr sz="1600" b="0">
+              <a:rPr sz="1900" b="0">
                 <a:solidFill>
                   <a:srgbClr val="1B263B"/>
                 </a:solidFill>
                 <a:latin typeface="Calibri"/>
               </a:rPr>
-              <a:t>–  Single train/test split — one lucky draw, no significance test</a:t>
-            </a:r>
-          </a:p>
-          <a:p>
-            <a:pPr lvl="1">
+              <a:t>•  Validate your data — duplicates and mislabeled files silently corrupt results.</a:t>
+            </a:r>
+          </a:p>
+          <a:p>
+            <a:pPr>
               <a:spcAft>
-                <a:spcPts val="900"/>
+                <a:spcPts val="1500"/>
               </a:spcAft>
             </a:pPr>
             <a:r>
-              <a:rPr sz="1600" b="0">
-                <a:solidFill>
-                  <a:srgbClr val="1B263B"/>
+              <a:rPr sz="1900" b="1">
+                <a:solidFill>
+                  <a:srgbClr val="27AE60"/>
                 </a:solidFill>
                 <a:latin typeface="Calibri"/>
               </a:rPr>
-              <a:t>–  Rigged baseline — ordinal-encoded everything &amp; never scaled (sabotages SVM)</a:t>
-            </a:r>
-          </a:p>
-          <a:p>
-            <a:pPr lvl="1">
+              <a:t>•  A neutral result, honestly obtained, beats an impressive result that can't survive scrutiny.</a:t>
+            </a:r>
+          </a:p>
+          <a:p>
+            <a:pPr>
               <a:spcAft>
-                <a:spcPts val="900"/>
+                <a:spcPts val="1500"/>
               </a:spcAft>
             </a:pPr>
             <a:r>
-              <a:rPr sz="1600" b="0">
+              <a:rPr sz="1900" b="0">
                 <a:solidFill>
                   <a:srgbClr val="1B263B"/>
                 </a:solidFill>
                 <a:latin typeface="Calibri"/>
               </a:rPr>
-              <a:t>–  Duplicate datasets — same files counted twice, inflating results</a:t>
-            </a:r>
-          </a:p>
-          <a:p>
-            <a:pPr lvl="1">
-              <a:spcAft>
-                <a:spcPts val="900"/>
-              </a:spcAft>
-            </a:pPr>
-            <a:r>
-              <a:rPr sz="1600" b="0">
-                <a:solidFill>
-                  <a:srgbClr val="1B263B"/>
-                </a:solidFill>
-                <a:latin typeface="Calibri"/>
-              </a:rPr>
-              <a:t>–  Software bugs — scrambled labels &amp; dropped predictive columns</a:t>
-            </a:r>
-          </a:p>
-          <a:p>
-            <a:pPr>
-              <a:spcAft>
-                <a:spcPts val="900"/>
-              </a:spcAft>
-            </a:pPr>
-            <a:r>
-              <a:rPr sz="1800" b="1">
-                <a:solidFill>
-                  <a:srgbClr val="555F6B"/>
-                </a:solidFill>
-                <a:latin typeface="Calibri"/>
-              </a:rPr>
-              <a:t>•  "If a result can't survive scrutiny, it isn't a result."</a:t>
+              <a:t>•  Bugs can masquerade as 'findings' — the −0.35 'AUDA is destructive' was a label bug.</a:t>
             </a:r>
           </a:p>
         </p:txBody>
@@ -7660,7 +6471,7 @@
 </p:sld>
 </file>
 
-<file path=ppt/slides/slide7.xml><?xml version="1.0" encoding="utf-8"?>
+<file path=ppt/slides/slide21.xml><?xml version="1.0" encoding="utf-8"?>
 <p:sld xmlns:a="http://schemas.openxmlformats.org/drawingml/2006/main" xmlns:p="http://schemas.openxmlformats.org/presentationml/2006/main" xmlns:r="http://schemas.openxmlformats.org/officeDocument/2006/relationships">
   <p:cSld>
     <p:bg>
@@ -7750,21 +6561,320 @@
                 </a:solidFill>
                 <a:latin typeface="Calibri"/>
               </a:rPr>
-              <a:t>Building Rigor #1 — Multi-Seed + Significance</a:t>
-            </a:r>
-          </a:p>
-        </p:txBody>
-      </p:sp>
-      <p:sp>
-        <p:nvSpPr>
-          <p:cNvPr id="4" name="TextBox 3"/>
+              <a:t>Future Work — How AUDA Could Actually Win</a:t>
+            </a:r>
+          </a:p>
+        </p:txBody>
+      </p:sp>
+      <p:graphicFrame>
+        <p:nvGraphicFramePr>
+          <p:cNvPr id="4" name="Table 3"/>
+          <p:cNvGraphicFramePr>
+            <a:graphicFrameLocks noGrp="1"/>
+          </p:cNvGraphicFramePr>
+          <p:nvPr/>
+        </p:nvGraphicFramePr>
+        <p:xfrm>
+          <a:off x="548640" y="1417320"/>
+          <a:ext cx="11155680" cy="2743200"/>
+        </p:xfrm>
+        <a:graphic>
+          <a:graphicData uri="http://schemas.openxmlformats.org/drawingml/2006/table">
+            <a:tbl>
+              <a:tblPr firstRow="1" bandRow="1">
+                <a:tableStyleId>{5C22544A-7EE6-4342-B048-85BDC9FD1C3A}</a:tableStyleId>
+              </a:tblPr>
+              <a:tblGrid>
+                <a:gridCol w="2926080"/>
+                <a:gridCol w="5852160"/>
+                <a:gridCol w="2377440"/>
+              </a:tblGrid>
+              <a:tr h="685800">
+                <a:tc>
+                  <a:txBody>
+                    <a:bodyPr wrap="square"/>
+                    <a:lstStyle/>
+                    <a:p>
+                      <a:r>
+                        <a:rPr sz="1300" b="1">
+                          <a:solidFill>
+                            <a:srgbClr val="FFFFFF"/>
+                          </a:solidFill>
+                          <a:latin typeface="Calibri"/>
+                        </a:rPr>
+                        <a:t>Lever</a:t>
+                      </a:r>
+                    </a:p>
+                  </a:txBody>
+                  <a:tcPr marL="54864" marR="54864" marT="18288" marB="18288">
+                    <a:solidFill>
+                      <a:srgbClr val="1B263B"/>
+                    </a:solidFill>
+                  </a:tcPr>
+                </a:tc>
+                <a:tc>
+                  <a:txBody>
+                    <a:bodyPr wrap="square"/>
+                    <a:lstStyle/>
+                    <a:p>
+                      <a:r>
+                        <a:rPr sz="1300" b="1">
+                          <a:solidFill>
+                            <a:srgbClr val="FFFFFF"/>
+                          </a:solidFill>
+                          <a:latin typeface="Calibri"/>
+                        </a:rPr>
+                        <a:t>Idea</a:t>
+                      </a:r>
+                    </a:p>
+                  </a:txBody>
+                  <a:tcPr marL="54864" marR="54864" marT="18288" marB="18288">
+                    <a:solidFill>
+                      <a:srgbClr val="1B263B"/>
+                    </a:solidFill>
+                  </a:tcPr>
+                </a:tc>
+                <a:tc>
+                  <a:txBody>
+                    <a:bodyPr wrap="square"/>
+                    <a:lstStyle/>
+                    <a:p>
+                      <a:r>
+                        <a:rPr sz="1300" b="1">
+                          <a:solidFill>
+                            <a:srgbClr val="FFFFFF"/>
+                          </a:solidFill>
+                          <a:latin typeface="Calibri"/>
+                        </a:rPr>
+                        <a:t>Effort / payoff</a:t>
+                      </a:r>
+                    </a:p>
+                  </a:txBody>
+                  <a:tcPr marL="54864" marR="54864" marT="18288" marB="18288">
+                    <a:solidFill>
+                      <a:srgbClr val="1B263B"/>
+                    </a:solidFill>
+                  </a:tcPr>
+                </a:tc>
+              </a:tr>
+              <a:tr h="685800">
+                <a:tc>
+                  <a:txBody>
+                    <a:bodyPr wrap="square"/>
+                    <a:lstStyle/>
+                    <a:p>
+                      <a:r>
+                        <a:rPr sz="1300">
+                          <a:solidFill>
+                            <a:srgbClr val="1B263B"/>
+                          </a:solidFill>
+                          <a:latin typeface="Calibri"/>
+                        </a:rPr>
+                        <a:t>Feature creation</a:t>
+                      </a:r>
+                    </a:p>
+                  </a:txBody>
+                  <a:tcPr marL="54864" marR="54864" marT="18288" marB="18288">
+                    <a:solidFill>
+                      <a:srgbClr val="FFFFFF"/>
+                    </a:solidFill>
+                  </a:tcPr>
+                </a:tc>
+                <a:tc>
+                  <a:txBody>
+                    <a:bodyPr wrap="square"/>
+                    <a:lstStyle/>
+                    <a:p>
+                      <a:r>
+                        <a:rPr sz="1300">
+                          <a:solidFill>
+                            <a:srgbClr val="1B263B"/>
+                          </a:solidFill>
+                          <a:latin typeface="Calibri"/>
+                        </a:rPr>
+                        <a:t>Datetime decomposition, CV target encoding, interactions — features the baseline can't make</a:t>
+                      </a:r>
+                    </a:p>
+                  </a:txBody>
+                  <a:tcPr marL="54864" marR="54864" marT="18288" marB="18288">
+                    <a:solidFill>
+                      <a:srgbClr val="FFFFFF"/>
+                    </a:solidFill>
+                  </a:tcPr>
+                </a:tc>
+                <a:tc>
+                  <a:txBody>
+                    <a:bodyPr wrap="square"/>
+                    <a:lstStyle/>
+                    <a:p>
+                      <a:r>
+                        <a:rPr sz="1300">
+                          <a:solidFill>
+                            <a:srgbClr val="1B263B"/>
+                          </a:solidFill>
+                          <a:latin typeface="Calibri"/>
+                        </a:rPr>
+                        <a:t>High / only real upside</a:t>
+                      </a:r>
+                    </a:p>
+                  </a:txBody>
+                  <a:tcPr marL="54864" marR="54864" marT="18288" marB="18288">
+                    <a:solidFill>
+                      <a:srgbClr val="FFFFFF"/>
+                    </a:solidFill>
+                  </a:tcPr>
+                </a:tc>
+              </a:tr>
+              <a:tr h="685800">
+                <a:tc>
+                  <a:txBody>
+                    <a:bodyPr wrap="square"/>
+                    <a:lstStyle/>
+                    <a:p>
+                      <a:r>
+                        <a:rPr sz="1300">
+                          <a:solidFill>
+                            <a:srgbClr val="1B263B"/>
+                          </a:solidFill>
+                          <a:latin typeface="Calibri"/>
+                        </a:rPr>
+                        <a:t>Validation-driven preprocessing</a:t>
+                      </a:r>
+                    </a:p>
+                  </a:txBody>
+                  <a:tcPr marL="54864" marR="54864" marT="18288" marB="18288">
+                    <a:solidFill>
+                      <a:srgbClr val="ECF0F3"/>
+                    </a:solidFill>
+                  </a:tcPr>
+                </a:tc>
+                <a:tc>
+                  <a:txBody>
+                    <a:bodyPr wrap="square"/>
+                    <a:lstStyle/>
+                    <a:p>
+                      <a:r>
+                        <a:rPr sz="1300">
+                          <a:solidFill>
+                            <a:srgbClr val="1B263B"/>
+                          </a:solidFill>
+                          <a:latin typeface="Calibri"/>
+                        </a:rPr>
+                        <a:t>Try several preprocessing variants per dataset, keep best by CV (AutoML-style)</a:t>
+                      </a:r>
+                    </a:p>
+                  </a:txBody>
+                  <a:tcPr marL="54864" marR="54864" marT="18288" marB="18288">
+                    <a:solidFill>
+                      <a:srgbClr val="ECF0F3"/>
+                    </a:solidFill>
+                  </a:tcPr>
+                </a:tc>
+                <a:tc>
+                  <a:txBody>
+                    <a:bodyPr wrap="square"/>
+                    <a:lstStyle/>
+                    <a:p>
+                      <a:r>
+                        <a:rPr sz="1300">
+                          <a:solidFill>
+                            <a:srgbClr val="1B263B"/>
+                          </a:solidFill>
+                          <a:latin typeface="Calibri"/>
+                        </a:rPr>
+                        <a:t>High / highest ceiling</a:t>
+                      </a:r>
+                    </a:p>
+                  </a:txBody>
+                  <a:tcPr marL="54864" marR="54864" marT="18288" marB="18288">
+                    <a:solidFill>
+                      <a:srgbClr val="ECF0F3"/>
+                    </a:solidFill>
+                  </a:tcPr>
+                </a:tc>
+              </a:tr>
+              <a:tr h="685800">
+                <a:tc>
+                  <a:txBody>
+                    <a:bodyPr wrap="square"/>
+                    <a:lstStyle/>
+                    <a:p>
+                      <a:r>
+                        <a:rPr sz="1300">
+                          <a:solidFill>
+                            <a:srgbClr val="1B263B"/>
+                          </a:solidFill>
+                          <a:latin typeface="Calibri"/>
+                        </a:rPr>
+                        <a:t>Apply LLM suggestions</a:t>
+                      </a:r>
+                    </a:p>
+                  </a:txBody>
+                  <a:tcPr marL="54864" marR="54864" marT="18288" marB="18288">
+                    <a:solidFill>
+                      <a:srgbClr val="FFFFFF"/>
+                    </a:solidFill>
+                  </a:tcPr>
+                </a:tc>
+                <a:tc>
+                  <a:txBody>
+                    <a:bodyPr wrap="square"/>
+                    <a:lstStyle/>
+                    <a:p>
+                      <a:r>
+                        <a:rPr sz="1300">
+                          <a:solidFill>
+                            <a:srgbClr val="1B263B"/>
+                          </a:solidFill>
+                          <a:latin typeface="Calibri"/>
+                        </a:rPr>
+                        <a:t>Actually execute the LLM's feature ideas (currently report-only)</a:t>
+                      </a:r>
+                    </a:p>
+                  </a:txBody>
+                  <a:tcPr marL="54864" marR="54864" marT="18288" marB="18288">
+                    <a:solidFill>
+                      <a:srgbClr val="FFFFFF"/>
+                    </a:solidFill>
+                  </a:tcPr>
+                </a:tc>
+                <a:tc>
+                  <a:txBody>
+                    <a:bodyPr wrap="square"/>
+                    <a:lstStyle/>
+                    <a:p>
+                      <a:r>
+                        <a:rPr sz="1300">
+                          <a:solidFill>
+                            <a:srgbClr val="1B263B"/>
+                          </a:solidFill>
+                          <a:latin typeface="Calibri"/>
+                        </a:rPr>
+                        <a:t>Medium / uncertain</a:t>
+                      </a:r>
+                    </a:p>
+                  </a:txBody>
+                  <a:tcPr marL="54864" marR="54864" marT="18288" marB="18288">
+                    <a:solidFill>
+                      <a:srgbClr val="FFFFFF"/>
+                    </a:solidFill>
+                  </a:tcPr>
+                </a:tc>
+              </a:tr>
+            </a:tbl>
+          </a:graphicData>
+        </a:graphic>
+      </p:graphicFrame>
+      <p:sp>
+        <p:nvSpPr>
+          <p:cNvPr id="5" name="TextBox 4"/>
           <p:cNvSpPr txBox="1"/>
           <p:nvPr/>
         </p:nvSpPr>
         <p:spPr>
           <a:xfrm>
-            <a:off x="640080" y="1371600"/>
-            <a:ext cx="10972800" cy="4937760"/>
+            <a:off x="640080" y="6309360"/>
+            <a:ext cx="10972800" cy="457200"/>
           </a:xfrm>
           <a:prstGeom prst="rect">
             <a:avLst/>
@@ -7777,99 +6887,13 @@
           </a:bodyPr>
           <a:lstStyle/>
           <a:p>
-            <a:pPr>
-              <a:spcAft>
-                <a:spcPts val="1100"/>
-              </a:spcAft>
-            </a:pPr>
-            <a:r>
-              <a:rPr sz="1800" b="0">
-                <a:solidFill>
-                  <a:srgbClr val="1B263B"/>
-                </a:solidFill>
-                <a:latin typeface="Calibri"/>
-              </a:rPr>
-              <a:t>•  One split = flipping a coin once. Change the seed, get a different score.</a:t>
-            </a:r>
-          </a:p>
-          <a:p>
-            <a:pPr lvl="1">
-              <a:spcAft>
-                <a:spcPts val="1100"/>
-              </a:spcAft>
-            </a:pPr>
-            <a:r>
-              <a:rPr sz="1600" b="0">
+            <a:r>
+              <a:rPr sz="1200" i="1">
                 <a:solidFill>
                   <a:srgbClr val="555F6B"/>
                 </a:solidFill>
-                <a:latin typeface="Calibri"/>
-              </a:rPr>
-              <a:t>–  Example (haberman, SVM): seed 42 → +0.10, seed 0 → +0.07. Same data!</a:t>
-            </a:r>
-          </a:p>
-          <a:p>
-            <a:pPr>
-              <a:spcAft>
-                <a:spcPts val="1100"/>
-              </a:spcAft>
-            </a:pPr>
-            <a:r>
-              <a:rPr sz="1800" b="1">
-                <a:solidFill>
-                  <a:srgbClr val="2E6DB8"/>
-                </a:solidFill>
-                <a:latin typeface="Calibri"/>
-              </a:rPr>
-              <a:t>•  Fix: run 5 seeds, report mean ± std → exposes the noise.</a:t>
-            </a:r>
-          </a:p>
-          <a:p>
-            <a:pPr>
-              <a:spcAft>
-                <a:spcPts val="1100"/>
-              </a:spcAft>
-            </a:pPr>
-            <a:r>
-              <a:rPr sz="1800" b="1">
-                <a:solidFill>
-                  <a:srgbClr val="2E6DB8"/>
-                </a:solidFill>
-                <a:latin typeface="Calibri"/>
-              </a:rPr>
-              <a:t>•  Wilcoxon signed-rank test across datasets → a p-value:</a:t>
-            </a:r>
-          </a:p>
-          <a:p>
-            <a:pPr lvl="1">
-              <a:spcAft>
-                <a:spcPts val="1100"/>
-              </a:spcAft>
-            </a:pPr>
-            <a:r>
-              <a:rPr sz="1600" b="0">
-                <a:solidFill>
-                  <a:srgbClr val="1B263B"/>
-                </a:solidFill>
-                <a:latin typeface="Calibri"/>
-              </a:rPr>
-              <a:t>–  p &lt; 0.05 = real effect ;  p &gt; 0.05 = indistinguishable from baseline.</a:t>
-            </a:r>
-          </a:p>
-          <a:p>
-            <a:pPr>
-              <a:spcAft>
-                <a:spcPts val="1100"/>
-              </a:spcAft>
-            </a:pPr>
-            <a:r>
-              <a:rPr sz="1800" b="0">
-                <a:solidFill>
-                  <a:srgbClr val="1B263B"/>
-                </a:solidFill>
-                <a:latin typeface="Calibri"/>
-              </a:rPr>
-              <a:t>•  Result: AUDA's win-rates dropped once luck was averaged out — single-seed numbers were optimistic.</a:t>
+              </a:rPr>
+              <a:t>Parity is already a complete, defensible result. These are paths to push AUDA from parity to advantage.</a:t>
             </a:r>
           </a:p>
         </p:txBody>
@@ -7882,7 +6906,199 @@
 </p:sld>
 </file>
 
-<file path=ppt/slides/slide8.xml><?xml version="1.0" encoding="utf-8"?>
+<file path=ppt/slides/slide22.xml><?xml version="1.0" encoding="utf-8"?>
+<p:sld xmlns:a="http://schemas.openxmlformats.org/drawingml/2006/main" xmlns:p="http://schemas.openxmlformats.org/presentationml/2006/main" xmlns:r="http://schemas.openxmlformats.org/officeDocument/2006/relationships">
+  <p:cSld>
+    <p:bg>
+      <p:bgPr>
+        <a:solidFill>
+          <a:srgbClr val="1B263B"/>
+        </a:solidFill>
+        <a:effectLst/>
+      </p:bgPr>
+    </p:bg>
+    <p:spTree>
+      <p:nvGrpSpPr>
+        <p:cNvPr id="1" name=""/>
+        <p:cNvGrpSpPr/>
+        <p:nvPr/>
+      </p:nvGrpSpPr>
+      <p:grpSpPr/>
+      <p:sp>
+        <p:nvSpPr>
+          <p:cNvPr id="2" name="TextBox 1"/>
+          <p:cNvSpPr txBox="1"/>
+          <p:nvPr/>
+        </p:nvSpPr>
+        <p:spPr>
+          <a:xfrm>
+            <a:off x="914400" y="640080"/>
+            <a:ext cx="10332720" cy="822960"/>
+          </a:xfrm>
+          <a:prstGeom prst="rect">
+            <a:avLst/>
+          </a:prstGeom>
+          <a:noFill/>
+        </p:spPr>
+        <p:txBody>
+          <a:bodyPr wrap="square">
+            <a:spAutoFit/>
+          </a:bodyPr>
+          <a:lstStyle/>
+          <a:p>
+            <a:pPr algn="ctr"/>
+            <a:r>
+              <a:rPr sz="3400" b="1" i="0">
+                <a:solidFill>
+                  <a:srgbClr val="FFFFFF"/>
+                </a:solidFill>
+                <a:latin typeface="Calibri"/>
+              </a:rPr>
+              <a:t>Summary</a:t>
+            </a:r>
+          </a:p>
+        </p:txBody>
+      </p:sp>
+      <p:sp>
+        <p:nvSpPr>
+          <p:cNvPr id="3" name="TextBox 2"/>
+          <p:cNvSpPr txBox="1"/>
+          <p:nvPr/>
+        </p:nvSpPr>
+        <p:spPr>
+          <a:xfrm>
+            <a:off x="1280160" y="1828800"/>
+            <a:ext cx="9692640" cy="4023360"/>
+          </a:xfrm>
+          <a:prstGeom prst="rect">
+            <a:avLst/>
+          </a:prstGeom>
+          <a:noFill/>
+        </p:spPr>
+        <p:txBody>
+          <a:bodyPr wrap="square">
+            <a:spAutoFit/>
+          </a:bodyPr>
+          <a:lstStyle/>
+          <a:p>
+            <a:pPr>
+              <a:spcAft>
+                <a:spcPts val="1600"/>
+              </a:spcAft>
+            </a:pPr>
+            <a:r>
+              <a:rPr sz="1900" b="0">
+                <a:solidFill>
+                  <a:srgbClr val="27AE60"/>
+                </a:solidFill>
+              </a:rPr>
+              <a:t>•  Built AUDA: automated EDA + preprocessing pipeline.</a:t>
+            </a:r>
+          </a:p>
+          <a:p>
+            <a:pPr>
+              <a:spcAft>
+                <a:spcPts val="1600"/>
+              </a:spcAft>
+            </a:pPr>
+            <a:r>
+              <a:rPr sz="1900" b="0">
+                <a:solidFill>
+                  <a:srgbClr val="6EC6F0"/>
+                </a:solidFill>
+              </a:rPr>
+              <a:t>•  Tested rigorously: 32 datasets, RF + SVM, 5 seeds, significance test, fair baseline.</a:t>
+            </a:r>
+          </a:p>
+          <a:p>
+            <a:pPr>
+              <a:spcAft>
+                <a:spcPts val="1600"/>
+              </a:spcAft>
+            </a:pPr>
+            <a:r>
+              <a:rPr sz="1900" b="0">
+                <a:solidFill>
+                  <a:srgbClr val="E67E22"/>
+                </a:solidFill>
+              </a:rPr>
+              <a:t>•  Found &amp; fixed 3 real bugs and corrupted datasets along the way.</a:t>
+            </a:r>
+          </a:p>
+          <a:p>
+            <a:pPr>
+              <a:spcAft>
+                <a:spcPts val="1600"/>
+              </a:spcAft>
+            </a:pPr>
+            <a:r>
+              <a:rPr sz="1900" b="1">
+                <a:solidFill>
+                  <a:srgbClr val="FFFFFF"/>
+                </a:solidFill>
+              </a:rPr>
+              <a:t>•  Result: AUDA achieves PARITY with competent manual preprocessing — automatically.</a:t>
+            </a:r>
+          </a:p>
+          <a:p>
+            <a:pPr>
+              <a:spcAft>
+                <a:spcPts val="1600"/>
+              </a:spcAft>
+            </a:pPr>
+            <a:r>
+              <a:rPr sz="1900" b="0">
+                <a:solidFill>
+                  <a:srgbClr val="6EC6F0"/>
+                </a:solidFill>
+              </a:rPr>
+              <a:t>•  A credible, defensible thesis — and a clean path forward.</a:t>
+            </a:r>
+          </a:p>
+        </p:txBody>
+      </p:sp>
+      <p:sp>
+        <p:nvSpPr>
+          <p:cNvPr id="4" name="TextBox 3"/>
+          <p:cNvSpPr txBox="1"/>
+          <p:nvPr/>
+        </p:nvSpPr>
+        <p:spPr>
+          <a:xfrm>
+            <a:off x="640080" y="6126480"/>
+            <a:ext cx="10972800" cy="457200"/>
+          </a:xfrm>
+          <a:prstGeom prst="rect">
+            <a:avLst/>
+          </a:prstGeom>
+          <a:noFill/>
+        </p:spPr>
+        <p:txBody>
+          <a:bodyPr wrap="square">
+            <a:spAutoFit/>
+          </a:bodyPr>
+          <a:lstStyle/>
+          <a:p>
+            <a:r>
+              <a:rPr sz="1600" i="1">
+                <a:solidFill>
+                  <a:srgbClr val="8A9BB5"/>
+                </a:solidFill>
+              </a:rPr>
+              <a:t>Thank you — questions?</a:t>
+            </a:r>
+          </a:p>
+        </p:txBody>
+      </p:sp>
+    </p:spTree>
+  </p:cSld>
+  <p:clrMapOvr>
+    <a:masterClrMapping/>
+  </p:clrMapOvr>
+</p:sld>
+</file>
+
+<file path=ppt/slides/slide3.xml><?xml version="1.0" encoding="utf-8"?>
 <p:sld xmlns:a="http://schemas.openxmlformats.org/drawingml/2006/main" xmlns:p="http://schemas.openxmlformats.org/presentationml/2006/main" xmlns:r="http://schemas.openxmlformats.org/officeDocument/2006/relationships">
   <p:cSld>
     <p:bg>
@@ -7972,115 +7188,465 @@
                 </a:solidFill>
                 <a:latin typeface="Calibri"/>
               </a:rPr>
-              <a:t>Building Rigor #2 — A Fair Baseline</a:t>
-            </a:r>
-          </a:p>
-        </p:txBody>
-      </p:sp>
-      <p:sp>
-        <p:nvSpPr>
-          <p:cNvPr id="4" name="TextBox 3"/>
+              <a:t>What AUDA Does — Overview</a:t>
+            </a:r>
+          </a:p>
+          <a:p>
+            <a:r>
+              <a:rPr sz="1400" i="1">
+                <a:solidFill>
+                  <a:srgbClr val="B8C6D8"/>
+                </a:solidFill>
+              </a:rPr>
+              <a:t>4 understanding stages + 1 transforming stage</a:t>
+            </a:r>
+          </a:p>
+        </p:txBody>
+      </p:sp>
+      <p:graphicFrame>
+        <p:nvGraphicFramePr>
+          <p:cNvPr id="4" name="Table 3"/>
+          <p:cNvGraphicFramePr>
+            <a:graphicFrameLocks noGrp="1"/>
+          </p:cNvGraphicFramePr>
+          <p:nvPr/>
+        </p:nvGraphicFramePr>
+        <p:xfrm>
+          <a:off x="640080" y="1371600"/>
+          <a:ext cx="10972800" cy="3017520"/>
+        </p:xfrm>
+        <a:graphic>
+          <a:graphicData uri="http://schemas.openxmlformats.org/drawingml/2006/table">
+            <a:tbl>
+              <a:tblPr firstRow="1" bandRow="1">
+                <a:tableStyleId>{5C22544A-7EE6-4342-B048-85BDC9FD1C3A}</a:tableStyleId>
+              </a:tblPr>
+              <a:tblGrid>
+                <a:gridCol w="2651760"/>
+                <a:gridCol w="6035040"/>
+                <a:gridCol w="2286000"/>
+              </a:tblGrid>
+              <a:tr h="502920">
+                <a:tc>
+                  <a:txBody>
+                    <a:bodyPr wrap="square"/>
+                    <a:lstStyle/>
+                    <a:p>
+                      <a:r>
+                        <a:rPr sz="1400" b="1">
+                          <a:solidFill>
+                            <a:srgbClr val="FFFFFF"/>
+                          </a:solidFill>
+                          <a:latin typeface="Calibri"/>
+                        </a:rPr>
+                        <a:t>Stage</a:t>
+                      </a:r>
+                    </a:p>
+                  </a:txBody>
+                  <a:tcPr marL="54864" marR="54864" marT="18288" marB="18288">
+                    <a:solidFill>
+                      <a:srgbClr val="1B263B"/>
+                    </a:solidFill>
+                  </a:tcPr>
+                </a:tc>
+                <a:tc>
+                  <a:txBody>
+                    <a:bodyPr wrap="square"/>
+                    <a:lstStyle/>
+                    <a:p>
+                      <a:r>
+                        <a:rPr sz="1400" b="1">
+                          <a:solidFill>
+                            <a:srgbClr val="FFFFFF"/>
+                          </a:solidFill>
+                          <a:latin typeface="Calibri"/>
+                        </a:rPr>
+                        <a:t>Purpose</a:t>
+                      </a:r>
+                    </a:p>
+                  </a:txBody>
+                  <a:tcPr marL="54864" marR="54864" marT="18288" marB="18288">
+                    <a:solidFill>
+                      <a:srgbClr val="1B263B"/>
+                    </a:solidFill>
+                  </a:tcPr>
+                </a:tc>
+                <a:tc>
+                  <a:txBody>
+                    <a:bodyPr wrap="square"/>
+                    <a:lstStyle/>
+                    <a:p>
+                      <a:r>
+                        <a:rPr sz="1400" b="1">
+                          <a:solidFill>
+                            <a:srgbClr val="FFFFFF"/>
+                          </a:solidFill>
+                          <a:latin typeface="Calibri"/>
+                        </a:rPr>
+                        <a:t>Changes data?</a:t>
+                      </a:r>
+                    </a:p>
+                  </a:txBody>
+                  <a:tcPr marL="54864" marR="54864" marT="18288" marB="18288">
+                    <a:solidFill>
+                      <a:srgbClr val="1B263B"/>
+                    </a:solidFill>
+                  </a:tcPr>
+                </a:tc>
+              </a:tr>
+              <a:tr h="502920">
+                <a:tc>
+                  <a:txBody>
+                    <a:bodyPr wrap="square"/>
+                    <a:lstStyle/>
+                    <a:p>
+                      <a:r>
+                        <a:rPr sz="1400">
+                          <a:solidFill>
+                            <a:srgbClr val="1B263B"/>
+                          </a:solidFill>
+                          <a:latin typeface="Calibri"/>
+                        </a:rPr>
+                        <a:t>1. Profile</a:t>
+                      </a:r>
+                    </a:p>
+                  </a:txBody>
+                  <a:tcPr marL="54864" marR="54864" marT="18288" marB="18288">
+                    <a:solidFill>
+                      <a:srgbClr val="FFFFFF"/>
+                    </a:solidFill>
+                  </a:tcPr>
+                </a:tc>
+                <a:tc>
+                  <a:txBody>
+                    <a:bodyPr wrap="square"/>
+                    <a:lstStyle/>
+                    <a:p>
+                      <a:r>
+                        <a:rPr sz="1400">
+                          <a:solidFill>
+                            <a:srgbClr val="1B263B"/>
+                          </a:solidFill>
+                          <a:latin typeface="Calibri"/>
+                        </a:rPr>
+                        <a:t>Detect column types + numeric sub-types</a:t>
+                      </a:r>
+                    </a:p>
+                  </a:txBody>
+                  <a:tcPr marL="54864" marR="54864" marT="18288" marB="18288">
+                    <a:solidFill>
+                      <a:srgbClr val="FFFFFF"/>
+                    </a:solidFill>
+                  </a:tcPr>
+                </a:tc>
+                <a:tc>
+                  <a:txBody>
+                    <a:bodyPr wrap="square"/>
+                    <a:lstStyle/>
+                    <a:p>
+                      <a:r>
+                        <a:rPr sz="1400">
+                          <a:solidFill>
+                            <a:srgbClr val="1B263B"/>
+                          </a:solidFill>
+                          <a:latin typeface="Calibri"/>
+                        </a:rPr>
+                        <a:t>No (understand)</a:t>
+                      </a:r>
+                    </a:p>
+                  </a:txBody>
+                  <a:tcPr marL="54864" marR="54864" marT="18288" marB="18288">
+                    <a:solidFill>
+                      <a:srgbClr val="FFFFFF"/>
+                    </a:solidFill>
+                  </a:tcPr>
+                </a:tc>
+              </a:tr>
+              <a:tr h="502920">
+                <a:tc>
+                  <a:txBody>
+                    <a:bodyPr wrap="square"/>
+                    <a:lstStyle/>
+                    <a:p>
+                      <a:r>
+                        <a:rPr sz="1400">
+                          <a:solidFill>
+                            <a:srgbClr val="1B263B"/>
+                          </a:solidFill>
+                          <a:latin typeface="Calibri"/>
+                        </a:rPr>
+                        <a:t>2. Missing values</a:t>
+                      </a:r>
+                    </a:p>
+                  </a:txBody>
+                  <a:tcPr marL="54864" marR="54864" marT="18288" marB="18288">
+                    <a:solidFill>
+                      <a:srgbClr val="ECF0F3"/>
+                    </a:solidFill>
+                  </a:tcPr>
+                </a:tc>
+                <a:tc>
+                  <a:txBody>
+                    <a:bodyPr wrap="square"/>
+                    <a:lstStyle/>
+                    <a:p>
+                      <a:r>
+                        <a:rPr sz="1400">
+                          <a:solidFill>
+                            <a:srgbClr val="1B263B"/>
+                          </a:solidFill>
+                          <a:latin typeface="Calibri"/>
+                        </a:rPr>
+                        <a:t>Impute or drop, per column</a:t>
+                      </a:r>
+                    </a:p>
+                  </a:txBody>
+                  <a:tcPr marL="54864" marR="54864" marT="18288" marB="18288">
+                    <a:solidFill>
+                      <a:srgbClr val="ECF0F3"/>
+                    </a:solidFill>
+                  </a:tcPr>
+                </a:tc>
+                <a:tc>
+                  <a:txBody>
+                    <a:bodyPr wrap="square"/>
+                    <a:lstStyle/>
+                    <a:p>
+                      <a:r>
+                        <a:rPr sz="1400">
+                          <a:solidFill>
+                            <a:srgbClr val="1B263B"/>
+                          </a:solidFill>
+                          <a:latin typeface="Calibri"/>
+                        </a:rPr>
+                        <a:t>YES</a:t>
+                      </a:r>
+                    </a:p>
+                  </a:txBody>
+                  <a:tcPr marL="54864" marR="54864" marT="18288" marB="18288">
+                    <a:solidFill>
+                      <a:srgbClr val="ECF0F3"/>
+                    </a:solidFill>
+                  </a:tcPr>
+                </a:tc>
+              </a:tr>
+              <a:tr h="502920">
+                <a:tc>
+                  <a:txBody>
+                    <a:bodyPr wrap="square"/>
+                    <a:lstStyle/>
+                    <a:p>
+                      <a:r>
+                        <a:rPr sz="1400">
+                          <a:solidFill>
+                            <a:srgbClr val="1B263B"/>
+                          </a:solidFill>
+                          <a:latin typeface="Calibri"/>
+                        </a:rPr>
+                        <a:t>3. Anomalies</a:t>
+                      </a:r>
+                    </a:p>
+                  </a:txBody>
+                  <a:tcPr marL="54864" marR="54864" marT="18288" marB="18288">
+                    <a:solidFill>
+                      <a:srgbClr val="FFFFFF"/>
+                    </a:solidFill>
+                  </a:tcPr>
+                </a:tc>
+                <a:tc>
+                  <a:txBody>
+                    <a:bodyPr wrap="square"/>
+                    <a:lstStyle/>
+                    <a:p>
+                      <a:r>
+                        <a:rPr sz="1400">
+                          <a:solidFill>
+                            <a:srgbClr val="1B263B"/>
+                          </a:solidFill>
+                          <a:latin typeface="Calibri"/>
+                        </a:rPr>
+                        <a:t>Detect outliers (IQR / Z / Isolation Forest)</a:t>
+                      </a:r>
+                    </a:p>
+                  </a:txBody>
+                  <a:tcPr marL="54864" marR="54864" marT="18288" marB="18288">
+                    <a:solidFill>
+                      <a:srgbClr val="FFFFFF"/>
+                    </a:solidFill>
+                  </a:tcPr>
+                </a:tc>
+                <a:tc>
+                  <a:txBody>
+                    <a:bodyPr wrap="square"/>
+                    <a:lstStyle/>
+                    <a:p>
+                      <a:r>
+                        <a:rPr sz="1400">
+                          <a:solidFill>
+                            <a:srgbClr val="1B263B"/>
+                          </a:solidFill>
+                          <a:latin typeface="Calibri"/>
+                        </a:rPr>
+                        <a:t>No (report)</a:t>
+                      </a:r>
+                    </a:p>
+                  </a:txBody>
+                  <a:tcPr marL="54864" marR="54864" marT="18288" marB="18288">
+                    <a:solidFill>
+                      <a:srgbClr val="FFFFFF"/>
+                    </a:solidFill>
+                  </a:tcPr>
+                </a:tc>
+              </a:tr>
+              <a:tr h="502920">
+                <a:tc>
+                  <a:txBody>
+                    <a:bodyPr wrap="square"/>
+                    <a:lstStyle/>
+                    <a:p>
+                      <a:r>
+                        <a:rPr sz="1400">
+                          <a:solidFill>
+                            <a:srgbClr val="1B263B"/>
+                          </a:solidFill>
+                          <a:latin typeface="Calibri"/>
+                        </a:rPr>
+                        <a:t>4. Recommend</a:t>
+                      </a:r>
+                    </a:p>
+                  </a:txBody>
+                  <a:tcPr marL="54864" marR="54864" marT="18288" marB="18288">
+                    <a:solidFill>
+                      <a:srgbClr val="ECF0F3"/>
+                    </a:solidFill>
+                  </a:tcPr>
+                </a:tc>
+                <a:tc>
+                  <a:txBody>
+                    <a:bodyPr wrap="square"/>
+                    <a:lstStyle/>
+                    <a:p>
+                      <a:r>
+                        <a:rPr sz="1400">
+                          <a:solidFill>
+                            <a:srgbClr val="1B263B"/>
+                          </a:solidFill>
+                          <a:latin typeface="Calibri"/>
+                        </a:rPr>
+                        <a:t>Feature-engineering suggestions (rules + optional LLM)</a:t>
+                      </a:r>
+                    </a:p>
+                  </a:txBody>
+                  <a:tcPr marL="54864" marR="54864" marT="18288" marB="18288">
+                    <a:solidFill>
+                      <a:srgbClr val="ECF0F3"/>
+                    </a:solidFill>
+                  </a:tcPr>
+                </a:tc>
+                <a:tc>
+                  <a:txBody>
+                    <a:bodyPr wrap="square"/>
+                    <a:lstStyle/>
+                    <a:p>
+                      <a:r>
+                        <a:rPr sz="1400">
+                          <a:solidFill>
+                            <a:srgbClr val="1B263B"/>
+                          </a:solidFill>
+                          <a:latin typeface="Calibri"/>
+                        </a:rPr>
+                        <a:t>No (report)</a:t>
+                      </a:r>
+                    </a:p>
+                  </a:txBody>
+                  <a:tcPr marL="54864" marR="54864" marT="18288" marB="18288">
+                    <a:solidFill>
+                      <a:srgbClr val="ECF0F3"/>
+                    </a:solidFill>
+                  </a:tcPr>
+                </a:tc>
+              </a:tr>
+              <a:tr h="502920">
+                <a:tc>
+                  <a:txBody>
+                    <a:bodyPr wrap="square"/>
+                    <a:lstStyle/>
+                    <a:p>
+                      <a:r>
+                        <a:rPr sz="1400">
+                          <a:solidFill>
+                            <a:srgbClr val="1B263B"/>
+                          </a:solidFill>
+                          <a:latin typeface="Calibri"/>
+                        </a:rPr>
+                        <a:t>Feature Transformer</a:t>
+                      </a:r>
+                    </a:p>
+                  </a:txBody>
+                  <a:tcPr marL="54864" marR="54864" marT="18288" marB="18288">
+                    <a:solidFill>
+                      <a:srgbClr val="FFFFFF"/>
+                    </a:solidFill>
+                  </a:tcPr>
+                </a:tc>
+                <a:tc>
+                  <a:txBody>
+                    <a:bodyPr wrap="square"/>
+                    <a:lstStyle/>
+                    <a:p>
+                      <a:r>
+                        <a:rPr sz="1400">
+                          <a:solidFill>
+                            <a:srgbClr val="1B263B"/>
+                          </a:solidFill>
+                          <a:latin typeface="Calibri"/>
+                        </a:rPr>
+                        <a:t>Encode, cap outliers, log1p, scale, select features</a:t>
+                      </a:r>
+                    </a:p>
+                  </a:txBody>
+                  <a:tcPr marL="54864" marR="54864" marT="18288" marB="18288">
+                    <a:solidFill>
+                      <a:srgbClr val="FFFFFF"/>
+                    </a:solidFill>
+                  </a:tcPr>
+                </a:tc>
+                <a:tc>
+                  <a:txBody>
+                    <a:bodyPr wrap="square"/>
+                    <a:lstStyle/>
+                    <a:p>
+                      <a:r>
+                        <a:rPr sz="1400">
+                          <a:solidFill>
+                            <a:srgbClr val="1B263B"/>
+                          </a:solidFill>
+                          <a:latin typeface="Calibri"/>
+                        </a:rPr>
+                        <a:t>YES — fed to model</a:t>
+                      </a:r>
+                    </a:p>
+                  </a:txBody>
+                  <a:tcPr marL="54864" marR="54864" marT="18288" marB="18288">
+                    <a:solidFill>
+                      <a:srgbClr val="FFFFFF"/>
+                    </a:solidFill>
+                  </a:tcPr>
+                </a:tc>
+              </a:tr>
+            </a:tbl>
+          </a:graphicData>
+        </a:graphic>
+      </p:graphicFrame>
+      <p:sp>
+        <p:nvSpPr>
+          <p:cNvPr id="5" name="TextBox 4"/>
           <p:cNvSpPr txBox="1"/>
           <p:nvPr/>
         </p:nvSpPr>
         <p:spPr>
           <a:xfrm>
-            <a:off x="640080" y="1188720"/>
-            <a:ext cx="10972800" cy="1463040"/>
-          </a:xfrm>
-          <a:prstGeom prst="rect">
-            <a:avLst/>
-          </a:prstGeom>
-          <a:noFill/>
-        </p:spPr>
-        <p:txBody>
-          <a:bodyPr wrap="square">
-            <a:spAutoFit/>
-          </a:bodyPr>
-          <a:lstStyle/>
-          <a:p>
-            <a:pPr>
-              <a:spcAft>
-                <a:spcPts val="600"/>
-              </a:spcAft>
-            </a:pPr>
-            <a:r>
-              <a:rPr sz="1700" b="0">
-                <a:solidFill>
-                  <a:srgbClr val="1B263B"/>
-                </a:solidFill>
-                <a:latin typeface="Calibri"/>
-              </a:rPr>
-              <a:t>•  The weak baseline never scaled features — fatal for SVM.</a:t>
-            </a:r>
-          </a:p>
-          <a:p>
-            <a:pPr>
-              <a:spcAft>
-                <a:spcPts val="600"/>
-              </a:spcAft>
-            </a:pPr>
-            <a:r>
-              <a:rPr sz="1700" b="0">
-                <a:solidFill>
-                  <a:srgbClr val="1B263B"/>
-                </a:solidFill>
-                <a:latin typeface="Calibri"/>
-              </a:rPr>
-              <a:t>•  AUDA's big SVM 'wins' were just AUDA fixing that mistake.</a:t>
-            </a:r>
-          </a:p>
-          <a:p>
-            <a:pPr>
-              <a:spcAft>
-                <a:spcPts val="600"/>
-              </a:spcAft>
-            </a:pPr>
-            <a:r>
-              <a:rPr sz="1700" b="1">
-                <a:solidFill>
-                  <a:srgbClr val="2E6DB8"/>
-                </a:solidFill>
-                <a:latin typeface="Calibri"/>
-              </a:rPr>
-              <a:t>•  Fair baseline scales + one-hot encodes, like a real analyst.</a:t>
-            </a:r>
-          </a:p>
-        </p:txBody>
-      </p:sp>
-      <p:pic>
-        <p:nvPicPr>
-          <p:cNvPr id="5" name="Picture 4" descr="slide_journey.png"/>
-          <p:cNvPicPr>
-            <a:picLocks noChangeAspect="1"/>
-          </p:cNvPicPr>
-          <p:nvPr/>
-        </p:nvPicPr>
-        <p:blipFill>
-          <a:blip r:embed="rId2"/>
-          <a:stretch>
-            <a:fillRect/>
-          </a:stretch>
-        </p:blipFill>
-        <p:spPr>
-          <a:xfrm>
-            <a:off x="1554480" y="2697480"/>
-            <a:ext cx="9144000" cy="4733365"/>
-          </a:xfrm>
-          <a:prstGeom prst="rect">
-            <a:avLst/>
-          </a:prstGeom>
-        </p:spPr>
-      </p:pic>
-      <p:sp>
-        <p:nvSpPr>
-          <p:cNvPr id="6" name="TextBox 5"/>
-          <p:cNvSpPr txBox="1"/>
-          <p:nvPr/>
-        </p:nvSpPr>
-        <p:spPr>
-          <a:xfrm>
-            <a:off x="640080" y="6355080"/>
+            <a:off x="640080" y="6309360"/>
             <a:ext cx="10972800" cy="457200"/>
           </a:xfrm>
           <a:prstGeom prst="rect">
@@ -8100,7 +7666,7 @@
                   <a:srgbClr val="555F6B"/>
                 </a:solidFill>
               </a:rPr>
-              <a:t>As each artifact is removed, the SVM 'advantage' collapses from +0.05 to ~0.</a:t>
+              <a:t>Only Stage 2 and the Feature Transformer change the data the model sees. The next slides detail each step.</a:t>
             </a:r>
           </a:p>
         </p:txBody>
@@ -8113,7 +7679,7 @@
 </p:sld>
 </file>
 
-<file path=ppt/slides/slide9.xml><?xml version="1.0" encoding="utf-8"?>
+<file path=ppt/slides/slide4.xml><?xml version="1.0" encoding="utf-8"?>
 <p:sld xmlns:a="http://schemas.openxmlformats.org/drawingml/2006/main" xmlns:p="http://schemas.openxmlformats.org/presentationml/2006/main" xmlns:r="http://schemas.openxmlformats.org/officeDocument/2006/relationships">
   <p:cSld>
     <p:bg>
@@ -8203,7 +7769,17 @@
                 </a:solidFill>
                 <a:latin typeface="Calibri"/>
               </a:rPr>
-              <a:t>Data Integrity — The Datasets Were Corrupted</a:t>
+              <a:t>Stage 1 — Profiling: Understand Every Column</a:t>
+            </a:r>
+          </a:p>
+          <a:p>
+            <a:r>
+              <a:rPr sz="1400" i="1">
+                <a:solidFill>
+                  <a:srgbClr val="B8C6D8"/>
+                </a:solidFill>
+              </a:rPr>
+              <a:t>profiler.py</a:t>
             </a:r>
           </a:p>
         </p:txBody>
@@ -8232,97 +7808,3291 @@
           <a:p>
             <a:pPr>
               <a:spcAft>
-                <a:spcPts val="1000"/>
+                <a:spcPts val="800"/>
               </a:spcAft>
             </a:pPr>
             <a:r>
-              <a:rPr sz="1800" b="1">
-                <a:solidFill>
-                  <a:srgbClr val="C0392B"/>
+              <a:rPr sz="1700" b="1">
+                <a:solidFill>
+                  <a:srgbClr val="2E6DB8"/>
                 </a:solidFill>
                 <a:latin typeface="Calibri"/>
               </a:rPr>
-              <a:t>•  Hash check revealed 4 DUPLICATE pairs masquerading as different datasets:</a:t>
+              <a:t>•  Type-detection waterfall (first match wins):</a:t>
             </a:r>
           </a:p>
           <a:p>
             <a:pPr lvl="1">
               <a:spcAft>
-                <a:spcPts val="1000"/>
+                <a:spcPts val="800"/>
               </a:spcAft>
             </a:pPr>
             <a:r>
-              <a:rPr sz="1600" b="0">
+              <a:rPr sz="1500" b="0">
                 <a:solidFill>
                   <a:srgbClr val="1B263B"/>
                 </a:solidFill>
                 <a:latin typeface="Calibri"/>
               </a:rPr>
-              <a:t>–  breast_cancer_wide = qsar_bio ;  arcene = colon_cancer</a:t>
+              <a:t>–  Empty column → text   |   True/False → boolean</a:t>
             </a:r>
           </a:p>
           <a:p>
             <a:pPr lvl="1">
               <a:spcAft>
-                <a:spcPts val="1000"/>
+                <a:spcPts val="800"/>
               </a:spcAft>
             </a:pPr>
             <a:r>
-              <a:rPr sz="1600" b="0">
+              <a:rPr sz="1500" b="0">
                 <a:solidFill>
                   <a:srgbClr val="1B263B"/>
                 </a:solidFill>
                 <a:latin typeface="Calibri"/>
               </a:rPr>
-              <a:t>–  ionosphere = musk ;  sonar = banknote</a:t>
+              <a:t>–  Real dates, or text where ≥80% parse as dates → datetime</a:t>
+            </a:r>
+          </a:p>
+          <a:p>
+            <a:pPr lvl="1">
+              <a:spcAft>
+                <a:spcPts val="800"/>
+              </a:spcAft>
+            </a:pPr>
+            <a:r>
+              <a:rPr sz="1500" b="0">
+                <a:solidFill>
+                  <a:srgbClr val="1B263B"/>
+                </a:solidFill>
+                <a:latin typeface="Calibri"/>
+              </a:rPr>
+              <a:t>–  Numbers: only {0,1} → boolean ;  ≤2 values → categorical ;  else → numeric</a:t>
+            </a:r>
+          </a:p>
+          <a:p>
+            <a:pPr lvl="1">
+              <a:spcAft>
+                <a:spcPts val="800"/>
+              </a:spcAft>
+            </a:pPr>
+            <a:r>
+              <a:rPr sz="1500" b="0">
+                <a:solidFill>
+                  <a:srgbClr val="1B263B"/>
+                </a:solidFill>
+                <a:latin typeface="Calibri"/>
+              </a:rPr>
+              <a:t>–  Text: ≤20 unique → categorical ;  avg length &gt;50 chars → text</a:t>
             </a:r>
           </a:p>
           <a:p>
             <a:pPr>
               <a:spcAft>
-                <a:spcPts val="1000"/>
+                <a:spcPts val="800"/>
               </a:spcAft>
             </a:pPr>
             <a:r>
-              <a:rPr sz="1800" b="0">
+              <a:rPr sz="1700" b="1">
+                <a:solidFill>
+                  <a:srgbClr val="2E6DB8"/>
+                </a:solidFill>
+                <a:latin typeface="Calibri"/>
+              </a:rPr>
+              <a:t>•  Numeric sub-type (makes later steps smart):</a:t>
+            </a:r>
+          </a:p>
+          <a:p>
+            <a:pPr lvl="1">
+              <a:spcAft>
+                <a:spcPts val="800"/>
+              </a:spcAft>
+            </a:pPr>
+            <a:r>
+              <a:rPr sz="1500" b="0">
                 <a:solidFill>
                   <a:srgbClr val="1B263B"/>
                 </a:solidFill>
                 <a:latin typeface="Calibri"/>
               </a:rPr>
-              <a:t>•  Worse — filenames lied: all four 'wide' files were breast-cancer data; 'sonar' actually held banknote data.</a:t>
-            </a:r>
-          </a:p>
+              <a:t>–  id = unique &amp; sequential (PassengerId)  •  ordinal = integer ≤10 values (rating 1-5)</a:t>
+            </a:r>
+          </a:p>
+          <a:p>
+            <a:pPr lvl="1">
+              <a:spcAft>
+                <a:spcPts val="800"/>
+              </a:spcAft>
+            </a:pPr>
+            <a:r>
+              <a:rPr sz="1500" b="0">
+                <a:solidFill>
+                  <a:srgbClr val="1B263B"/>
+                </a:solidFill>
+                <a:latin typeface="Calibri"/>
+              </a:rPr>
+              <a:t>–  count = non-negative integers  •  continuous = floats / high-cardinality (income)</a:t>
+            </a:r>
+          </a:p>
+        </p:txBody>
+      </p:sp>
+      <p:sp>
+        <p:nvSpPr>
+          <p:cNvPr id="5" name="TextBox 4"/>
+          <p:cNvSpPr txBox="1"/>
+          <p:nvPr/>
+        </p:nvSpPr>
+        <p:spPr>
+          <a:xfrm>
+            <a:off x="640080" y="6309360"/>
+            <a:ext cx="10972800" cy="457200"/>
+          </a:xfrm>
+          <a:prstGeom prst="rect">
+            <a:avLst/>
+          </a:prstGeom>
+          <a:noFill/>
+        </p:spPr>
+        <p:txBody>
+          <a:bodyPr wrap="square">
+            <a:spAutoFit/>
+          </a:bodyPr>
+          <a:lstStyle/>
+          <a:p>
+            <a:r>
+              <a:rPr sz="1200" i="1">
+                <a:solidFill>
+                  <a:srgbClr val="555F6B"/>
+                </a:solidFill>
+              </a:rPr>
+              <a:t>Why it matters: knowing a column is an ID or a 1-5 rating prevents harmful transforms later (e.g. don't log-scale a rating).</a:t>
+            </a:r>
+          </a:p>
+        </p:txBody>
+      </p:sp>
+    </p:spTree>
+  </p:cSld>
+  <p:clrMapOvr>
+    <a:masterClrMapping/>
+  </p:clrMapOvr>
+</p:sld>
+</file>
+
+<file path=ppt/slides/slide5.xml><?xml version="1.0" encoding="utf-8"?>
+<p:sld xmlns:a="http://schemas.openxmlformats.org/drawingml/2006/main" xmlns:p="http://schemas.openxmlformats.org/presentationml/2006/main" xmlns:r="http://schemas.openxmlformats.org/officeDocument/2006/relationships">
+  <p:cSld>
+    <p:bg>
+      <p:bgPr>
+        <a:solidFill>
+          <a:srgbClr val="FFFFFF"/>
+        </a:solidFill>
+        <a:effectLst/>
+      </p:bgPr>
+    </p:bg>
+    <p:spTree>
+      <p:nvGrpSpPr>
+        <p:cNvPr id="1" name=""/>
+        <p:cNvGrpSpPr/>
+        <p:nvPr/>
+      </p:nvGrpSpPr>
+      <p:grpSpPr/>
+      <p:sp>
+        <p:nvSpPr>
+          <p:cNvPr id="2" name="Rectangle 1"/>
+          <p:cNvSpPr/>
+          <p:nvPr/>
+        </p:nvSpPr>
+        <p:spPr>
+          <a:xfrm>
+            <a:off x="0" y="0"/>
+            <a:ext cx="12191695" cy="1051560"/>
+          </a:xfrm>
+          <a:prstGeom prst="rect">
+            <a:avLst/>
+          </a:prstGeom>
+          <a:solidFill>
+            <a:srgbClr val="1B263B"/>
+          </a:solidFill>
+          <a:ln>
+            <a:noFill/>
+          </a:ln>
+        </p:spPr>
+        <p:style>
+          <a:lnRef idx="1">
+            <a:schemeClr val="accent1"/>
+          </a:lnRef>
+          <a:fillRef idx="3">
+            <a:schemeClr val="accent1"/>
+          </a:fillRef>
+          <a:effectRef idx="2">
+            <a:schemeClr val="accent1"/>
+          </a:effectRef>
+          <a:fontRef idx="minor">
+            <a:schemeClr val="lt1"/>
+          </a:fontRef>
+        </p:style>
+        <p:txBody>
+          <a:bodyPr rtlCol="0" anchor="ctr"/>
+          <a:lstStyle/>
+          <a:p>
+            <a:pPr algn="ctr"/>
+          </a:p>
+        </p:txBody>
+      </p:sp>
+      <p:sp>
+        <p:nvSpPr>
+          <p:cNvPr id="3" name="TextBox 2"/>
+          <p:cNvSpPr txBox="1"/>
+          <p:nvPr/>
+        </p:nvSpPr>
+        <p:spPr>
+          <a:xfrm>
+            <a:off x="502920" y="146304"/>
+            <a:ext cx="11155680" cy="868680"/>
+          </a:xfrm>
+          <a:prstGeom prst="rect">
+            <a:avLst/>
+          </a:prstGeom>
+          <a:noFill/>
+        </p:spPr>
+        <p:txBody>
+          <a:bodyPr wrap="square">
+            <a:spAutoFit/>
+          </a:bodyPr>
+          <a:lstStyle/>
+          <a:p>
+            <a:r>
+              <a:rPr sz="3000" b="1">
+                <a:solidFill>
+                  <a:srgbClr val="FFFFFF"/>
+                </a:solidFill>
+                <a:latin typeface="Calibri"/>
+              </a:rPr>
+              <a:t>Stage 2 — Missing Values: One Decision per Column</a:t>
+            </a:r>
+          </a:p>
+          <a:p>
+            <a:r>
+              <a:rPr sz="1400" i="1">
+                <a:solidFill>
+                  <a:srgbClr val="B8C6D8"/>
+                </a:solidFill>
+              </a:rPr>
+              <a:t>missing_handler.py  (this step CHANGES the data)</a:t>
+            </a:r>
+          </a:p>
+        </p:txBody>
+      </p:sp>
+      <p:graphicFrame>
+        <p:nvGraphicFramePr>
+          <p:cNvPr id="4" name="Table 3"/>
+          <p:cNvGraphicFramePr>
+            <a:graphicFrameLocks noGrp="1"/>
+          </p:cNvGraphicFramePr>
+          <p:nvPr/>
+        </p:nvGraphicFramePr>
+        <p:xfrm>
+          <a:off x="640080" y="1371600"/>
+          <a:ext cx="10972800" cy="3383280"/>
+        </p:xfrm>
+        <a:graphic>
+          <a:graphicData uri="http://schemas.openxmlformats.org/drawingml/2006/table">
+            <a:tbl>
+              <a:tblPr firstRow="1" bandRow="1">
+                <a:tableStyleId>{5C22544A-7EE6-4342-B048-85BDC9FD1C3A}</a:tableStyleId>
+              </a:tblPr>
+              <a:tblGrid>
+                <a:gridCol w="3840480"/>
+                <a:gridCol w="7132320"/>
+              </a:tblGrid>
+              <a:tr h="422910">
+                <a:tc>
+                  <a:txBody>
+                    <a:bodyPr wrap="square"/>
+                    <a:lstStyle/>
+                    <a:p>
+                      <a:r>
+                        <a:rPr sz="1350" b="1">
+                          <a:solidFill>
+                            <a:srgbClr val="FFFFFF"/>
+                          </a:solidFill>
+                          <a:latin typeface="Calibri"/>
+                        </a:rPr>
+                        <a:t>Condition</a:t>
+                      </a:r>
+                    </a:p>
+                  </a:txBody>
+                  <a:tcPr marL="54864" marR="54864" marT="18288" marB="18288">
+                    <a:solidFill>
+                      <a:srgbClr val="1B263B"/>
+                    </a:solidFill>
+                  </a:tcPr>
+                </a:tc>
+                <a:tc>
+                  <a:txBody>
+                    <a:bodyPr wrap="square"/>
+                    <a:lstStyle/>
+                    <a:p>
+                      <a:r>
+                        <a:rPr sz="1350" b="1">
+                          <a:solidFill>
+                            <a:srgbClr val="FFFFFF"/>
+                          </a:solidFill>
+                          <a:latin typeface="Calibri"/>
+                        </a:rPr>
+                        <a:t>Action</a:t>
+                      </a:r>
+                    </a:p>
+                  </a:txBody>
+                  <a:tcPr marL="54864" marR="54864" marT="18288" marB="18288">
+                    <a:solidFill>
+                      <a:srgbClr val="1B263B"/>
+                    </a:solidFill>
+                  </a:tcPr>
+                </a:tc>
+              </a:tr>
+              <a:tr h="422910">
+                <a:tc>
+                  <a:txBody>
+                    <a:bodyPr wrap="square"/>
+                    <a:lstStyle/>
+                    <a:p>
+                      <a:r>
+                        <a:rPr sz="1350">
+                          <a:solidFill>
+                            <a:srgbClr val="1B263B"/>
+                          </a:solidFill>
+                          <a:latin typeface="Calibri"/>
+                        </a:rPr>
+                        <a:t>No missing values</a:t>
+                      </a:r>
+                    </a:p>
+                  </a:txBody>
+                  <a:tcPr marL="54864" marR="54864" marT="18288" marB="18288">
+                    <a:solidFill>
+                      <a:srgbClr val="FFFFFF"/>
+                    </a:solidFill>
+                  </a:tcPr>
+                </a:tc>
+                <a:tc>
+                  <a:txBody>
+                    <a:bodyPr wrap="square"/>
+                    <a:lstStyle/>
+                    <a:p>
+                      <a:r>
+                        <a:rPr sz="1350">
+                          <a:solidFill>
+                            <a:srgbClr val="1B263B"/>
+                          </a:solidFill>
+                          <a:latin typeface="Calibri"/>
+                        </a:rPr>
+                        <a:t>Do nothing</a:t>
+                      </a:r>
+                    </a:p>
+                  </a:txBody>
+                  <a:tcPr marL="54864" marR="54864" marT="18288" marB="18288">
+                    <a:solidFill>
+                      <a:srgbClr val="FFFFFF"/>
+                    </a:solidFill>
+                  </a:tcPr>
+                </a:tc>
+              </a:tr>
+              <a:tr h="422910">
+                <a:tc>
+                  <a:txBody>
+                    <a:bodyPr wrap="square"/>
+                    <a:lstStyle/>
+                    <a:p>
+                      <a:r>
+                        <a:rPr sz="1350">
+                          <a:solidFill>
+                            <a:srgbClr val="1B263B"/>
+                          </a:solidFill>
+                          <a:latin typeface="Calibri"/>
+                        </a:rPr>
+                        <a:t>≥ 60% missing</a:t>
+                      </a:r>
+                    </a:p>
+                  </a:txBody>
+                  <a:tcPr marL="54864" marR="54864" marT="18288" marB="18288">
+                    <a:solidFill>
+                      <a:srgbClr val="ECF0F3"/>
+                    </a:solidFill>
+                  </a:tcPr>
+                </a:tc>
+                <a:tc>
+                  <a:txBody>
+                    <a:bodyPr wrap="square"/>
+                    <a:lstStyle/>
+                    <a:p>
+                      <a:r>
+                        <a:rPr sz="1350">
+                          <a:solidFill>
+                            <a:srgbClr val="1B263B"/>
+                          </a:solidFill>
+                          <a:latin typeface="Calibri"/>
+                        </a:rPr>
+                        <a:t>Drop the whole column</a:t>
+                      </a:r>
+                    </a:p>
+                  </a:txBody>
+                  <a:tcPr marL="54864" marR="54864" marT="18288" marB="18288">
+                    <a:solidFill>
+                      <a:srgbClr val="ECF0F3"/>
+                    </a:solidFill>
+                  </a:tcPr>
+                </a:tc>
+              </a:tr>
+              <a:tr h="422910">
+                <a:tc>
+                  <a:txBody>
+                    <a:bodyPr wrap="square"/>
+                    <a:lstStyle/>
+                    <a:p>
+                      <a:r>
+                        <a:rPr sz="1350">
+                          <a:solidFill>
+                            <a:srgbClr val="1B263B"/>
+                          </a:solidFill>
+                          <a:latin typeface="Calibri"/>
+                        </a:rPr>
+                        <a:t>&lt; 5% missing</a:t>
+                      </a:r>
+                    </a:p>
+                  </a:txBody>
+                  <a:tcPr marL="54864" marR="54864" marT="18288" marB="18288">
+                    <a:solidFill>
+                      <a:srgbClr val="FFFFFF"/>
+                    </a:solidFill>
+                  </a:tcPr>
+                </a:tc>
+                <a:tc>
+                  <a:txBody>
+                    <a:bodyPr wrap="square"/>
+                    <a:lstStyle/>
+                    <a:p>
+                      <a:r>
+                        <a:rPr sz="1350">
+                          <a:solidFill>
+                            <a:srgbClr val="1B263B"/>
+                          </a:solidFill>
+                          <a:latin typeface="Calibri"/>
+                        </a:rPr>
+                        <a:t>Drop those few rows</a:t>
+                      </a:r>
+                    </a:p>
+                  </a:txBody>
+                  <a:tcPr marL="54864" marR="54864" marT="18288" marB="18288">
+                    <a:solidFill>
+                      <a:srgbClr val="FFFFFF"/>
+                    </a:solidFill>
+                  </a:tcPr>
+                </a:tc>
+              </a:tr>
+              <a:tr h="422910">
+                <a:tc>
+                  <a:txBody>
+                    <a:bodyPr wrap="square"/>
+                    <a:lstStyle/>
+                    <a:p>
+                      <a:r>
+                        <a:rPr sz="1350">
+                          <a:solidFill>
+                            <a:srgbClr val="1B263B"/>
+                          </a:solidFill>
+                          <a:latin typeface="Calibri"/>
+                        </a:rPr>
+                        <a:t>Numeric (else)</a:t>
+                      </a:r>
+                    </a:p>
+                  </a:txBody>
+                  <a:tcPr marL="54864" marR="54864" marT="18288" marB="18288">
+                    <a:solidFill>
+                      <a:srgbClr val="ECF0F3"/>
+                    </a:solidFill>
+                  </a:tcPr>
+                </a:tc>
+                <a:tc>
+                  <a:txBody>
+                    <a:bodyPr wrap="square"/>
+                    <a:lstStyle/>
+                    <a:p>
+                      <a:r>
+                        <a:rPr sz="1350">
+                          <a:solidFill>
+                            <a:srgbClr val="1B263B"/>
+                          </a:solidFill>
+                          <a:latin typeface="Calibri"/>
+                        </a:rPr>
+                        <a:t>KNN imputation (5 nearest rows) if ≤10,000 rows, otherwise median</a:t>
+                      </a:r>
+                    </a:p>
+                  </a:txBody>
+                  <a:tcPr marL="54864" marR="54864" marT="18288" marB="18288">
+                    <a:solidFill>
+                      <a:srgbClr val="ECF0F3"/>
+                    </a:solidFill>
+                  </a:tcPr>
+                </a:tc>
+              </a:tr>
+              <a:tr h="422910">
+                <a:tc>
+                  <a:txBody>
+                    <a:bodyPr wrap="square"/>
+                    <a:lstStyle/>
+                    <a:p>
+                      <a:r>
+                        <a:rPr sz="1350">
+                          <a:solidFill>
+                            <a:srgbClr val="1B263B"/>
+                          </a:solidFill>
+                          <a:latin typeface="Calibri"/>
+                        </a:rPr>
+                        <a:t>Categorical / boolean (else)</a:t>
+                      </a:r>
+                    </a:p>
+                  </a:txBody>
+                  <a:tcPr marL="54864" marR="54864" marT="18288" marB="18288">
+                    <a:solidFill>
+                      <a:srgbClr val="FFFFFF"/>
+                    </a:solidFill>
+                  </a:tcPr>
+                </a:tc>
+                <a:tc>
+                  <a:txBody>
+                    <a:bodyPr wrap="square"/>
+                    <a:lstStyle/>
+                    <a:p>
+                      <a:r>
+                        <a:rPr sz="1350">
+                          <a:solidFill>
+                            <a:srgbClr val="1B263B"/>
+                          </a:solidFill>
+                          <a:latin typeface="Calibri"/>
+                        </a:rPr>
+                        <a:t>Fill with the mode (most common value)</a:t>
+                      </a:r>
+                    </a:p>
+                  </a:txBody>
+                  <a:tcPr marL="54864" marR="54864" marT="18288" marB="18288">
+                    <a:solidFill>
+                      <a:srgbClr val="FFFFFF"/>
+                    </a:solidFill>
+                  </a:tcPr>
+                </a:tc>
+              </a:tr>
+              <a:tr h="422910">
+                <a:tc>
+                  <a:txBody>
+                    <a:bodyPr wrap="square"/>
+                    <a:lstStyle/>
+                    <a:p>
+                      <a:r>
+                        <a:rPr sz="1350">
+                          <a:solidFill>
+                            <a:srgbClr val="1B263B"/>
+                          </a:solidFill>
+                          <a:latin typeface="Calibri"/>
+                        </a:rPr>
+                        <a:t>Datetime (else)</a:t>
+                      </a:r>
+                    </a:p>
+                  </a:txBody>
+                  <a:tcPr marL="54864" marR="54864" marT="18288" marB="18288">
+                    <a:solidFill>
+                      <a:srgbClr val="ECF0F3"/>
+                    </a:solidFill>
+                  </a:tcPr>
+                </a:tc>
+                <a:tc>
+                  <a:txBody>
+                    <a:bodyPr wrap="square"/>
+                    <a:lstStyle/>
+                    <a:p>
+                      <a:r>
+                        <a:rPr sz="1350">
+                          <a:solidFill>
+                            <a:srgbClr val="1B263B"/>
+                          </a:solidFill>
+                          <a:latin typeface="Calibri"/>
+                        </a:rPr>
+                        <a:t>Linear interpolation</a:t>
+                      </a:r>
+                    </a:p>
+                  </a:txBody>
+                  <a:tcPr marL="54864" marR="54864" marT="18288" marB="18288">
+                    <a:solidFill>
+                      <a:srgbClr val="ECF0F3"/>
+                    </a:solidFill>
+                  </a:tcPr>
+                </a:tc>
+              </a:tr>
+              <a:tr h="422910">
+                <a:tc>
+                  <a:txBody>
+                    <a:bodyPr wrap="square"/>
+                    <a:lstStyle/>
+                    <a:p>
+                      <a:r>
+                        <a:rPr sz="1350">
+                          <a:solidFill>
+                            <a:srgbClr val="1B263B"/>
+                          </a:solidFill>
+                          <a:latin typeface="Calibri"/>
+                        </a:rPr>
+                        <a:t>Text (else)</a:t>
+                      </a:r>
+                    </a:p>
+                  </a:txBody>
+                  <a:tcPr marL="54864" marR="54864" marT="18288" marB="18288">
+                    <a:solidFill>
+                      <a:srgbClr val="FFFFFF"/>
+                    </a:solidFill>
+                  </a:tcPr>
+                </a:tc>
+                <a:tc>
+                  <a:txBody>
+                    <a:bodyPr wrap="square"/>
+                    <a:lstStyle/>
+                    <a:p>
+                      <a:r>
+                        <a:rPr sz="1350">
+                          <a:solidFill>
+                            <a:srgbClr val="1B263B"/>
+                          </a:solidFill>
+                          <a:latin typeface="Calibri"/>
+                        </a:rPr>
+                        <a:t>Fill with constant "Unknown"</a:t>
+                      </a:r>
+                    </a:p>
+                  </a:txBody>
+                  <a:tcPr marL="54864" marR="54864" marT="18288" marB="18288">
+                    <a:solidFill>
+                      <a:srgbClr val="FFFFFF"/>
+                    </a:solidFill>
+                  </a:tcPr>
+                </a:tc>
+              </a:tr>
+            </a:tbl>
+          </a:graphicData>
+        </a:graphic>
+      </p:graphicFrame>
+      <p:sp>
+        <p:nvSpPr>
+          <p:cNvPr id="5" name="TextBox 4"/>
+          <p:cNvSpPr txBox="1"/>
+          <p:nvPr/>
+        </p:nvSpPr>
+        <p:spPr>
+          <a:xfrm>
+            <a:off x="640080" y="6309360"/>
+            <a:ext cx="10972800" cy="457200"/>
+          </a:xfrm>
+          <a:prstGeom prst="rect">
+            <a:avLst/>
+          </a:prstGeom>
+          <a:noFill/>
+        </p:spPr>
+        <p:txBody>
+          <a:bodyPr wrap="square">
+            <a:spAutoFit/>
+          </a:bodyPr>
+          <a:lstStyle/>
+          <a:p>
+            <a:r>
+              <a:rPr sz="1200" i="1">
+                <a:solidFill>
+                  <a:srgbClr val="555F6B"/>
+                </a:solidFill>
+              </a:rPr>
+              <a:t>Checked top-to-bottom. KNN looks at the 5 most similar rows to estimate a missing number — smarter than a flat mean.</a:t>
+            </a:r>
+          </a:p>
+        </p:txBody>
+      </p:sp>
+    </p:spTree>
+  </p:cSld>
+  <p:clrMapOvr>
+    <a:masterClrMapping/>
+  </p:clrMapOvr>
+</p:sld>
+</file>
+
+<file path=ppt/slides/slide6.xml><?xml version="1.0" encoding="utf-8"?>
+<p:sld xmlns:a="http://schemas.openxmlformats.org/drawingml/2006/main" xmlns:p="http://schemas.openxmlformats.org/presentationml/2006/main" xmlns:r="http://schemas.openxmlformats.org/officeDocument/2006/relationships">
+  <p:cSld>
+    <p:bg>
+      <p:bgPr>
+        <a:solidFill>
+          <a:srgbClr val="FFFFFF"/>
+        </a:solidFill>
+        <a:effectLst/>
+      </p:bgPr>
+    </p:bg>
+    <p:spTree>
+      <p:nvGrpSpPr>
+        <p:cNvPr id="1" name=""/>
+        <p:cNvGrpSpPr/>
+        <p:nvPr/>
+      </p:nvGrpSpPr>
+      <p:grpSpPr/>
+      <p:sp>
+        <p:nvSpPr>
+          <p:cNvPr id="2" name="Rectangle 1"/>
+          <p:cNvSpPr/>
+          <p:nvPr/>
+        </p:nvSpPr>
+        <p:spPr>
+          <a:xfrm>
+            <a:off x="0" y="0"/>
+            <a:ext cx="12191695" cy="1051560"/>
+          </a:xfrm>
+          <a:prstGeom prst="rect">
+            <a:avLst/>
+          </a:prstGeom>
+          <a:solidFill>
+            <a:srgbClr val="1B263B"/>
+          </a:solidFill>
+          <a:ln>
+            <a:noFill/>
+          </a:ln>
+        </p:spPr>
+        <p:style>
+          <a:lnRef idx="1">
+            <a:schemeClr val="accent1"/>
+          </a:lnRef>
+          <a:fillRef idx="3">
+            <a:schemeClr val="accent1"/>
+          </a:fillRef>
+          <a:effectRef idx="2">
+            <a:schemeClr val="accent1"/>
+          </a:effectRef>
+          <a:fontRef idx="minor">
+            <a:schemeClr val="lt1"/>
+          </a:fontRef>
+        </p:style>
+        <p:txBody>
+          <a:bodyPr rtlCol="0" anchor="ctr"/>
+          <a:lstStyle/>
+          <a:p>
+            <a:pPr algn="ctr"/>
+          </a:p>
+        </p:txBody>
+      </p:sp>
+      <p:sp>
+        <p:nvSpPr>
+          <p:cNvPr id="3" name="TextBox 2"/>
+          <p:cNvSpPr txBox="1"/>
+          <p:nvPr/>
+        </p:nvSpPr>
+        <p:spPr>
+          <a:xfrm>
+            <a:off x="502920" y="146304"/>
+            <a:ext cx="11155680" cy="868680"/>
+          </a:xfrm>
+          <a:prstGeom prst="rect">
+            <a:avLst/>
+          </a:prstGeom>
+          <a:noFill/>
+        </p:spPr>
+        <p:txBody>
+          <a:bodyPr wrap="square">
+            <a:spAutoFit/>
+          </a:bodyPr>
+          <a:lstStyle/>
+          <a:p>
+            <a:r>
+              <a:rPr sz="3000" b="1">
+                <a:solidFill>
+                  <a:srgbClr val="FFFFFF"/>
+                </a:solidFill>
+                <a:latin typeface="Calibri"/>
+              </a:rPr>
+              <a:t>Stage 3 — Anomaly Detection (report only)</a:t>
+            </a:r>
+          </a:p>
+          <a:p>
+            <a:r>
+              <a:rPr sz="1400" i="1">
+                <a:solidFill>
+                  <a:srgbClr val="B8C6D8"/>
+                </a:solidFill>
+              </a:rPr>
+              <a:t>anomaly_detector.py  •  does NOT change the data</a:t>
+            </a:r>
+          </a:p>
+        </p:txBody>
+      </p:sp>
+      <p:graphicFrame>
+        <p:nvGraphicFramePr>
+          <p:cNvPr id="4" name="Table 3"/>
+          <p:cNvGraphicFramePr>
+            <a:graphicFrameLocks noGrp="1"/>
+          </p:cNvGraphicFramePr>
+          <p:nvPr/>
+        </p:nvGraphicFramePr>
+        <p:xfrm>
+          <a:off x="640080" y="1554480"/>
+          <a:ext cx="10972800" cy="2194560"/>
+        </p:xfrm>
+        <a:graphic>
+          <a:graphicData uri="http://schemas.openxmlformats.org/drawingml/2006/table">
+            <a:tbl>
+              <a:tblPr firstRow="1" bandRow="1">
+                <a:tableStyleId>{5C22544A-7EE6-4342-B048-85BDC9FD1C3A}</a:tableStyleId>
+              </a:tblPr>
+              <a:tblGrid>
+                <a:gridCol w="2743200"/>
+                <a:gridCol w="8229600"/>
+              </a:tblGrid>
+              <a:tr h="548640">
+                <a:tc>
+                  <a:txBody>
+                    <a:bodyPr wrap="square"/>
+                    <a:lstStyle/>
+                    <a:p>
+                      <a:r>
+                        <a:rPr sz="1400" b="1">
+                          <a:solidFill>
+                            <a:srgbClr val="FFFFFF"/>
+                          </a:solidFill>
+                          <a:latin typeface="Calibri"/>
+                        </a:rPr>
+                        <a:t>Method</a:t>
+                      </a:r>
+                    </a:p>
+                  </a:txBody>
+                  <a:tcPr marL="54864" marR="54864" marT="18288" marB="18288">
+                    <a:solidFill>
+                      <a:srgbClr val="1B263B"/>
+                    </a:solidFill>
+                  </a:tcPr>
+                </a:tc>
+                <a:tc>
+                  <a:txBody>
+                    <a:bodyPr wrap="square"/>
+                    <a:lstStyle/>
+                    <a:p>
+                      <a:r>
+                        <a:rPr sz="1400" b="1">
+                          <a:solidFill>
+                            <a:srgbClr val="FFFFFF"/>
+                          </a:solidFill>
+                          <a:latin typeface="Calibri"/>
+                        </a:rPr>
+                        <a:t>Flags a value / row when…</a:t>
+                      </a:r>
+                    </a:p>
+                  </a:txBody>
+                  <a:tcPr marL="54864" marR="54864" marT="18288" marB="18288">
+                    <a:solidFill>
+                      <a:srgbClr val="1B263B"/>
+                    </a:solidFill>
+                  </a:tcPr>
+                </a:tc>
+              </a:tr>
+              <a:tr h="548640">
+                <a:tc>
+                  <a:txBody>
+                    <a:bodyPr wrap="square"/>
+                    <a:lstStyle/>
+                    <a:p>
+                      <a:r>
+                        <a:rPr sz="1400">
+                          <a:solidFill>
+                            <a:srgbClr val="1B263B"/>
+                          </a:solidFill>
+                          <a:latin typeface="Calibri"/>
+                        </a:rPr>
+                        <a:t>IQR fence</a:t>
+                      </a:r>
+                    </a:p>
+                  </a:txBody>
+                  <a:tcPr marL="54864" marR="54864" marT="18288" marB="18288">
+                    <a:solidFill>
+                      <a:srgbClr val="FFFFFF"/>
+                    </a:solidFill>
+                  </a:tcPr>
+                </a:tc>
+                <a:tc>
+                  <a:txBody>
+                    <a:bodyPr wrap="square"/>
+                    <a:lstStyle/>
+                    <a:p>
+                      <a:r>
+                        <a:rPr sz="1400">
+                          <a:solidFill>
+                            <a:srgbClr val="1B263B"/>
+                          </a:solidFill>
+                          <a:latin typeface="Calibri"/>
+                        </a:rPr>
+                        <a:t>outside [Q1 − 1.5·IQR ,  Q3 + 1.5·IQR]</a:t>
+                      </a:r>
+                    </a:p>
+                  </a:txBody>
+                  <a:tcPr marL="54864" marR="54864" marT="18288" marB="18288">
+                    <a:solidFill>
+                      <a:srgbClr val="FFFFFF"/>
+                    </a:solidFill>
+                  </a:tcPr>
+                </a:tc>
+              </a:tr>
+              <a:tr h="548640">
+                <a:tc>
+                  <a:txBody>
+                    <a:bodyPr wrap="square"/>
+                    <a:lstStyle/>
+                    <a:p>
+                      <a:r>
+                        <a:rPr sz="1400">
+                          <a:solidFill>
+                            <a:srgbClr val="1B263B"/>
+                          </a:solidFill>
+                          <a:latin typeface="Calibri"/>
+                        </a:rPr>
+                        <a:t>Z-score</a:t>
+                      </a:r>
+                    </a:p>
+                  </a:txBody>
+                  <a:tcPr marL="54864" marR="54864" marT="18288" marB="18288">
+                    <a:solidFill>
+                      <a:srgbClr val="ECF0F3"/>
+                    </a:solidFill>
+                  </a:tcPr>
+                </a:tc>
+                <a:tc>
+                  <a:txBody>
+                    <a:bodyPr wrap="square"/>
+                    <a:lstStyle/>
+                    <a:p>
+                      <a:r>
+                        <a:rPr sz="1400">
+                          <a:solidFill>
+                            <a:srgbClr val="1B263B"/>
+                          </a:solidFill>
+                          <a:latin typeface="Calibri"/>
+                        </a:rPr>
+                        <a:t>more than 3 standard deviations from the mean (|z| &gt; 3)</a:t>
+                      </a:r>
+                    </a:p>
+                  </a:txBody>
+                  <a:tcPr marL="54864" marR="54864" marT="18288" marB="18288">
+                    <a:solidFill>
+                      <a:srgbClr val="ECF0F3"/>
+                    </a:solidFill>
+                  </a:tcPr>
+                </a:tc>
+              </a:tr>
+              <a:tr h="548640">
+                <a:tc>
+                  <a:txBody>
+                    <a:bodyPr wrap="square"/>
+                    <a:lstStyle/>
+                    <a:p>
+                      <a:r>
+                        <a:rPr sz="1400">
+                          <a:solidFill>
+                            <a:srgbClr val="1B263B"/>
+                          </a:solidFill>
+                          <a:latin typeface="Calibri"/>
+                        </a:rPr>
+                        <a:t>Isolation Forest</a:t>
+                      </a:r>
+                    </a:p>
+                  </a:txBody>
+                  <a:tcPr marL="54864" marR="54864" marT="18288" marB="18288">
+                    <a:solidFill>
+                      <a:srgbClr val="FFFFFF"/>
+                    </a:solidFill>
+                  </a:tcPr>
+                </a:tc>
+                <a:tc>
+                  <a:txBody>
+                    <a:bodyPr wrap="square"/>
+                    <a:lstStyle/>
+                    <a:p>
+                      <a:r>
+                        <a:rPr sz="1400">
+                          <a:solidFill>
+                            <a:srgbClr val="1B263B"/>
+                          </a:solidFill>
+                          <a:latin typeface="Calibri"/>
+                        </a:rPr>
+                        <a:t>an ML model can 'isolate' the whole row easily across all numeric columns (needs ≥10 rows)</a:t>
+                      </a:r>
+                    </a:p>
+                  </a:txBody>
+                  <a:tcPr marL="54864" marR="54864" marT="18288" marB="18288">
+                    <a:solidFill>
+                      <a:srgbClr val="FFFFFF"/>
+                    </a:solidFill>
+                  </a:tcPr>
+                </a:tc>
+              </a:tr>
+            </a:tbl>
+          </a:graphicData>
+        </a:graphic>
+      </p:graphicFrame>
+      <p:sp>
+        <p:nvSpPr>
+          <p:cNvPr id="5" name="TextBox 4"/>
+          <p:cNvSpPr txBox="1"/>
+          <p:nvPr/>
+        </p:nvSpPr>
+        <p:spPr>
+          <a:xfrm>
+            <a:off x="640080" y="4114800"/>
+            <a:ext cx="10972800" cy="4937760"/>
+          </a:xfrm>
+          <a:prstGeom prst="rect">
+            <a:avLst/>
+          </a:prstGeom>
+          <a:noFill/>
+        </p:spPr>
+        <p:txBody>
+          <a:bodyPr wrap="square">
+            <a:spAutoFit/>
+          </a:bodyPr>
+          <a:lstStyle/>
           <a:p>
             <a:pPr>
               <a:spcAft>
-                <a:spcPts val="1000"/>
+                <a:spcPts val="800"/>
               </a:spcAft>
             </a:pPr>
             <a:r>
-              <a:rPr sz="1800" b="0">
+              <a:rPr sz="1500" b="1">
                 <a:solidFill>
                   <a:srgbClr val="555F6B"/>
                 </a:solidFill>
                 <a:latin typeface="Calibri"/>
               </a:rPr>
-              <a:t>•  Cause: the dataset downloader saved wrong / duplicate files.</a:t>
-            </a:r>
-          </a:p>
-          <a:p>
-            <a:pPr>
-              <a:spcAft>
-                <a:spcPts val="1000"/>
-              </a:spcAft>
-            </a:pPr>
-            <a:r>
-              <a:rPr sz="1800" b="1">
-                <a:solidFill>
-                  <a:srgbClr val="27AE60"/>
+              <a:t>•  This stage only reports counts — outlier *handling* happens in the transformer (Step 6).</a:t>
+            </a:r>
+          </a:p>
+        </p:txBody>
+      </p:sp>
+    </p:spTree>
+  </p:cSld>
+  <p:clrMapOvr>
+    <a:masterClrMapping/>
+  </p:clrMapOvr>
+</p:sld>
+</file>
+
+<file path=ppt/slides/slide7.xml><?xml version="1.0" encoding="utf-8"?>
+<p:sld xmlns:a="http://schemas.openxmlformats.org/drawingml/2006/main" xmlns:p="http://schemas.openxmlformats.org/presentationml/2006/main" xmlns:r="http://schemas.openxmlformats.org/officeDocument/2006/relationships">
+  <p:cSld>
+    <p:bg>
+      <p:bgPr>
+        <a:solidFill>
+          <a:srgbClr val="FFFFFF"/>
+        </a:solidFill>
+        <a:effectLst/>
+      </p:bgPr>
+    </p:bg>
+    <p:spTree>
+      <p:nvGrpSpPr>
+        <p:cNvPr id="1" name=""/>
+        <p:cNvGrpSpPr/>
+        <p:nvPr/>
+      </p:nvGrpSpPr>
+      <p:grpSpPr/>
+      <p:sp>
+        <p:nvSpPr>
+          <p:cNvPr id="2" name="Rectangle 1"/>
+          <p:cNvSpPr/>
+          <p:nvPr/>
+        </p:nvSpPr>
+        <p:spPr>
+          <a:xfrm>
+            <a:off x="0" y="0"/>
+            <a:ext cx="12191695" cy="1051560"/>
+          </a:xfrm>
+          <a:prstGeom prst="rect">
+            <a:avLst/>
+          </a:prstGeom>
+          <a:solidFill>
+            <a:srgbClr val="1B263B"/>
+          </a:solidFill>
+          <a:ln>
+            <a:noFill/>
+          </a:ln>
+        </p:spPr>
+        <p:style>
+          <a:lnRef idx="1">
+            <a:schemeClr val="accent1"/>
+          </a:lnRef>
+          <a:fillRef idx="3">
+            <a:schemeClr val="accent1"/>
+          </a:fillRef>
+          <a:effectRef idx="2">
+            <a:schemeClr val="accent1"/>
+          </a:effectRef>
+          <a:fontRef idx="minor">
+            <a:schemeClr val="lt1"/>
+          </a:fontRef>
+        </p:style>
+        <p:txBody>
+          <a:bodyPr rtlCol="0" anchor="ctr"/>
+          <a:lstStyle/>
+          <a:p>
+            <a:pPr algn="ctr"/>
+          </a:p>
+        </p:txBody>
+      </p:sp>
+      <p:sp>
+        <p:nvSpPr>
+          <p:cNvPr id="3" name="TextBox 2"/>
+          <p:cNvSpPr txBox="1"/>
+          <p:nvPr/>
+        </p:nvSpPr>
+        <p:spPr>
+          <a:xfrm>
+            <a:off x="502920" y="146304"/>
+            <a:ext cx="11155680" cy="868680"/>
+          </a:xfrm>
+          <a:prstGeom prst="rect">
+            <a:avLst/>
+          </a:prstGeom>
+          <a:noFill/>
+        </p:spPr>
+        <p:txBody>
+          <a:bodyPr wrap="square">
+            <a:spAutoFit/>
+          </a:bodyPr>
+          <a:lstStyle/>
+          <a:p>
+            <a:r>
+              <a:rPr sz="3000" b="1">
+                <a:solidFill>
+                  <a:srgbClr val="FFFFFF"/>
                 </a:solidFill>
                 <a:latin typeface="Calibri"/>
               </a:rPr>
-              <a:t>•  Fix: removed duplicates (39 → 35); benchmark now de-dups by content hash.</a:t>
+              <a:t>Stage 4 — Feature Transformer: The Real Preprocessing</a:t>
+            </a:r>
+          </a:p>
+          <a:p>
+            <a:r>
+              <a:rPr sz="1400" i="1">
+                <a:solidFill>
+                  <a:srgbClr val="B8C6D8"/>
+                </a:solidFill>
+              </a:rPr>
+              <a:t>feature_transformer.py  •  8 ordered steps fed to the model</a:t>
+            </a:r>
+          </a:p>
+        </p:txBody>
+      </p:sp>
+      <p:graphicFrame>
+        <p:nvGraphicFramePr>
+          <p:cNvPr id="4" name="Table 3"/>
+          <p:cNvGraphicFramePr>
+            <a:graphicFrameLocks noGrp="1"/>
+          </p:cNvGraphicFramePr>
+          <p:nvPr/>
+        </p:nvGraphicFramePr>
+        <p:xfrm>
+          <a:off x="457200" y="1280160"/>
+          <a:ext cx="11338560" cy="4206240"/>
+        </p:xfrm>
+        <a:graphic>
+          <a:graphicData uri="http://schemas.openxmlformats.org/drawingml/2006/table">
+            <a:tbl>
+              <a:tblPr firstRow="1" bandRow="1">
+                <a:tableStyleId>{5C22544A-7EE6-4342-B048-85BDC9FD1C3A}</a:tableStyleId>
+              </a:tblPr>
+              <a:tblGrid>
+                <a:gridCol w="457200"/>
+                <a:gridCol w="3931920"/>
+                <a:gridCol w="6949440"/>
+              </a:tblGrid>
+              <a:tr h="467360">
+                <a:tc>
+                  <a:txBody>
+                    <a:bodyPr wrap="square"/>
+                    <a:lstStyle/>
+                    <a:p>
+                      <a:r>
+                        <a:rPr sz="1200" b="1">
+                          <a:solidFill>
+                            <a:srgbClr val="FFFFFF"/>
+                          </a:solidFill>
+                          <a:latin typeface="Calibri"/>
+                        </a:rPr>
+                        <a:t>#</a:t>
+                      </a:r>
+                    </a:p>
+                  </a:txBody>
+                  <a:tcPr marL="54864" marR="54864" marT="18288" marB="18288">
+                    <a:solidFill>
+                      <a:srgbClr val="1B263B"/>
+                    </a:solidFill>
+                  </a:tcPr>
+                </a:tc>
+                <a:tc>
+                  <a:txBody>
+                    <a:bodyPr wrap="square"/>
+                    <a:lstStyle/>
+                    <a:p>
+                      <a:r>
+                        <a:rPr sz="1200" b="1">
+                          <a:solidFill>
+                            <a:srgbClr val="FFFFFF"/>
+                          </a:solidFill>
+                          <a:latin typeface="Calibri"/>
+                        </a:rPr>
+                        <a:t>Step</a:t>
+                      </a:r>
+                    </a:p>
+                  </a:txBody>
+                  <a:tcPr marL="54864" marR="54864" marT="18288" marB="18288">
+                    <a:solidFill>
+                      <a:srgbClr val="1B263B"/>
+                    </a:solidFill>
+                  </a:tcPr>
+                </a:tc>
+                <a:tc>
+                  <a:txBody>
+                    <a:bodyPr wrap="square"/>
+                    <a:lstStyle/>
+                    <a:p>
+                      <a:r>
+                        <a:rPr sz="1200" b="1">
+                          <a:solidFill>
+                            <a:srgbClr val="FFFFFF"/>
+                          </a:solidFill>
+                          <a:latin typeface="Calibri"/>
+                        </a:rPr>
+                        <a:t>Detail</a:t>
+                      </a:r>
+                    </a:p>
+                  </a:txBody>
+                  <a:tcPr marL="54864" marR="54864" marT="18288" marB="18288">
+                    <a:solidFill>
+                      <a:srgbClr val="1B263B"/>
+                    </a:solidFill>
+                  </a:tcPr>
+                </a:tc>
+              </a:tr>
+              <a:tr h="467360">
+                <a:tc>
+                  <a:txBody>
+                    <a:bodyPr wrap="square"/>
+                    <a:lstStyle/>
+                    <a:p>
+                      <a:r>
+                        <a:rPr sz="1200">
+                          <a:solidFill>
+                            <a:srgbClr val="1B263B"/>
+                          </a:solidFill>
+                          <a:latin typeface="Calibri"/>
+                        </a:rPr>
+                        <a:t>1</a:t>
+                      </a:r>
+                    </a:p>
+                  </a:txBody>
+                  <a:tcPr marL="54864" marR="54864" marT="18288" marB="18288">
+                    <a:solidFill>
+                      <a:srgbClr val="FFFFFF"/>
+                    </a:solidFill>
+                  </a:tcPr>
+                </a:tc>
+                <a:tc>
+                  <a:txBody>
+                    <a:bodyPr wrap="square"/>
+                    <a:lstStyle/>
+                    <a:p>
+                      <a:r>
+                        <a:rPr sz="1200">
+                          <a:solidFill>
+                            <a:srgbClr val="1B263B"/>
+                          </a:solidFill>
+                          <a:latin typeface="Calibri"/>
+                        </a:rPr>
+                        <a:t>Drop zero-variance</a:t>
+                      </a:r>
+                    </a:p>
+                  </a:txBody>
+                  <a:tcPr marL="54864" marR="54864" marT="18288" marB="18288">
+                    <a:solidFill>
+                      <a:srgbClr val="FFFFFF"/>
+                    </a:solidFill>
+                  </a:tcPr>
+                </a:tc>
+                <a:tc>
+                  <a:txBody>
+                    <a:bodyPr wrap="square"/>
+                    <a:lstStyle/>
+                    <a:p>
+                      <a:r>
+                        <a:rPr sz="1200">
+                          <a:solidFill>
+                            <a:srgbClr val="1B263B"/>
+                          </a:solidFill>
+                          <a:latin typeface="Calibri"/>
+                        </a:rPr>
+                        <a:t>column has only one unique value</a:t>
+                      </a:r>
+                    </a:p>
+                  </a:txBody>
+                  <a:tcPr marL="54864" marR="54864" marT="18288" marB="18288">
+                    <a:solidFill>
+                      <a:srgbClr val="FFFFFF"/>
+                    </a:solidFill>
+                  </a:tcPr>
+                </a:tc>
+              </a:tr>
+              <a:tr h="467360">
+                <a:tc>
+                  <a:txBody>
+                    <a:bodyPr wrap="square"/>
+                    <a:lstStyle/>
+                    <a:p>
+                      <a:r>
+                        <a:rPr sz="1200">
+                          <a:solidFill>
+                            <a:srgbClr val="1B263B"/>
+                          </a:solidFill>
+                          <a:latin typeface="Calibri"/>
+                        </a:rPr>
+                        <a:t>2</a:t>
+                      </a:r>
+                    </a:p>
+                  </a:txBody>
+                  <a:tcPr marL="54864" marR="54864" marT="18288" marB="18288">
+                    <a:solidFill>
+                      <a:srgbClr val="ECF0F3"/>
+                    </a:solidFill>
+                  </a:tcPr>
+                </a:tc>
+                <a:tc>
+                  <a:txBody>
+                    <a:bodyPr wrap="square"/>
+                    <a:lstStyle/>
+                    <a:p>
+                      <a:r>
+                        <a:rPr sz="1200">
+                          <a:solidFill>
+                            <a:srgbClr val="1B263B"/>
+                          </a:solidFill>
+                          <a:latin typeface="Calibri"/>
+                        </a:rPr>
+                        <a:t>Drop near-constant categoricals</a:t>
+                      </a:r>
+                    </a:p>
+                  </a:txBody>
+                  <a:tcPr marL="54864" marR="54864" marT="18288" marB="18288">
+                    <a:solidFill>
+                      <a:srgbClr val="ECF0F3"/>
+                    </a:solidFill>
+                  </a:tcPr>
+                </a:tc>
+                <a:tc>
+                  <a:txBody>
+                    <a:bodyPr wrap="square"/>
+                    <a:lstStyle/>
+                    <a:p>
+                      <a:r>
+                        <a:rPr sz="1200">
+                          <a:solidFill>
+                            <a:srgbClr val="1B263B"/>
+                          </a:solidFill>
+                          <a:latin typeface="Calibri"/>
+                        </a:rPr>
+                        <a:t>one value covers &gt; 95% of rows</a:t>
+                      </a:r>
+                    </a:p>
+                  </a:txBody>
+                  <a:tcPr marL="54864" marR="54864" marT="18288" marB="18288">
+                    <a:solidFill>
+                      <a:srgbClr val="ECF0F3"/>
+                    </a:solidFill>
+                  </a:tcPr>
+                </a:tc>
+              </a:tr>
+              <a:tr h="467360">
+                <a:tc>
+                  <a:txBody>
+                    <a:bodyPr wrap="square"/>
+                    <a:lstStyle/>
+                    <a:p>
+                      <a:r>
+                        <a:rPr sz="1200">
+                          <a:solidFill>
+                            <a:srgbClr val="1B263B"/>
+                          </a:solidFill>
+                          <a:latin typeface="Calibri"/>
+                        </a:rPr>
+                        <a:t>3</a:t>
+                      </a:r>
+                    </a:p>
+                  </a:txBody>
+                  <a:tcPr marL="54864" marR="54864" marT="18288" marB="18288">
+                    <a:solidFill>
+                      <a:srgbClr val="FFFFFF"/>
+                    </a:solidFill>
+                  </a:tcPr>
+                </a:tc>
+                <a:tc>
+                  <a:txBody>
+                    <a:bodyPr wrap="square"/>
+                    <a:lstStyle/>
+                    <a:p>
+                      <a:r>
+                        <a:rPr sz="1200">
+                          <a:solidFill>
+                            <a:srgbClr val="1B263B"/>
+                          </a:solidFill>
+                          <a:latin typeface="Calibri"/>
+                        </a:rPr>
+                        <a:t>Drop pure-ID columns</a:t>
+                      </a:r>
+                    </a:p>
+                  </a:txBody>
+                  <a:tcPr marL="54864" marR="54864" marT="18288" marB="18288">
+                    <a:solidFill>
+                      <a:srgbClr val="FFFFFF"/>
+                    </a:solidFill>
+                  </a:tcPr>
+                </a:tc>
+                <a:tc>
+                  <a:txBody>
+                    <a:bodyPr wrap="square"/>
+                    <a:lstStyle/>
+                    <a:p>
+                      <a:r>
+                        <a:rPr sz="1200">
+                          <a:solidFill>
+                            <a:srgbClr val="1B263B"/>
+                          </a:solidFill>
+                          <a:latin typeface="Calibri"/>
+                        </a:rPr>
+                        <a:t>sequential IDs (+ all-unique integers on small data)</a:t>
+                      </a:r>
+                    </a:p>
+                  </a:txBody>
+                  <a:tcPr marL="54864" marR="54864" marT="18288" marB="18288">
+                    <a:solidFill>
+                      <a:srgbClr val="FFFFFF"/>
+                    </a:solidFill>
+                  </a:tcPr>
+                </a:tc>
+              </a:tr>
+              <a:tr h="467360">
+                <a:tc>
+                  <a:txBody>
+                    <a:bodyPr wrap="square"/>
+                    <a:lstStyle/>
+                    <a:p>
+                      <a:r>
+                        <a:rPr sz="1200">
+                          <a:solidFill>
+                            <a:srgbClr val="1B263B"/>
+                          </a:solidFill>
+                          <a:latin typeface="Calibri"/>
+                        </a:rPr>
+                        <a:t>4</a:t>
+                      </a:r>
+                    </a:p>
+                  </a:txBody>
+                  <a:tcPr marL="54864" marR="54864" marT="18288" marB="18288">
+                    <a:solidFill>
+                      <a:srgbClr val="ECF0F3"/>
+                    </a:solidFill>
+                  </a:tcPr>
+                </a:tc>
+                <a:tc>
+                  <a:txBody>
+                    <a:bodyPr wrap="square"/>
+                    <a:lstStyle/>
+                    <a:p>
+                      <a:r>
+                        <a:rPr sz="1200">
+                          <a:solidFill>
+                            <a:srgbClr val="1B263B"/>
+                          </a:solidFill>
+                          <a:latin typeface="Calibri"/>
+                        </a:rPr>
+                        <a:t>Frequency-encode high-cardinality</a:t>
+                      </a:r>
+                    </a:p>
+                  </a:txBody>
+                  <a:tcPr marL="54864" marR="54864" marT="18288" marB="18288">
+                    <a:solidFill>
+                      <a:srgbClr val="ECF0F3"/>
+                    </a:solidFill>
+                  </a:tcPr>
+                </a:tc>
+                <a:tc>
+                  <a:txBody>
+                    <a:bodyPr wrap="square"/>
+                    <a:lstStyle/>
+                    <a:p>
+                      <a:r>
+                        <a:rPr sz="1200">
+                          <a:solidFill>
+                            <a:srgbClr val="1B263B"/>
+                          </a:solidFill>
+                          <a:latin typeface="Calibri"/>
+                        </a:rPr>
+                        <a:t>&gt; 20 unique → replace value with how often it appears</a:t>
+                      </a:r>
+                    </a:p>
+                  </a:txBody>
+                  <a:tcPr marL="54864" marR="54864" marT="18288" marB="18288">
+                    <a:solidFill>
+                      <a:srgbClr val="ECF0F3"/>
+                    </a:solidFill>
+                  </a:tcPr>
+                </a:tc>
+              </a:tr>
+              <a:tr h="467360">
+                <a:tc>
+                  <a:txBody>
+                    <a:bodyPr wrap="square"/>
+                    <a:lstStyle/>
+                    <a:p>
+                      <a:r>
+                        <a:rPr sz="1200">
+                          <a:solidFill>
+                            <a:srgbClr val="1B263B"/>
+                          </a:solidFill>
+                          <a:latin typeface="Calibri"/>
+                        </a:rPr>
+                        <a:t>5</a:t>
+                      </a:r>
+                    </a:p>
+                  </a:txBody>
+                  <a:tcPr marL="54864" marR="54864" marT="18288" marB="18288">
+                    <a:solidFill>
+                      <a:srgbClr val="FFFFFF"/>
+                    </a:solidFill>
+                  </a:tcPr>
+                </a:tc>
+                <a:tc>
+                  <a:txBody>
+                    <a:bodyPr wrap="square"/>
+                    <a:lstStyle/>
+                    <a:p>
+                      <a:r>
+                        <a:rPr sz="1200">
+                          <a:solidFill>
+                            <a:srgbClr val="1B263B"/>
+                          </a:solidFill>
+                          <a:latin typeface="Calibri"/>
+                        </a:rPr>
+                        <a:t>One-hot encode (SVM / linear only)</a:t>
+                      </a:r>
+                    </a:p>
+                  </a:txBody>
+                  <a:tcPr marL="54864" marR="54864" marT="18288" marB="18288">
+                    <a:solidFill>
+                      <a:srgbClr val="FFFFFF"/>
+                    </a:solidFill>
+                  </a:tcPr>
+                </a:tc>
+                <a:tc>
+                  <a:txBody>
+                    <a:bodyPr wrap="square"/>
+                    <a:lstStyle/>
+                    <a:p>
+                      <a:r>
+                        <a:rPr sz="1200">
+                          <a:solidFill>
+                            <a:srgbClr val="1B263B"/>
+                          </a:solidFill>
+                          <a:latin typeface="Calibri"/>
+                        </a:rPr>
+                        <a:t>low-cardinality categories → avoids fake ordering</a:t>
+                      </a:r>
+                    </a:p>
+                  </a:txBody>
+                  <a:tcPr marL="54864" marR="54864" marT="18288" marB="18288">
+                    <a:solidFill>
+                      <a:srgbClr val="FFFFFF"/>
+                    </a:solidFill>
+                  </a:tcPr>
+                </a:tc>
+              </a:tr>
+              <a:tr h="467360">
+                <a:tc>
+                  <a:txBody>
+                    <a:bodyPr wrap="square"/>
+                    <a:lstStyle/>
+                    <a:p>
+                      <a:r>
+                        <a:rPr sz="1200">
+                          <a:solidFill>
+                            <a:srgbClr val="1B263B"/>
+                          </a:solidFill>
+                          <a:latin typeface="Calibri"/>
+                        </a:rPr>
+                        <a:t>6</a:t>
+                      </a:r>
+                    </a:p>
+                  </a:txBody>
+                  <a:tcPr marL="54864" marR="54864" marT="18288" marB="18288">
+                    <a:solidFill>
+                      <a:srgbClr val="ECF0F3"/>
+                    </a:solidFill>
+                  </a:tcPr>
+                </a:tc>
+                <a:tc>
+                  <a:txBody>
+                    <a:bodyPr wrap="square"/>
+                    <a:lstStyle/>
+                    <a:p>
+                      <a:r>
+                        <a:rPr sz="1200">
+                          <a:solidFill>
+                            <a:srgbClr val="1B263B"/>
+                          </a:solidFill>
+                          <a:latin typeface="Calibri"/>
+                        </a:rPr>
+                        <a:t>Cap outliers (IQR, k=5)</a:t>
+                      </a:r>
+                    </a:p>
+                  </a:txBody>
+                  <a:tcPr marL="54864" marR="54864" marT="18288" marB="18288">
+                    <a:solidFill>
+                      <a:srgbClr val="ECF0F3"/>
+                    </a:solidFill>
+                  </a:tcPr>
+                </a:tc>
+                <a:tc>
+                  <a:txBody>
+                    <a:bodyPr wrap="square"/>
+                    <a:lstStyle/>
+                    <a:p>
+                      <a:r>
+                        <a:rPr sz="1200">
+                          <a:solidFill>
+                            <a:srgbClr val="1B263B"/>
+                          </a:solidFill>
+                          <a:latin typeface="Calibri"/>
+                        </a:rPr>
+                        <a:t>mild clip; skipped for ordinal / count / ID</a:t>
+                      </a:r>
+                    </a:p>
+                  </a:txBody>
+                  <a:tcPr marL="54864" marR="54864" marT="18288" marB="18288">
+                    <a:solidFill>
+                      <a:srgbClr val="ECF0F3"/>
+                    </a:solidFill>
+                  </a:tcPr>
+                </a:tc>
+              </a:tr>
+              <a:tr h="467360">
+                <a:tc>
+                  <a:txBody>
+                    <a:bodyPr wrap="square"/>
+                    <a:lstStyle/>
+                    <a:p>
+                      <a:r>
+                        <a:rPr sz="1200">
+                          <a:solidFill>
+                            <a:srgbClr val="1B263B"/>
+                          </a:solidFill>
+                          <a:latin typeface="Calibri"/>
+                        </a:rPr>
+                        <a:t>7</a:t>
+                      </a:r>
+                    </a:p>
+                  </a:txBody>
+                  <a:tcPr marL="54864" marR="54864" marT="18288" marB="18288">
+                    <a:solidFill>
+                      <a:srgbClr val="FFFFFF"/>
+                    </a:solidFill>
+                  </a:tcPr>
+                </a:tc>
+                <a:tc>
+                  <a:txBody>
+                    <a:bodyPr wrap="square"/>
+                    <a:lstStyle/>
+                    <a:p>
+                      <a:r>
+                        <a:rPr sz="1200">
+                          <a:solidFill>
+                            <a:srgbClr val="1B263B"/>
+                          </a:solidFill>
+                          <a:latin typeface="Calibri"/>
+                        </a:rPr>
+                        <a:t>log1p skewed continuous</a:t>
+                      </a:r>
+                    </a:p>
+                  </a:txBody>
+                  <a:tcPr marL="54864" marR="54864" marT="18288" marB="18288">
+                    <a:solidFill>
+                      <a:srgbClr val="FFFFFF"/>
+                    </a:solidFill>
+                  </a:tcPr>
+                </a:tc>
+                <a:tc>
+                  <a:txBody>
+                    <a:bodyPr wrap="square"/>
+                    <a:lstStyle/>
+                    <a:p>
+                      <a:r>
+                        <a:rPr sz="1200">
+                          <a:solidFill>
+                            <a:srgbClr val="1B263B"/>
+                          </a:solidFill>
+                          <a:latin typeface="Calibri"/>
+                        </a:rPr>
+                        <a:t>skew&gt;1, all ≥0, wide range; skipped for ordinal/count/ID</a:t>
+                      </a:r>
+                    </a:p>
+                  </a:txBody>
+                  <a:tcPr marL="54864" marR="54864" marT="18288" marB="18288">
+                    <a:solidFill>
+                      <a:srgbClr val="FFFFFF"/>
+                    </a:solidFill>
+                  </a:tcPr>
+                </a:tc>
+              </a:tr>
+              <a:tr h="467360">
+                <a:tc>
+                  <a:txBody>
+                    <a:bodyPr wrap="square"/>
+                    <a:lstStyle/>
+                    <a:p>
+                      <a:r>
+                        <a:rPr sz="1200">
+                          <a:solidFill>
+                            <a:srgbClr val="1B263B"/>
+                          </a:solidFill>
+                          <a:latin typeface="Calibri"/>
+                        </a:rPr>
+                        <a:t>8</a:t>
+                      </a:r>
+                    </a:p>
+                  </a:txBody>
+                  <a:tcPr marL="54864" marR="54864" marT="18288" marB="18288">
+                    <a:solidFill>
+                      <a:srgbClr val="ECF0F3"/>
+                    </a:solidFill>
+                  </a:tcPr>
+                </a:tc>
+                <a:tc>
+                  <a:txBody>
+                    <a:bodyPr wrap="square"/>
+                    <a:lstStyle/>
+                    <a:p>
+                      <a:r>
+                        <a:rPr sz="1200">
+                          <a:solidFill>
+                            <a:srgbClr val="1B263B"/>
+                          </a:solidFill>
+                          <a:latin typeface="Calibri"/>
+                        </a:rPr>
+                        <a:t>Scale + feature budget</a:t>
+                      </a:r>
+                    </a:p>
+                  </a:txBody>
+                  <a:tcPr marL="54864" marR="54864" marT="18288" marB="18288">
+                    <a:solidFill>
+                      <a:srgbClr val="ECF0F3"/>
+                    </a:solidFill>
+                  </a:tcPr>
+                </a:tc>
+                <a:tc>
+                  <a:txBody>
+                    <a:bodyPr wrap="square"/>
+                    <a:lstStyle/>
+                    <a:p>
+                      <a:r>
+                        <a:rPr sz="1200">
+                          <a:solidFill>
+                            <a:srgbClr val="1B263B"/>
+                          </a:solidFill>
+                          <a:latin typeface="Calibri"/>
+                        </a:rPr>
+                        <a:t>RobustScaler (SVM) / StandardScaler (linear) / none (tree); keep top-K by SelectKBest</a:t>
+                      </a:r>
+                    </a:p>
+                  </a:txBody>
+                  <a:tcPr marL="54864" marR="54864" marT="18288" marB="18288">
+                    <a:solidFill>
+                      <a:srgbClr val="ECF0F3"/>
+                    </a:solidFill>
+                  </a:tcPr>
+                </a:tc>
+              </a:tr>
+            </a:tbl>
+          </a:graphicData>
+        </a:graphic>
+      </p:graphicFrame>
+      <p:sp>
+        <p:nvSpPr>
+          <p:cNvPr id="5" name="TextBox 4"/>
+          <p:cNvSpPr txBox="1"/>
+          <p:nvPr/>
+        </p:nvSpPr>
+        <p:spPr>
+          <a:xfrm>
+            <a:off x="640080" y="6309360"/>
+            <a:ext cx="10972800" cy="457200"/>
+          </a:xfrm>
+          <a:prstGeom prst="rect">
+            <a:avLst/>
+          </a:prstGeom>
+          <a:noFill/>
+        </p:spPr>
+        <p:txBody>
+          <a:bodyPr wrap="square">
+            <a:spAutoFit/>
+          </a:bodyPr>
+          <a:lstStyle/>
+          <a:p>
+            <a:r>
+              <a:rPr sz="1200" i="1">
+                <a:solidFill>
+                  <a:srgbClr val="555F6B"/>
+                </a:solidFill>
+              </a:rPr>
+              <a:t>Steps 6 &amp; 7 use the Stage-1 sub-types to avoid damaging ratings / counts / IDs.</a:t>
+            </a:r>
+          </a:p>
+        </p:txBody>
+      </p:sp>
+    </p:spTree>
+  </p:cSld>
+  <p:clrMapOvr>
+    <a:masterClrMapping/>
+  </p:clrMapOvr>
+</p:sld>
+</file>
+
+<file path=ppt/slides/slide8.xml><?xml version="1.0" encoding="utf-8"?>
+<p:sld xmlns:a="http://schemas.openxmlformats.org/drawingml/2006/main" xmlns:p="http://schemas.openxmlformats.org/presentationml/2006/main" xmlns:r="http://schemas.openxmlformats.org/officeDocument/2006/relationships">
+  <p:cSld>
+    <p:bg>
+      <p:bgPr>
+        <a:solidFill>
+          <a:srgbClr val="FFFFFF"/>
+        </a:solidFill>
+        <a:effectLst/>
+      </p:bgPr>
+    </p:bg>
+    <p:spTree>
+      <p:nvGrpSpPr>
+        <p:cNvPr id="1" name=""/>
+        <p:cNvGrpSpPr/>
+        <p:nvPr/>
+      </p:nvGrpSpPr>
+      <p:grpSpPr/>
+      <p:sp>
+        <p:nvSpPr>
+          <p:cNvPr id="2" name="Rectangle 1"/>
+          <p:cNvSpPr/>
+          <p:nvPr/>
+        </p:nvSpPr>
+        <p:spPr>
+          <a:xfrm>
+            <a:off x="0" y="0"/>
+            <a:ext cx="12191695" cy="1051560"/>
+          </a:xfrm>
+          <a:prstGeom prst="rect">
+            <a:avLst/>
+          </a:prstGeom>
+          <a:solidFill>
+            <a:srgbClr val="1B263B"/>
+          </a:solidFill>
+          <a:ln>
+            <a:noFill/>
+          </a:ln>
+        </p:spPr>
+        <p:style>
+          <a:lnRef idx="1">
+            <a:schemeClr val="accent1"/>
+          </a:lnRef>
+          <a:fillRef idx="3">
+            <a:schemeClr val="accent1"/>
+          </a:fillRef>
+          <a:effectRef idx="2">
+            <a:schemeClr val="accent1"/>
+          </a:effectRef>
+          <a:fontRef idx="minor">
+            <a:schemeClr val="lt1"/>
+          </a:fontRef>
+        </p:style>
+        <p:txBody>
+          <a:bodyPr rtlCol="0" anchor="ctr"/>
+          <a:lstStyle/>
+          <a:p>
+            <a:pPr algn="ctr"/>
+          </a:p>
+        </p:txBody>
+      </p:sp>
+      <p:sp>
+        <p:nvSpPr>
+          <p:cNvPr id="3" name="TextBox 2"/>
+          <p:cNvSpPr txBox="1"/>
+          <p:nvPr/>
+        </p:nvSpPr>
+        <p:spPr>
+          <a:xfrm>
+            <a:off x="502920" y="146304"/>
+            <a:ext cx="11155680" cy="868680"/>
+          </a:xfrm>
+          <a:prstGeom prst="rect">
+            <a:avLst/>
+          </a:prstGeom>
+          <a:noFill/>
+        </p:spPr>
+        <p:txBody>
+          <a:bodyPr wrap="square">
+            <a:spAutoFit/>
+          </a:bodyPr>
+          <a:lstStyle/>
+          <a:p>
+            <a:r>
+              <a:rPr sz="3000" b="1">
+                <a:solidFill>
+                  <a:srgbClr val="FFFFFF"/>
+                </a:solidFill>
+                <a:latin typeface="Calibri"/>
+              </a:rPr>
+              <a:t>One Transformer, Two Settings — RF vs SVM</a:t>
+            </a:r>
+          </a:p>
+          <a:p>
+            <a:r>
+              <a:rPr sz="1400" i="1">
+                <a:solidFill>
+                  <a:srgbClr val="B8C6D8"/>
+                </a:solidFill>
+              </a:rPr>
+              <a:t>The Feature Transformer runs for BOTH models — only the settings differ</a:t>
+            </a:r>
+          </a:p>
+        </p:txBody>
+      </p:sp>
+      <p:sp>
+        <p:nvSpPr>
+          <p:cNvPr id="4" name="Rounded Rectangle 3"/>
+          <p:cNvSpPr/>
+          <p:nvPr/>
+        </p:nvSpPr>
+        <p:spPr>
+          <a:xfrm>
+            <a:off x="4160520" y="1325880"/>
+            <a:ext cx="3840480" cy="731520"/>
+          </a:xfrm>
+          <a:prstGeom prst="roundRect">
+            <a:avLst/>
+          </a:prstGeom>
+          <a:solidFill>
+            <a:srgbClr val="2E6DB8"/>
+          </a:solidFill>
+          <a:ln>
+            <a:solidFill>
+              <a:srgbClr val="2E6DB8"/>
+            </a:solidFill>
+          </a:ln>
+        </p:spPr>
+        <p:style>
+          <a:lnRef idx="1">
+            <a:schemeClr val="accent1"/>
+          </a:lnRef>
+          <a:fillRef idx="3">
+            <a:schemeClr val="accent1"/>
+          </a:fillRef>
+          <a:effectRef idx="2">
+            <a:schemeClr val="accent1"/>
+          </a:effectRef>
+          <a:fontRef idx="minor">
+            <a:schemeClr val="lt1"/>
+          </a:fontRef>
+        </p:style>
+        <p:txBody>
+          <a:bodyPr rtlCol="0" anchor="ctr" wrap="square"/>
+          <a:lstStyle/>
+          <a:p>
+            <a:pPr algn="ctr"/>
+            <a:r>
+              <a:rPr sz="1600" b="1">
+                <a:solidFill>
+                  <a:srgbClr val="FFFFFF"/>
+                </a:solidFill>
+                <a:latin typeface="Calibri"/>
+              </a:rPr>
+              <a:t>Clean data</a:t>
+            </a:r>
+          </a:p>
+          <a:p>
+            <a:pPr algn="ctr"/>
+            <a:r>
+              <a:rPr sz="1300" b="0">
+                <a:solidFill>
+                  <a:srgbClr val="FFFFFF"/>
+                </a:solidFill>
+                <a:latin typeface="Calibri"/>
+              </a:rPr>
+              <a:t>(after Stages 1–2)</a:t>
+            </a:r>
+          </a:p>
+        </p:txBody>
+      </p:sp>
+      <p:sp>
+        <p:nvSpPr>
+          <p:cNvPr id="5" name="Down Arrow 4"/>
+          <p:cNvSpPr/>
+          <p:nvPr/>
+        </p:nvSpPr>
+        <p:spPr>
+          <a:xfrm>
+            <a:off x="3108960" y="2240280"/>
+            <a:ext cx="411480" cy="640080"/>
+          </a:xfrm>
+          <a:prstGeom prst="downArrow">
+            <a:avLst/>
+          </a:prstGeom>
+          <a:solidFill>
+            <a:srgbClr val="555F6B"/>
+          </a:solidFill>
+          <a:ln>
+            <a:noFill/>
+          </a:ln>
+        </p:spPr>
+        <p:style>
+          <a:lnRef idx="1">
+            <a:schemeClr val="accent1"/>
+          </a:lnRef>
+          <a:fillRef idx="3">
+            <a:schemeClr val="accent1"/>
+          </a:fillRef>
+          <a:effectRef idx="2">
+            <a:schemeClr val="accent1"/>
+          </a:effectRef>
+          <a:fontRef idx="minor">
+            <a:schemeClr val="lt1"/>
+          </a:fontRef>
+        </p:style>
+        <p:txBody>
+          <a:bodyPr rtlCol="0" anchor="ctr"/>
+          <a:lstStyle/>
+          <a:p>
+            <a:pPr algn="ctr"/>
+          </a:p>
+        </p:txBody>
+      </p:sp>
+      <p:sp>
+        <p:nvSpPr>
+          <p:cNvPr id="6" name="Down Arrow 5"/>
+          <p:cNvSpPr/>
+          <p:nvPr/>
+        </p:nvSpPr>
+        <p:spPr>
+          <a:xfrm>
+            <a:off x="8686800" y="2240280"/>
+            <a:ext cx="411480" cy="640080"/>
+          </a:xfrm>
+          <a:prstGeom prst="downArrow">
+            <a:avLst/>
+          </a:prstGeom>
+          <a:solidFill>
+            <a:srgbClr val="555F6B"/>
+          </a:solidFill>
+          <a:ln>
+            <a:noFill/>
+          </a:ln>
+        </p:spPr>
+        <p:style>
+          <a:lnRef idx="1">
+            <a:schemeClr val="accent1"/>
+          </a:lnRef>
+          <a:fillRef idx="3">
+            <a:schemeClr val="accent1"/>
+          </a:fillRef>
+          <a:effectRef idx="2">
+            <a:schemeClr val="accent1"/>
+          </a:effectRef>
+          <a:fontRef idx="minor">
+            <a:schemeClr val="lt1"/>
+          </a:fontRef>
+        </p:style>
+        <p:txBody>
+          <a:bodyPr rtlCol="0" anchor="ctr"/>
+          <a:lstStyle/>
+          <a:p>
+            <a:pPr algn="ctr"/>
+          </a:p>
+        </p:txBody>
+      </p:sp>
+      <p:sp>
+        <p:nvSpPr>
+          <p:cNvPr id="7" name="Rounded Rectangle 6"/>
+          <p:cNvSpPr/>
+          <p:nvPr/>
+        </p:nvSpPr>
+        <p:spPr>
+          <a:xfrm>
+            <a:off x="640080" y="3063240"/>
+            <a:ext cx="5120640" cy="1234440"/>
+          </a:xfrm>
+          <a:prstGeom prst="roundRect">
+            <a:avLst/>
+          </a:prstGeom>
+          <a:solidFill>
+            <a:srgbClr val="27AE60"/>
+          </a:solidFill>
+          <a:ln>
+            <a:solidFill>
+              <a:srgbClr val="27AE60"/>
+            </a:solidFill>
+          </a:ln>
+        </p:spPr>
+        <p:style>
+          <a:lnRef idx="1">
+            <a:schemeClr val="accent1"/>
+          </a:lnRef>
+          <a:fillRef idx="3">
+            <a:schemeClr val="accent1"/>
+          </a:fillRef>
+          <a:effectRef idx="2">
+            <a:schemeClr val="accent1"/>
+          </a:effectRef>
+          <a:fontRef idx="minor">
+            <a:schemeClr val="lt1"/>
+          </a:fontRef>
+        </p:style>
+        <p:txBody>
+          <a:bodyPr rtlCol="0" anchor="ctr" wrap="square"/>
+          <a:lstStyle/>
+          <a:p>
+            <a:pPr algn="ctr"/>
+            <a:r>
+              <a:rPr sz="1400" b="1">
+                <a:solidFill>
+                  <a:srgbClr val="FFFFFF"/>
+                </a:solidFill>
+                <a:latin typeface="Calibri"/>
+              </a:rPr>
+              <a:t>FeatureTransformer — TREE settings</a:t>
+            </a:r>
+          </a:p>
+          <a:p>
+            <a:pPr algn="ctr"/>
+            <a:r>
+              <a:rPr sz="1100" b="0">
+                <a:solidFill>
+                  <a:srgbClr val="FFFFFF"/>
+                </a:solidFill>
+                <a:latin typeface="Calibri"/>
+              </a:rPr>
+              <a:t>encode • cap outliers • log1p</a:t>
+            </a:r>
+          </a:p>
+          <a:p>
+            <a:pPr algn="ctr"/>
+            <a:r>
+              <a:rPr sz="1100" b="0">
+                <a:solidFill>
+                  <a:srgbClr val="FFFFFF"/>
+                </a:solidFill>
+                <a:latin typeface="Calibri"/>
+              </a:rPr>
+              <a:t>NO scaling · NO one-hot · NO feature cap</a:t>
+            </a:r>
+          </a:p>
+        </p:txBody>
+      </p:sp>
+      <p:sp>
+        <p:nvSpPr>
+          <p:cNvPr id="8" name="Rounded Rectangle 7"/>
+          <p:cNvSpPr/>
+          <p:nvPr/>
+        </p:nvSpPr>
+        <p:spPr>
+          <a:xfrm>
+            <a:off x="6446520" y="3063240"/>
+            <a:ext cx="5120640" cy="1234440"/>
+          </a:xfrm>
+          <a:prstGeom prst="roundRect">
+            <a:avLst/>
+          </a:prstGeom>
+          <a:solidFill>
+            <a:srgbClr val="8E44AD"/>
+          </a:solidFill>
+          <a:ln>
+            <a:solidFill>
+              <a:srgbClr val="8E44AD"/>
+            </a:solidFill>
+          </a:ln>
+        </p:spPr>
+        <p:style>
+          <a:lnRef idx="1">
+            <a:schemeClr val="accent1"/>
+          </a:lnRef>
+          <a:fillRef idx="3">
+            <a:schemeClr val="accent1"/>
+          </a:fillRef>
+          <a:effectRef idx="2">
+            <a:schemeClr val="accent1"/>
+          </a:effectRef>
+          <a:fontRef idx="minor">
+            <a:schemeClr val="lt1"/>
+          </a:fontRef>
+        </p:style>
+        <p:txBody>
+          <a:bodyPr rtlCol="0" anchor="ctr" wrap="square"/>
+          <a:lstStyle/>
+          <a:p>
+            <a:pPr algn="ctr"/>
+            <a:r>
+              <a:rPr sz="1400" b="1">
+                <a:solidFill>
+                  <a:srgbClr val="FFFFFF"/>
+                </a:solidFill>
+                <a:latin typeface="Calibri"/>
+              </a:rPr>
+              <a:t>FeatureTransformer — KERNEL settings</a:t>
+            </a:r>
+          </a:p>
+          <a:p>
+            <a:pPr algn="ctr"/>
+            <a:r>
+              <a:rPr sz="1100" b="0">
+                <a:solidFill>
+                  <a:srgbClr val="FFFFFF"/>
+                </a:solidFill>
+                <a:latin typeface="Calibri"/>
+              </a:rPr>
+              <a:t>encode • cap outliers • log1p</a:t>
+            </a:r>
+          </a:p>
+          <a:p>
+            <a:pPr algn="ctr"/>
+            <a:r>
+              <a:rPr sz="1100" b="0">
+                <a:solidFill>
+                  <a:srgbClr val="FFFFFF"/>
+                </a:solidFill>
+                <a:latin typeface="Calibri"/>
+              </a:rPr>
+              <a:t>+ scaling · + one-hot · + feature cap</a:t>
+            </a:r>
+          </a:p>
+        </p:txBody>
+      </p:sp>
+      <p:sp>
+        <p:nvSpPr>
+          <p:cNvPr id="9" name="Down Arrow 8"/>
+          <p:cNvSpPr/>
+          <p:nvPr/>
+        </p:nvSpPr>
+        <p:spPr>
+          <a:xfrm>
+            <a:off x="3108960" y="4434840"/>
+            <a:ext cx="411480" cy="548640"/>
+          </a:xfrm>
+          <a:prstGeom prst="downArrow">
+            <a:avLst/>
+          </a:prstGeom>
+          <a:solidFill>
+            <a:srgbClr val="555F6B"/>
+          </a:solidFill>
+          <a:ln>
+            <a:noFill/>
+          </a:ln>
+        </p:spPr>
+        <p:style>
+          <a:lnRef idx="1">
+            <a:schemeClr val="accent1"/>
+          </a:lnRef>
+          <a:fillRef idx="3">
+            <a:schemeClr val="accent1"/>
+          </a:fillRef>
+          <a:effectRef idx="2">
+            <a:schemeClr val="accent1"/>
+          </a:effectRef>
+          <a:fontRef idx="minor">
+            <a:schemeClr val="lt1"/>
+          </a:fontRef>
+        </p:style>
+        <p:txBody>
+          <a:bodyPr rtlCol="0" anchor="ctr"/>
+          <a:lstStyle/>
+          <a:p>
+            <a:pPr algn="ctr"/>
+          </a:p>
+        </p:txBody>
+      </p:sp>
+      <p:sp>
+        <p:nvSpPr>
+          <p:cNvPr id="10" name="Down Arrow 9"/>
+          <p:cNvSpPr/>
+          <p:nvPr/>
+        </p:nvSpPr>
+        <p:spPr>
+          <a:xfrm>
+            <a:off x="8686800" y="4434840"/>
+            <a:ext cx="411480" cy="548640"/>
+          </a:xfrm>
+          <a:prstGeom prst="downArrow">
+            <a:avLst/>
+          </a:prstGeom>
+          <a:solidFill>
+            <a:srgbClr val="555F6B"/>
+          </a:solidFill>
+          <a:ln>
+            <a:noFill/>
+          </a:ln>
+        </p:spPr>
+        <p:style>
+          <a:lnRef idx="1">
+            <a:schemeClr val="accent1"/>
+          </a:lnRef>
+          <a:fillRef idx="3">
+            <a:schemeClr val="accent1"/>
+          </a:fillRef>
+          <a:effectRef idx="2">
+            <a:schemeClr val="accent1"/>
+          </a:effectRef>
+          <a:fontRef idx="minor">
+            <a:schemeClr val="lt1"/>
+          </a:fontRef>
+        </p:style>
+        <p:txBody>
+          <a:bodyPr rtlCol="0" anchor="ctr"/>
+          <a:lstStyle/>
+          <a:p>
+            <a:pPr algn="ctr"/>
+          </a:p>
+        </p:txBody>
+      </p:sp>
+      <p:sp>
+        <p:nvSpPr>
+          <p:cNvPr id="11" name="Rounded Rectangle 10"/>
+          <p:cNvSpPr/>
+          <p:nvPr/>
+        </p:nvSpPr>
+        <p:spPr>
+          <a:xfrm>
+            <a:off x="1645920" y="5074920"/>
+            <a:ext cx="3108960" cy="731520"/>
+          </a:xfrm>
+          <a:prstGeom prst="roundRect">
+            <a:avLst/>
+          </a:prstGeom>
+          <a:solidFill>
+            <a:srgbClr val="27AE60"/>
+          </a:solidFill>
+          <a:ln>
+            <a:solidFill>
+              <a:srgbClr val="27AE60"/>
+            </a:solidFill>
+          </a:ln>
+        </p:spPr>
+        <p:style>
+          <a:lnRef idx="1">
+            <a:schemeClr val="accent1"/>
+          </a:lnRef>
+          <a:fillRef idx="3">
+            <a:schemeClr val="accent1"/>
+          </a:fillRef>
+          <a:effectRef idx="2">
+            <a:schemeClr val="accent1"/>
+          </a:effectRef>
+          <a:fontRef idx="minor">
+            <a:schemeClr val="lt1"/>
+          </a:fontRef>
+        </p:style>
+        <p:txBody>
+          <a:bodyPr rtlCol="0" anchor="ctr" wrap="square"/>
+          <a:lstStyle/>
+          <a:p>
+            <a:pPr algn="ctr"/>
+            <a:r>
+              <a:rPr sz="1600" b="1">
+                <a:solidFill>
+                  <a:srgbClr val="FFFFFF"/>
+                </a:solidFill>
+                <a:latin typeface="Calibri"/>
+              </a:rPr>
+              <a:t>RandomForest</a:t>
+            </a:r>
+          </a:p>
+        </p:txBody>
+      </p:sp>
+      <p:sp>
+        <p:nvSpPr>
+          <p:cNvPr id="12" name="Rounded Rectangle 11"/>
+          <p:cNvSpPr/>
+          <p:nvPr/>
+        </p:nvSpPr>
+        <p:spPr>
+          <a:xfrm>
+            <a:off x="7406640" y="5074920"/>
+            <a:ext cx="3108960" cy="731520"/>
+          </a:xfrm>
+          <a:prstGeom prst="roundRect">
+            <a:avLst/>
+          </a:prstGeom>
+          <a:solidFill>
+            <a:srgbClr val="8E44AD"/>
+          </a:solidFill>
+          <a:ln>
+            <a:solidFill>
+              <a:srgbClr val="8E44AD"/>
+            </a:solidFill>
+          </a:ln>
+        </p:spPr>
+        <p:style>
+          <a:lnRef idx="1">
+            <a:schemeClr val="accent1"/>
+          </a:lnRef>
+          <a:fillRef idx="3">
+            <a:schemeClr val="accent1"/>
+          </a:fillRef>
+          <a:effectRef idx="2">
+            <a:schemeClr val="accent1"/>
+          </a:effectRef>
+          <a:fontRef idx="minor">
+            <a:schemeClr val="lt1"/>
+          </a:fontRef>
+        </p:style>
+        <p:txBody>
+          <a:bodyPr rtlCol="0" anchor="ctr" wrap="square"/>
+          <a:lstStyle/>
+          <a:p>
+            <a:pPr algn="ctr"/>
+            <a:r>
+              <a:rPr sz="1600" b="1">
+                <a:solidFill>
+                  <a:srgbClr val="FFFFFF"/>
+                </a:solidFill>
+                <a:latin typeface="Calibri"/>
+              </a:rPr>
+              <a:t>SVM</a:t>
+            </a:r>
+          </a:p>
+        </p:txBody>
+      </p:sp>
+      <p:sp>
+        <p:nvSpPr>
+          <p:cNvPr id="13" name="TextBox 12"/>
+          <p:cNvSpPr txBox="1"/>
+          <p:nvPr/>
+        </p:nvSpPr>
+        <p:spPr>
+          <a:xfrm>
+            <a:off x="640080" y="6309360"/>
+            <a:ext cx="10972800" cy="457200"/>
+          </a:xfrm>
+          <a:prstGeom prst="rect">
+            <a:avLst/>
+          </a:prstGeom>
+          <a:noFill/>
+        </p:spPr>
+        <p:txBody>
+          <a:bodyPr wrap="square">
+            <a:spAutoFit/>
+          </a:bodyPr>
+          <a:lstStyle/>
+          <a:p>
+            <a:r>
+              <a:rPr sz="1200" i="1">
+                <a:solidFill>
+                  <a:srgbClr val="555F6B"/>
+                </a:solidFill>
+              </a:rPr>
+              <a:t>Same component, applied twice. RF skips scaling / one-hot / feature-cap (trees don't need them); SVM uses all of them.</a:t>
+            </a:r>
+          </a:p>
+        </p:txBody>
+      </p:sp>
+    </p:spTree>
+  </p:cSld>
+  <p:clrMapOvr>
+    <a:masterClrMapping/>
+  </p:clrMapOvr>
+</p:sld>
+</file>
+
+<file path=ppt/slides/slide9.xml><?xml version="1.0" encoding="utf-8"?>
+<p:sld xmlns:a="http://schemas.openxmlformats.org/drawingml/2006/main" xmlns:p="http://schemas.openxmlformats.org/presentationml/2006/main" xmlns:r="http://schemas.openxmlformats.org/officeDocument/2006/relationships">
+  <p:cSld>
+    <p:bg>
+      <p:bgPr>
+        <a:solidFill>
+          <a:srgbClr val="FFFFFF"/>
+        </a:solidFill>
+        <a:effectLst/>
+      </p:bgPr>
+    </p:bg>
+    <p:spTree>
+      <p:nvGrpSpPr>
+        <p:cNvPr id="1" name=""/>
+        <p:cNvGrpSpPr/>
+        <p:nvPr/>
+      </p:nvGrpSpPr>
+      <p:grpSpPr/>
+      <p:sp>
+        <p:nvSpPr>
+          <p:cNvPr id="2" name="Rectangle 1"/>
+          <p:cNvSpPr/>
+          <p:nvPr/>
+        </p:nvSpPr>
+        <p:spPr>
+          <a:xfrm>
+            <a:off x="0" y="0"/>
+            <a:ext cx="12191695" cy="1051560"/>
+          </a:xfrm>
+          <a:prstGeom prst="rect">
+            <a:avLst/>
+          </a:prstGeom>
+          <a:solidFill>
+            <a:srgbClr val="1B263B"/>
+          </a:solidFill>
+          <a:ln>
+            <a:noFill/>
+          </a:ln>
+        </p:spPr>
+        <p:style>
+          <a:lnRef idx="1">
+            <a:schemeClr val="accent1"/>
+          </a:lnRef>
+          <a:fillRef idx="3">
+            <a:schemeClr val="accent1"/>
+          </a:fillRef>
+          <a:effectRef idx="2">
+            <a:schemeClr val="accent1"/>
+          </a:effectRef>
+          <a:fontRef idx="minor">
+            <a:schemeClr val="lt1"/>
+          </a:fontRef>
+        </p:style>
+        <p:txBody>
+          <a:bodyPr rtlCol="0" anchor="ctr"/>
+          <a:lstStyle/>
+          <a:p>
+            <a:pPr algn="ctr"/>
+          </a:p>
+        </p:txBody>
+      </p:sp>
+      <p:sp>
+        <p:nvSpPr>
+          <p:cNvPr id="3" name="TextBox 2"/>
+          <p:cNvSpPr txBox="1"/>
+          <p:nvPr/>
+        </p:nvSpPr>
+        <p:spPr>
+          <a:xfrm>
+            <a:off x="502920" y="146304"/>
+            <a:ext cx="11155680" cy="868680"/>
+          </a:xfrm>
+          <a:prstGeom prst="rect">
+            <a:avLst/>
+          </a:prstGeom>
+          <a:noFill/>
+        </p:spPr>
+        <p:txBody>
+          <a:bodyPr wrap="square">
+            <a:spAutoFit/>
+          </a:bodyPr>
+          <a:lstStyle/>
+          <a:p>
+            <a:r>
+              <a:rPr sz="3000" b="1">
+                <a:solidFill>
+                  <a:srgbClr val="FFFFFF"/>
+                </a:solidFill>
+                <a:latin typeface="Calibri"/>
+              </a:rPr>
+              <a:t>Manual EDA (Baseline) vs AUDA</a:t>
+            </a:r>
+          </a:p>
+        </p:txBody>
+      </p:sp>
+      <p:graphicFrame>
+        <p:nvGraphicFramePr>
+          <p:cNvPr id="4" name="Table 3"/>
+          <p:cNvGraphicFramePr>
+            <a:graphicFrameLocks noGrp="1"/>
+          </p:cNvGraphicFramePr>
+          <p:nvPr/>
+        </p:nvGraphicFramePr>
+        <p:xfrm>
+          <a:off x="548640" y="1325880"/>
+          <a:ext cx="11155680" cy="3200400"/>
+        </p:xfrm>
+        <a:graphic>
+          <a:graphicData uri="http://schemas.openxmlformats.org/drawingml/2006/table">
+            <a:tbl>
+              <a:tblPr firstRow="1" bandRow="1">
+                <a:tableStyleId>{5C22544A-7EE6-4342-B048-85BDC9FD1C3A}</a:tableStyleId>
+              </a:tblPr>
+              <a:tblGrid>
+                <a:gridCol w="2468880"/>
+                <a:gridCol w="2377440"/>
+                <a:gridCol w="3291840"/>
+                <a:gridCol w="3017520"/>
+              </a:tblGrid>
+              <a:tr h="457200">
+                <a:tc>
+                  <a:txBody>
+                    <a:bodyPr wrap="square"/>
+                    <a:lstStyle/>
+                    <a:p>
+                      <a:r>
+                        <a:rPr sz="1300" b="1">
+                          <a:solidFill>
+                            <a:srgbClr val="FFFFFF"/>
+                          </a:solidFill>
+                          <a:latin typeface="Calibri"/>
+                        </a:rPr>
+                        <a:t>Step</a:t>
+                      </a:r>
+                    </a:p>
+                  </a:txBody>
+                  <a:tcPr marL="54864" marR="54864" marT="18288" marB="18288">
+                    <a:solidFill>
+                      <a:srgbClr val="1B263B"/>
+                    </a:solidFill>
+                  </a:tcPr>
+                </a:tc>
+                <a:tc>
+                  <a:txBody>
+                    <a:bodyPr wrap="square"/>
+                    <a:lstStyle/>
+                    <a:p>
+                      <a:r>
+                        <a:rPr sz="1300" b="1">
+                          <a:solidFill>
+                            <a:srgbClr val="FFFFFF"/>
+                          </a:solidFill>
+                          <a:latin typeface="Calibri"/>
+                        </a:rPr>
+                        <a:t>Weak baseline</a:t>
+                      </a:r>
+                    </a:p>
+                  </a:txBody>
+                  <a:tcPr marL="54864" marR="54864" marT="18288" marB="18288">
+                    <a:solidFill>
+                      <a:srgbClr val="1B263B"/>
+                    </a:solidFill>
+                  </a:tcPr>
+                </a:tc>
+                <a:tc>
+                  <a:txBody>
+                    <a:bodyPr wrap="square"/>
+                    <a:lstStyle/>
+                    <a:p>
+                      <a:r>
+                        <a:rPr sz="1300" b="1">
+                          <a:solidFill>
+                            <a:srgbClr val="FFFFFF"/>
+                          </a:solidFill>
+                          <a:latin typeface="Calibri"/>
+                        </a:rPr>
+                        <a:t>Fair baseline</a:t>
+                      </a:r>
+                    </a:p>
+                  </a:txBody>
+                  <a:tcPr marL="54864" marR="54864" marT="18288" marB="18288">
+                    <a:solidFill>
+                      <a:srgbClr val="1B263B"/>
+                    </a:solidFill>
+                  </a:tcPr>
+                </a:tc>
+                <a:tc>
+                  <a:txBody>
+                    <a:bodyPr wrap="square"/>
+                    <a:lstStyle/>
+                    <a:p>
+                      <a:r>
+                        <a:rPr sz="1300" b="1">
+                          <a:solidFill>
+                            <a:srgbClr val="FFFFFF"/>
+                          </a:solidFill>
+                          <a:latin typeface="Calibri"/>
+                        </a:rPr>
+                        <a:t>AUDA</a:t>
+                      </a:r>
+                    </a:p>
+                  </a:txBody>
+                  <a:tcPr marL="54864" marR="54864" marT="18288" marB="18288">
+                    <a:solidFill>
+                      <a:srgbClr val="1B263B"/>
+                    </a:solidFill>
+                  </a:tcPr>
+                </a:tc>
+              </a:tr>
+              <a:tr h="457200">
+                <a:tc>
+                  <a:txBody>
+                    <a:bodyPr wrap="square"/>
+                    <a:lstStyle/>
+                    <a:p>
+                      <a:r>
+                        <a:rPr sz="1300">
+                          <a:solidFill>
+                            <a:srgbClr val="1B263B"/>
+                          </a:solidFill>
+                          <a:latin typeface="Calibri"/>
+                        </a:rPr>
+                        <a:t>Missing numbers</a:t>
+                      </a:r>
+                    </a:p>
+                  </a:txBody>
+                  <a:tcPr marL="54864" marR="54864" marT="18288" marB="18288">
+                    <a:solidFill>
+                      <a:srgbClr val="FFFFFF"/>
+                    </a:solidFill>
+                  </a:tcPr>
+                </a:tc>
+                <a:tc>
+                  <a:txBody>
+                    <a:bodyPr wrap="square"/>
+                    <a:lstStyle/>
+                    <a:p>
+                      <a:r>
+                        <a:rPr sz="1300">
+                          <a:solidFill>
+                            <a:srgbClr val="1B263B"/>
+                          </a:solidFill>
+                          <a:latin typeface="Calibri"/>
+                        </a:rPr>
+                        <a:t>mean</a:t>
+                      </a:r>
+                    </a:p>
+                  </a:txBody>
+                  <a:tcPr marL="54864" marR="54864" marT="18288" marB="18288">
+                    <a:solidFill>
+                      <a:srgbClr val="FFFFFF"/>
+                    </a:solidFill>
+                  </a:tcPr>
+                </a:tc>
+                <a:tc>
+                  <a:txBody>
+                    <a:bodyPr wrap="square"/>
+                    <a:lstStyle/>
+                    <a:p>
+                      <a:r>
+                        <a:rPr sz="1300">
+                          <a:solidFill>
+                            <a:srgbClr val="1B263B"/>
+                          </a:solidFill>
+                          <a:latin typeface="Calibri"/>
+                        </a:rPr>
+                        <a:t>median</a:t>
+                      </a:r>
+                    </a:p>
+                  </a:txBody>
+                  <a:tcPr marL="54864" marR="54864" marT="18288" marB="18288">
+                    <a:solidFill>
+                      <a:srgbClr val="FFFFFF"/>
+                    </a:solidFill>
+                  </a:tcPr>
+                </a:tc>
+                <a:tc>
+                  <a:txBody>
+                    <a:bodyPr wrap="square"/>
+                    <a:lstStyle/>
+                    <a:p>
+                      <a:r>
+                        <a:rPr sz="1300">
+                          <a:solidFill>
+                            <a:srgbClr val="1B263B"/>
+                          </a:solidFill>
+                          <a:latin typeface="Calibri"/>
+                        </a:rPr>
+                        <a:t>KNN</a:t>
+                      </a:r>
+                    </a:p>
+                  </a:txBody>
+                  <a:tcPr marL="54864" marR="54864" marT="18288" marB="18288">
+                    <a:solidFill>
+                      <a:srgbClr val="FFFFFF"/>
+                    </a:solidFill>
+                  </a:tcPr>
+                </a:tc>
+              </a:tr>
+              <a:tr h="457200">
+                <a:tc>
+                  <a:txBody>
+                    <a:bodyPr wrap="square"/>
+                    <a:lstStyle/>
+                    <a:p>
+                      <a:r>
+                        <a:rPr sz="1300">
+                          <a:solidFill>
+                            <a:srgbClr val="1B263B"/>
+                          </a:solidFill>
+                          <a:latin typeface="Calibri"/>
+                        </a:rPr>
+                        <a:t>Encode categories</a:t>
+                      </a:r>
+                    </a:p>
+                  </a:txBody>
+                  <a:tcPr marL="54864" marR="54864" marT="18288" marB="18288">
+                    <a:solidFill>
+                      <a:srgbClr val="ECF0F3"/>
+                    </a:solidFill>
+                  </a:tcPr>
+                </a:tc>
+                <a:tc>
+                  <a:txBody>
+                    <a:bodyPr wrap="square"/>
+                    <a:lstStyle/>
+                    <a:p>
+                      <a:r>
+                        <a:rPr sz="1300">
+                          <a:solidFill>
+                            <a:srgbClr val="1B263B"/>
+                          </a:solidFill>
+                          <a:latin typeface="Calibri"/>
+                        </a:rPr>
+                        <a:t>ordinal (all)</a:t>
+                      </a:r>
+                    </a:p>
+                  </a:txBody>
+                  <a:tcPr marL="54864" marR="54864" marT="18288" marB="18288">
+                    <a:solidFill>
+                      <a:srgbClr val="ECF0F3"/>
+                    </a:solidFill>
+                  </a:tcPr>
+                </a:tc>
+                <a:tc>
+                  <a:txBody>
+                    <a:bodyPr wrap="square"/>
+                    <a:lstStyle/>
+                    <a:p>
+                      <a:r>
+                        <a:rPr sz="1300">
+                          <a:solidFill>
+                            <a:srgbClr val="1B263B"/>
+                          </a:solidFill>
+                          <a:latin typeface="Calibri"/>
+                        </a:rPr>
+                        <a:t>one-hot + frequency</a:t>
+                      </a:r>
+                    </a:p>
+                  </a:txBody>
+                  <a:tcPr marL="54864" marR="54864" marT="18288" marB="18288">
+                    <a:solidFill>
+                      <a:srgbClr val="ECF0F3"/>
+                    </a:solidFill>
+                  </a:tcPr>
+                </a:tc>
+                <a:tc>
+                  <a:txBody>
+                    <a:bodyPr wrap="square"/>
+                    <a:lstStyle/>
+                    <a:p>
+                      <a:r>
+                        <a:rPr sz="1300">
+                          <a:solidFill>
+                            <a:srgbClr val="1B263B"/>
+                          </a:solidFill>
+                          <a:latin typeface="Calibri"/>
+                        </a:rPr>
+                        <a:t>one-hot + frequency</a:t>
+                      </a:r>
+                    </a:p>
+                  </a:txBody>
+                  <a:tcPr marL="54864" marR="54864" marT="18288" marB="18288">
+                    <a:solidFill>
+                      <a:srgbClr val="ECF0F3"/>
+                    </a:solidFill>
+                  </a:tcPr>
+                </a:tc>
+              </a:tr>
+              <a:tr h="457200">
+                <a:tc>
+                  <a:txBody>
+                    <a:bodyPr wrap="square"/>
+                    <a:lstStyle/>
+                    <a:p>
+                      <a:r>
+                        <a:rPr sz="1300">
+                          <a:solidFill>
+                            <a:srgbClr val="1B263B"/>
+                          </a:solidFill>
+                          <a:latin typeface="Calibri"/>
+                        </a:rPr>
+                        <a:t>Scaling (for SVM)</a:t>
+                      </a:r>
+                    </a:p>
+                  </a:txBody>
+                  <a:tcPr marL="54864" marR="54864" marT="18288" marB="18288">
+                    <a:solidFill>
+                      <a:srgbClr val="FFFFFF"/>
+                    </a:solidFill>
+                  </a:tcPr>
+                </a:tc>
+                <a:tc>
+                  <a:txBody>
+                    <a:bodyPr wrap="square"/>
+                    <a:lstStyle/>
+                    <a:p>
+                      <a:r>
+                        <a:rPr sz="1300">
+                          <a:solidFill>
+                            <a:srgbClr val="1B263B"/>
+                          </a:solidFill>
+                          <a:latin typeface="Calibri"/>
+                        </a:rPr>
+                        <a:t>none</a:t>
+                      </a:r>
+                    </a:p>
+                  </a:txBody>
+                  <a:tcPr marL="54864" marR="54864" marT="18288" marB="18288">
+                    <a:solidFill>
+                      <a:srgbClr val="FFFFFF"/>
+                    </a:solidFill>
+                  </a:tcPr>
+                </a:tc>
+                <a:tc>
+                  <a:txBody>
+                    <a:bodyPr wrap="square"/>
+                    <a:lstStyle/>
+                    <a:p>
+                      <a:r>
+                        <a:rPr sz="1300">
+                          <a:solidFill>
+                            <a:srgbClr val="1B263B"/>
+                          </a:solidFill>
+                          <a:latin typeface="Calibri"/>
+                        </a:rPr>
+                        <a:t>StandardScaler</a:t>
+                      </a:r>
+                    </a:p>
+                  </a:txBody>
+                  <a:tcPr marL="54864" marR="54864" marT="18288" marB="18288">
+                    <a:solidFill>
+                      <a:srgbClr val="FFFFFF"/>
+                    </a:solidFill>
+                  </a:tcPr>
+                </a:tc>
+                <a:tc>
+                  <a:txBody>
+                    <a:bodyPr wrap="square"/>
+                    <a:lstStyle/>
+                    <a:p>
+                      <a:r>
+                        <a:rPr sz="1300">
+                          <a:solidFill>
+                            <a:srgbClr val="1B263B"/>
+                          </a:solidFill>
+                          <a:latin typeface="Calibri"/>
+                        </a:rPr>
+                        <a:t>RobustScaler</a:t>
+                      </a:r>
+                    </a:p>
+                  </a:txBody>
+                  <a:tcPr marL="54864" marR="54864" marT="18288" marB="18288">
+                    <a:solidFill>
+                      <a:srgbClr val="FFFFFF"/>
+                    </a:solidFill>
+                  </a:tcPr>
+                </a:tc>
+              </a:tr>
+              <a:tr h="457200">
+                <a:tc>
+                  <a:txBody>
+                    <a:bodyPr wrap="square"/>
+                    <a:lstStyle/>
+                    <a:p>
+                      <a:r>
+                        <a:rPr sz="1300">
+                          <a:solidFill>
+                            <a:srgbClr val="1B263B"/>
+                          </a:solidFill>
+                          <a:latin typeface="Calibri"/>
+                        </a:rPr>
+                        <a:t>Outliers / skew</a:t>
+                      </a:r>
+                    </a:p>
+                  </a:txBody>
+                  <a:tcPr marL="54864" marR="54864" marT="18288" marB="18288">
+                    <a:solidFill>
+                      <a:srgbClr val="ECF0F3"/>
+                    </a:solidFill>
+                  </a:tcPr>
+                </a:tc>
+                <a:tc>
+                  <a:txBody>
+                    <a:bodyPr wrap="square"/>
+                    <a:lstStyle/>
+                    <a:p>
+                      <a:r>
+                        <a:rPr sz="1300">
+                          <a:solidFill>
+                            <a:srgbClr val="1B263B"/>
+                          </a:solidFill>
+                          <a:latin typeface="Calibri"/>
+                        </a:rPr>
+                        <a:t>none</a:t>
+                      </a:r>
+                    </a:p>
+                  </a:txBody>
+                  <a:tcPr marL="54864" marR="54864" marT="18288" marB="18288">
+                    <a:solidFill>
+                      <a:srgbClr val="ECF0F3"/>
+                    </a:solidFill>
+                  </a:tcPr>
+                </a:tc>
+                <a:tc>
+                  <a:txBody>
+                    <a:bodyPr wrap="square"/>
+                    <a:lstStyle/>
+                    <a:p>
+                      <a:r>
+                        <a:rPr sz="1300">
+                          <a:solidFill>
+                            <a:srgbClr val="1B263B"/>
+                          </a:solidFill>
+                          <a:latin typeface="Calibri"/>
+                        </a:rPr>
+                        <a:t>none</a:t>
+                      </a:r>
+                    </a:p>
+                  </a:txBody>
+                  <a:tcPr marL="54864" marR="54864" marT="18288" marB="18288">
+                    <a:solidFill>
+                      <a:srgbClr val="ECF0F3"/>
+                    </a:solidFill>
+                  </a:tcPr>
+                </a:tc>
+                <a:tc>
+                  <a:txBody>
+                    <a:bodyPr wrap="square"/>
+                    <a:lstStyle/>
+                    <a:p>
+                      <a:r>
+                        <a:rPr sz="1300">
+                          <a:solidFill>
+                            <a:srgbClr val="1B263B"/>
+                          </a:solidFill>
+                          <a:latin typeface="Calibri"/>
+                        </a:rPr>
+                        <a:t>IQR cap + log1p</a:t>
+                      </a:r>
+                    </a:p>
+                  </a:txBody>
+                  <a:tcPr marL="54864" marR="54864" marT="18288" marB="18288">
+                    <a:solidFill>
+                      <a:srgbClr val="ECF0F3"/>
+                    </a:solidFill>
+                  </a:tcPr>
+                </a:tc>
+              </a:tr>
+              <a:tr h="457200">
+                <a:tc>
+                  <a:txBody>
+                    <a:bodyPr wrap="square"/>
+                    <a:lstStyle/>
+                    <a:p>
+                      <a:r>
+                        <a:rPr sz="1300">
+                          <a:solidFill>
+                            <a:srgbClr val="1B263B"/>
+                          </a:solidFill>
+                          <a:latin typeface="Calibri"/>
+                        </a:rPr>
+                        <a:t>Drop ID / junk cols</a:t>
+                      </a:r>
+                    </a:p>
+                  </a:txBody>
+                  <a:tcPr marL="54864" marR="54864" marT="18288" marB="18288">
+                    <a:solidFill>
+                      <a:srgbClr val="FFFFFF"/>
+                    </a:solidFill>
+                  </a:tcPr>
+                </a:tc>
+                <a:tc>
+                  <a:txBody>
+                    <a:bodyPr wrap="square"/>
+                    <a:lstStyle/>
+                    <a:p>
+                      <a:r>
+                        <a:rPr sz="1300">
+                          <a:solidFill>
+                            <a:srgbClr val="1B263B"/>
+                          </a:solidFill>
+                          <a:latin typeface="Calibri"/>
+                        </a:rPr>
+                        <a:t>no</a:t>
+                      </a:r>
+                    </a:p>
+                  </a:txBody>
+                  <a:tcPr marL="54864" marR="54864" marT="18288" marB="18288">
+                    <a:solidFill>
+                      <a:srgbClr val="FFFFFF"/>
+                    </a:solidFill>
+                  </a:tcPr>
+                </a:tc>
+                <a:tc>
+                  <a:txBody>
+                    <a:bodyPr wrap="square"/>
+                    <a:lstStyle/>
+                    <a:p>
+                      <a:r>
+                        <a:rPr sz="1300">
+                          <a:solidFill>
+                            <a:srgbClr val="1B263B"/>
+                          </a:solidFill>
+                          <a:latin typeface="Calibri"/>
+                        </a:rPr>
+                        <a:t>no</a:t>
+                      </a:r>
+                    </a:p>
+                  </a:txBody>
+                  <a:tcPr marL="54864" marR="54864" marT="18288" marB="18288">
+                    <a:solidFill>
+                      <a:srgbClr val="FFFFFF"/>
+                    </a:solidFill>
+                  </a:tcPr>
+                </a:tc>
+                <a:tc>
+                  <a:txBody>
+                    <a:bodyPr wrap="square"/>
+                    <a:lstStyle/>
+                    <a:p>
+                      <a:r>
+                        <a:rPr sz="1300">
+                          <a:solidFill>
+                            <a:srgbClr val="1B263B"/>
+                          </a:solidFill>
+                          <a:latin typeface="Calibri"/>
+                        </a:rPr>
+                        <a:t>yes</a:t>
+                      </a:r>
+                    </a:p>
+                  </a:txBody>
+                  <a:tcPr marL="54864" marR="54864" marT="18288" marB="18288">
+                    <a:solidFill>
+                      <a:srgbClr val="FFFFFF"/>
+                    </a:solidFill>
+                  </a:tcPr>
+                </a:tc>
+              </a:tr>
+              <a:tr h="457200">
+                <a:tc>
+                  <a:txBody>
+                    <a:bodyPr wrap="square"/>
+                    <a:lstStyle/>
+                    <a:p>
+                      <a:r>
+                        <a:rPr sz="1300">
+                          <a:solidFill>
+                            <a:srgbClr val="1B263B"/>
+                          </a:solidFill>
+                          <a:latin typeface="Calibri"/>
+                        </a:rPr>
+                        <a:t>Knows column meaning</a:t>
+                      </a:r>
+                    </a:p>
+                  </a:txBody>
+                  <a:tcPr marL="54864" marR="54864" marT="18288" marB="18288">
+                    <a:solidFill>
+                      <a:srgbClr val="ECF0F3"/>
+                    </a:solidFill>
+                  </a:tcPr>
+                </a:tc>
+                <a:tc>
+                  <a:txBody>
+                    <a:bodyPr wrap="square"/>
+                    <a:lstStyle/>
+                    <a:p>
+                      <a:r>
+                        <a:rPr sz="1300">
+                          <a:solidFill>
+                            <a:srgbClr val="1B263B"/>
+                          </a:solidFill>
+                          <a:latin typeface="Calibri"/>
+                        </a:rPr>
+                        <a:t>no</a:t>
+                      </a:r>
+                    </a:p>
+                  </a:txBody>
+                  <a:tcPr marL="54864" marR="54864" marT="18288" marB="18288">
+                    <a:solidFill>
+                      <a:srgbClr val="ECF0F3"/>
+                    </a:solidFill>
+                  </a:tcPr>
+                </a:tc>
+                <a:tc>
+                  <a:txBody>
+                    <a:bodyPr wrap="square"/>
+                    <a:lstStyle/>
+                    <a:p>
+                      <a:r>
+                        <a:rPr sz="1300">
+                          <a:solidFill>
+                            <a:srgbClr val="1B263B"/>
+                          </a:solidFill>
+                          <a:latin typeface="Calibri"/>
+                        </a:rPr>
+                        <a:t>no</a:t>
+                      </a:r>
+                    </a:p>
+                  </a:txBody>
+                  <a:tcPr marL="54864" marR="54864" marT="18288" marB="18288">
+                    <a:solidFill>
+                      <a:srgbClr val="ECF0F3"/>
+                    </a:solidFill>
+                  </a:tcPr>
+                </a:tc>
+                <a:tc>
+                  <a:txBody>
+                    <a:bodyPr wrap="square"/>
+                    <a:lstStyle/>
+                    <a:p>
+                      <a:r>
+                        <a:rPr sz="1300">
+                          <a:solidFill>
+                            <a:srgbClr val="1B263B"/>
+                          </a:solidFill>
+                          <a:latin typeface="Calibri"/>
+                        </a:rPr>
+                        <a:t>yes (sub-types)</a:t>
+                      </a:r>
+                    </a:p>
+                  </a:txBody>
+                  <a:tcPr marL="54864" marR="54864" marT="18288" marB="18288">
+                    <a:solidFill>
+                      <a:srgbClr val="ECF0F3"/>
+                    </a:solidFill>
+                  </a:tcPr>
+                </a:tc>
+              </a:tr>
+            </a:tbl>
+          </a:graphicData>
+        </a:graphic>
+      </p:graphicFrame>
+      <p:sp>
+        <p:nvSpPr>
+          <p:cNvPr id="5" name="TextBox 4"/>
+          <p:cNvSpPr txBox="1"/>
+          <p:nvPr/>
+        </p:nvSpPr>
+        <p:spPr>
+          <a:xfrm>
+            <a:off x="640080" y="6309360"/>
+            <a:ext cx="10972800" cy="457200"/>
+          </a:xfrm>
+          <a:prstGeom prst="rect">
+            <a:avLst/>
+          </a:prstGeom>
+          <a:noFill/>
+        </p:spPr>
+        <p:txBody>
+          <a:bodyPr wrap="square">
+            <a:spAutoFit/>
+          </a:bodyPr>
+          <a:lstStyle/>
+          <a:p>
+            <a:r>
+              <a:rPr sz="1200" i="1">
+                <a:solidFill>
+                  <a:srgbClr val="555F6B"/>
+                </a:solidFill>
+              </a:rPr>
+              <a:t>A FAIR baseline already does the two things that matter most — proper encoding + scaling. That is what AUDA must beat.</a:t>
             </a:r>
           </a:p>
         </p:txBody>
